--- a/Curriculo/Fase2_Basico1/decks/Basico1_S06_Kiran.pptx
+++ b/Curriculo/Fase2_Basico1/decks/Basico1_S06_Kiran.pptx
@@ -137,7 +137,7 @@
   <p:extLst>
     <p:ext uri="{521415D9-36F7-43E2-AB2F-B90AF26B5E84}">
       <p14:sectionLst xmlns:p14="http://schemas.microsoft.com/office/powerpoint/2010/main">
-        <p14:section name="Semana 6" id="{4E93251F-76AD-EA96-4E88-B814B1C55DD3}">
+        <p14:section name="Semana 6" id="{D60ECDAA-D387-98D8-279E-702D00F3429B}">
           <p14:sldIdLst>
             <p14:sldId id="256"/>
             <p14:sldId id="257"/>
@@ -206,7 +206,7 @@
     </p:spTree>
     <p:extLst>
       <p:ext uri="{BB962C8B-B14F-4D97-AF65-F5344CB8AC3E}">
-        <p14:creationId xmlns:p14="http://schemas.microsoft.com/office/powerpoint/2010/main" val="3139004754"/>
+        <p14:creationId xmlns:p14="http://schemas.microsoft.com/office/powerpoint/2010/main" val="1482446098"/>
       </p:ext>
     </p:extLst>
   </p:cSld>
@@ -1065,7 +1065,7 @@
             <a:r>
               <a:rPr lang="en-US" dirty="0"/>
               <a:t>'가요 o 와요 funciona igual que en español. Si estoy en mi casa y te llamo: ¿Vienes? → 지금 와요? Y tú, que estás en la calle: ¡Ya voy! → 네, 지금 가요!' 따라 하세요 dos veces; divide la sala: una mitad pregunta, la otra responde. 'Ojo: 와! solito es ¡guau!, como en el diálogo; 와요 sí es viene.'
-Imagen sugerida: Una casa con alguien que llama por teléfono y una persona en la calle con una flecha hacia la casa
+Imagen: incluida (dibujo de la casa).
 Fuente: Nueva
 Lámina 15</a:t>
             </a:r>
@@ -1244,7 +1244,7 @@
             <a:r>
               <a:rPr lang="en-US" dirty="0"/>
               <a:t>20:18–20:20 (2 min). 학교에 가요. 그리고 학원에 가요. (dos veces) 따라 하세요. 'Muchos estudiantes en Corea, después del colegio, van al 학원; nosotros somos un 학원 de coreano, pero online.' Pregunta: '¿Hay algo parecido en sus países?' 빨리빨리 solo si alguien lo menciona, como autoironía. Gancho opcional del 수능 (jue 19 nov, hora de Corea), una línea.
-Imagen sugerida: Edificio con carteles de 학원 en una calle de noche, sin caras de menores identificables
+Imagen: incluida (dibujo de la casa).
 Fuente: Nueva
 Lámina 17</a:t>
             </a:r>
@@ -1334,7 +1334,7 @@
             <a:r>
               <a:rPr lang="en-US" dirty="0"/>
               <a:t>20:00–20:05 (con L3). 'Arrancamos con el quiz de la semana 5. Miren el dibujo del escritorio y respondan los 5 en un solo mensaje, numerados. Tienen dos minutos. Cuando diga 하나, 둘, 셋, todos aprietan enviar a la vez.' Una sola duda de la tarea de la S5 (foto del escritorio; error típico: 책이 책상 위 있어요, sin 에), en 20 segundos.
-Imagen sugerida: Dibujo del escritorio: computador encima del escritorio; al lado del computador, una taza de café; una silla con un libro encima; debajo de la silla, un bolso; sin paraguas
+Imagen: incluida (dibujo de la casa).
 Fuente: Nueva (si la hoja de la lección 5 trae un dibujo parecido, se reutiliza)
 Lámina 2</a:t>
             </a:r>
@@ -1958,7 +1958,7 @@
             <a:r>
               <a:rPr lang="en-US" dirty="0"/>
               <a:t>20:28–20:31 (3 min). Modela: [A], 어디에 가요? → A elige un ícono: 카페에 가요. → 그리고 뭐 해요? → 커피 마셔요. → 잘했어요! Para pasar el turno, en español: 'Ahora tú le preguntas a [B]' (no uses 한테 ni 물어보세요). Cadena de 5–6 alumnos.
-Imagen sugerida: 10 íconos de lugares numerados (casa, colegio, oficina, café, restaurante, parque, hospital con cruz azul, banco, academia, Corea)
+Imagen: incluida (dibujo de la casa).
 Fuente: A1_Nivel_1/06_Ubicacion/Sesion_06_Ubicacion.pptx lám. 7 (sin 백화점, 영화관, 시장 ni romanización; + 학원 y 한국)
 Lámina 20</a:t>
             </a:r>
@@ -2315,7 +2315,7 @@
             <a:r>
               <a:rPr lang="en-US" dirty="0"/>
               <a:t>Corrige en voz alta (1 min). Antes de revelar la 3 pregunta '¿termina en 받침?': 책, ㄱ: sí → 이 (no des la respuesta: pregunta por el 받침). Felicita por nombre: 잘했어요, ___! Anota x/5 en la hoja del curso.
-Imagen sugerida: El mismo dibujo del escritorio de L2
+Imagen: incluida (dibujo de la casa).
 Fuente: Nueva
 Lámina 3</a:t>
             </a:r>
@@ -2672,7 +2672,7 @@
             <a:r>
               <a:rPr lang="en-US" dirty="0"/>
               <a:t>20:05–20:08 (con L6). 'Hoy les cuento mi día. No les voy a traducir: escuchen, miren la imagen y escriban en el chat, en español, qué hago.' Di cada frase dos veces, con gesto: 일어나요. · 매일 커피 마셔요. · 공원에 가요. 그리고 운동해요. · 집에 가요. 그리고 밥 먹어요. · 지금 일해요! 하하. Si tu día es distinto, cambia el verbo o el lugar, no la estructura.
-Imagen sugerida: 5 imágenes numeradas, sin texto: sol y alguien que se estira · taza · parque y zapatillas · plato de arroz en casa · pantalla de Zoom con alumnos (ilustraciones de banco; opcional, una foto de Kiran)
+Imagen: incluida (dibujo de la casa).
 Fuente: Nueva
 Lámina 5</a:t>
             </a:r>
@@ -2762,7 +2762,7 @@
             <a:r>
               <a:rPr lang="en-US" dirty="0"/>
               <a:t>Revela después de las respuestas del chat y confírmalas: '¡Exacto! 일해요 es trabajo. Y ahora estoy trabajando… con ustedes.' Si vas atrasada, usa solo las imágenes 2, 3 y 5.
-Imagen sugerida: Las mismas 5 imágenes de L5, ahora con las frases
+Imagen: incluida (dibujo de la casa).
 Fuente: Nueva
 Lámina 6</a:t>
             </a:r>
@@ -2941,7 +2941,7 @@
             <a:r>
               <a:rPr lang="en-US" dirty="0"/>
               <a:t>Presenta cada verbo con su gesto y di 따라 하세요 después de cada uno. Gestos (los mismos toda la clase): 가다 dos dedos que caminan alejándose · 오다 mano que llama hacia ti · 먹다 palillos a la boca · 마시다 taza a la boca · 보다 dos dedos desde los ojos hacia adelante · 자다 manos juntas bajo la mejilla.
-Imagen sugerida: Ícono del gesto de cada verbo
+Imagen: incluida (dibujo de la casa).
 Fuente: A1_Nivel_1/04_Vida_Diaria/Sesion_04_Vida_Diaria.pptx lám. 46–47 (sin 읽다, 쓰다, 듣다, 좋아하다, 만나다, 청소하다, 말하다, 살다)
 Lámina 8a</a:t>
             </a:r>
@@ -3031,7 +3031,7 @@
             <a:r>
               <a:rPr lang="en-US" dirty="0"/>
               <a:t>Gestos: 공부하다 escribir en la palma · 일하다 teclear · 운동하다 brazos de trote · 쉬다 manos detrás de la nuca · 요리하다 revolver una olla · 일어나다 estirarse y bostezar. Los tres últimos son del tema (se usan y se reconocen). 따라 하세요 después de cada uno; ojo con 쉬어요: la ㅟ en un golpe, como la 'ui' de cuidado.
-Imagen sugerida: Ícono del gesto de cada verbo
+Imagen: incluida (dibujo de la casa).
 Fuente: A1_Nivel_1/04_Vida_Diaria/Sesion_04_Vida_Diaria.pptx lám. 46–47 (filtrados por la lista C)
 Lámina 8b</a:t>
             </a:r>
@@ -4232,7 +4232,7 @@
         <p:spPr>
           <a:xfrm>
             <a:off x="548640" y="1325880"/>
-            <a:ext cx="11064240" cy="457200"/>
+            <a:ext cx="11091672" cy="457200"/>
           </a:xfrm>
           <a:prstGeom prst="rect">
             <a:avLst/>
@@ -4383,7 +4383,7 @@
               <a:buNone/>
             </a:pPr>
             <a:r>
-              <a:rPr lang="ko-KR" altLang="en-US" sz="8800" b="1" dirty="0">
+              <a:rPr lang="ko-KR" altLang="en-US" sz="5900" b="1" dirty="0">
                 <a:solidFill>
                   <a:srgbClr val="4236F6"/>
                 </a:solidFill>
@@ -4393,7 +4393,7 @@
               </a:rPr>
               <a:t>가요</a:t>
             </a:r>
-            <a:endParaRPr lang="en-US" sz="8800" dirty="0"/>
+            <a:endParaRPr lang="en-US" sz="5900" dirty="0"/>
           </a:p>
         </p:txBody>
       </p:sp>
@@ -4489,7 +4489,7 @@
               <a:buNone/>
             </a:pPr>
             <a:r>
-              <a:rPr lang="ko-KR" altLang="en-US" sz="8800" b="1" dirty="0">
+              <a:rPr lang="ko-KR" altLang="en-US" sz="5900" b="1" dirty="0">
                 <a:solidFill>
                   <a:srgbClr val="4236F6"/>
                 </a:solidFill>
@@ -4499,7 +4499,7 @@
               </a:rPr>
               <a:t>와요</a:t>
             </a:r>
-            <a:endParaRPr lang="en-US" sz="8800" dirty="0"/>
+            <a:endParaRPr lang="en-US" sz="5900" dirty="0"/>
           </a:p>
         </p:txBody>
       </p:sp>
@@ -4595,7 +4595,7 @@
               <a:buNone/>
             </a:pPr>
             <a:r>
-              <a:rPr lang="ko-KR" altLang="en-US" sz="8800" b="1" dirty="0">
+              <a:rPr lang="ko-KR" altLang="en-US" sz="5900" b="1" dirty="0">
                 <a:solidFill>
                   <a:srgbClr val="4236F6"/>
                 </a:solidFill>
@@ -4605,7 +4605,7 @@
               </a:rPr>
               <a:t>봐요</a:t>
             </a:r>
-            <a:endParaRPr lang="en-US" sz="8800" dirty="0"/>
+            <a:endParaRPr lang="en-US" sz="5900" dirty="0"/>
           </a:p>
         </p:txBody>
       </p:sp>
@@ -4883,7 +4883,7 @@
         <p:spPr>
           <a:xfrm>
             <a:off x="548640" y="1325880"/>
-            <a:ext cx="11064240" cy="457200"/>
+            <a:ext cx="11091672" cy="457200"/>
           </a:xfrm>
           <a:prstGeom prst="rect">
             <a:avLst/>
@@ -4921,7 +4921,7 @@
           <p:nvPr>
             <p:extLst>
               <p:ext uri="{D42A27DB-BD31-4B8C-83A1-F6EECF244321}">
-                <p14:modId xmlns:p14="http://schemas.microsoft.com/office/powerpoint/2010/main" val="2274288023"/>
+                <p14:modId xmlns:p14="http://schemas.microsoft.com/office/powerpoint/2010/main" val="1713922470"/>
               </p:ext>
             </p:extLst>
           </p:nvPr>
@@ -8203,7 +8203,7 @@
         <p:spPr>
           <a:xfrm>
             <a:off x="548640" y="1325880"/>
-            <a:ext cx="11064240" cy="548640"/>
+            <a:ext cx="11091672" cy="548640"/>
           </a:xfrm>
           <a:prstGeom prst="rect">
             <a:avLst/>
@@ -8548,7 +8548,7 @@
               <a:buNone/>
             </a:pPr>
             <a:r>
-              <a:rPr lang="ko-KR" altLang="en-US" sz="2400" dirty="0">
+              <a:rPr lang="ko-KR" altLang="en-US" sz="2300" dirty="0">
                 <a:solidFill>
                   <a:srgbClr val="14142B"/>
                 </a:solidFill>
@@ -8559,7 +8559,7 @@
               <a:t>지수</a:t>
             </a:r>
             <a:r>
-              <a:rPr lang="en-US" sz="2400" dirty="0">
+              <a:rPr lang="en-US" sz="2300" dirty="0">
                 <a:solidFill>
                   <a:srgbClr val="14142B"/>
                 </a:solidFill>
@@ -8567,7 +8567,7 @@
               <a:t>: </a:t>
             </a:r>
             <a:r>
-              <a:rPr lang="ko-KR" altLang="en-US" sz="2400" dirty="0">
+              <a:rPr lang="ko-KR" altLang="en-US" sz="2300" dirty="0">
                 <a:solidFill>
                   <a:srgbClr val="14142B"/>
                 </a:solidFill>
@@ -8578,7 +8578,7 @@
               <a:t>안녕하세요</a:t>
             </a:r>
             <a:r>
-              <a:rPr lang="en-US" sz="2400" dirty="0">
+              <a:rPr lang="en-US" sz="2300" dirty="0">
                 <a:solidFill>
                   <a:srgbClr val="14142B"/>
                 </a:solidFill>
@@ -8586,7 +8586,7 @@
               <a:t>! </a:t>
             </a:r>
             <a:r>
-              <a:rPr lang="ko-KR" altLang="en-US" sz="2400" dirty="0">
+              <a:rPr lang="ko-KR" altLang="en-US" sz="2300" dirty="0">
                 <a:solidFill>
                   <a:srgbClr val="14142B"/>
                 </a:solidFill>
@@ -8597,14 +8597,14 @@
               <a:t>지금 뭐 해요</a:t>
             </a:r>
             <a:r>
-              <a:rPr lang="en-US" sz="2400" dirty="0">
+              <a:rPr lang="en-US" sz="2300" dirty="0">
                 <a:solidFill>
                   <a:srgbClr val="14142B"/>
                 </a:solidFill>
               </a:rPr>
               <a:t>?</a:t>
             </a:r>
-            <a:endParaRPr lang="en-US" sz="2400" dirty="0"/>
+            <a:endParaRPr lang="en-US" sz="2300" dirty="0"/>
           </a:p>
         </p:txBody>
       </p:sp>
@@ -8763,7 +8763,7 @@
               <a:buNone/>
             </a:pPr>
             <a:r>
-              <a:rPr lang="ko-KR" altLang="en-US" sz="2400" dirty="0">
+              <a:rPr lang="ko-KR" altLang="en-US" sz="2300" dirty="0">
                 <a:solidFill>
                   <a:srgbClr val="14142B"/>
                 </a:solidFill>
@@ -8774,7 +8774,7 @@
               <a:t>마르코</a:t>
             </a:r>
             <a:r>
-              <a:rPr lang="en-US" sz="2400" dirty="0">
+              <a:rPr lang="en-US" sz="2300" dirty="0">
                 <a:solidFill>
                   <a:srgbClr val="14142B"/>
                 </a:solidFill>
@@ -8782,7 +8782,7 @@
               <a:t>: </a:t>
             </a:r>
             <a:r>
-              <a:rPr lang="ko-KR" altLang="en-US" sz="2400" dirty="0">
+              <a:rPr lang="ko-KR" altLang="en-US" sz="2300" dirty="0">
                 <a:solidFill>
                   <a:srgbClr val="14142B"/>
                 </a:solidFill>
@@ -8793,7 +8793,7 @@
               <a:t>커피 마셔요</a:t>
             </a:r>
             <a:r>
-              <a:rPr lang="en-US" sz="2400" dirty="0">
+              <a:rPr lang="en-US" sz="2300" dirty="0">
                 <a:solidFill>
                   <a:srgbClr val="14142B"/>
                 </a:solidFill>
@@ -8801,7 +8801,7 @@
               <a:t>. </a:t>
             </a:r>
             <a:r>
-              <a:rPr lang="ko-KR" altLang="en-US" sz="2400" dirty="0">
+              <a:rPr lang="ko-KR" altLang="en-US" sz="2300" dirty="0">
                 <a:solidFill>
                   <a:srgbClr val="14142B"/>
                 </a:solidFill>
@@ -8812,14 +8812,14 @@
               <a:t>그리고 한국어 공부해요</a:t>
             </a:r>
             <a:r>
-              <a:rPr lang="en-US" sz="2400" dirty="0">
+              <a:rPr lang="en-US" sz="2300" dirty="0">
                 <a:solidFill>
                   <a:srgbClr val="14142B"/>
                 </a:solidFill>
               </a:rPr>
               <a:t>.</a:t>
             </a:r>
-            <a:endParaRPr lang="en-US" sz="2400" dirty="0"/>
+            <a:endParaRPr lang="en-US" sz="2300" dirty="0"/>
           </a:p>
         </p:txBody>
       </p:sp>
@@ -9193,7 +9193,7 @@
               <a:buNone/>
             </a:pPr>
             <a:r>
-              <a:rPr lang="ko-KR" altLang="en-US" sz="2400" dirty="0">
+              <a:rPr lang="ko-KR" altLang="en-US" sz="2300" dirty="0">
                 <a:solidFill>
                   <a:srgbClr val="14142B"/>
                 </a:solidFill>
@@ -9204,7 +9204,7 @@
               <a:t>마르코</a:t>
             </a:r>
             <a:r>
-              <a:rPr lang="en-US" sz="2400" dirty="0">
+              <a:rPr lang="en-US" sz="2300" dirty="0">
                 <a:solidFill>
                   <a:srgbClr val="14142B"/>
                 </a:solidFill>
@@ -9212,7 +9212,7 @@
               <a:t>: </a:t>
             </a:r>
             <a:r>
-              <a:rPr lang="ko-KR" altLang="en-US" sz="2400" dirty="0">
+              <a:rPr lang="ko-KR" altLang="en-US" sz="2300" dirty="0">
                 <a:solidFill>
                   <a:srgbClr val="14142B"/>
                 </a:solidFill>
@@ -9223,7 +9223,7 @@
               <a:t>아니요</a:t>
             </a:r>
             <a:r>
-              <a:rPr lang="en-US" sz="2400" dirty="0">
+              <a:rPr lang="en-US" sz="2300" dirty="0">
                 <a:solidFill>
                   <a:srgbClr val="14142B"/>
                 </a:solidFill>
@@ -9231,7 +9231,7 @@
               <a:t>, </a:t>
             </a:r>
             <a:r>
-              <a:rPr lang="ko-KR" altLang="en-US" sz="2400" dirty="0">
+              <a:rPr lang="ko-KR" altLang="en-US" sz="2300" dirty="0">
                 <a:solidFill>
                   <a:srgbClr val="14142B"/>
                 </a:solidFill>
@@ -9242,7 +9242,7 @@
               <a:t>오늘 쉬어요</a:t>
             </a:r>
             <a:r>
-              <a:rPr lang="en-US" sz="2400" dirty="0">
+              <a:rPr lang="en-US" sz="2300" dirty="0">
                 <a:solidFill>
                   <a:srgbClr val="14142B"/>
                 </a:solidFill>
@@ -9250,7 +9250,7 @@
               <a:t>! </a:t>
             </a:r>
             <a:r>
-              <a:rPr lang="ko-KR" altLang="en-US" sz="2400" dirty="0">
+              <a:rPr lang="ko-KR" altLang="en-US" sz="2300" dirty="0">
                 <a:solidFill>
                   <a:srgbClr val="14142B"/>
                 </a:solidFill>
@@ -9261,7 +9261,7 @@
               <a:t>하하</a:t>
             </a:r>
             <a:r>
-              <a:rPr lang="en-US" sz="2400" dirty="0">
+              <a:rPr lang="en-US" sz="2300" dirty="0">
                 <a:solidFill>
                   <a:srgbClr val="14142B"/>
                 </a:solidFill>
@@ -9269,7 +9269,7 @@
               <a:t>. </a:t>
             </a:r>
             <a:r>
-              <a:rPr lang="ko-KR" altLang="en-US" sz="2400" dirty="0">
+              <a:rPr lang="ko-KR" altLang="en-US" sz="2300" dirty="0">
                 <a:solidFill>
                   <a:srgbClr val="14142B"/>
                 </a:solidFill>
@@ -9280,14 +9280,14 @@
               <a:t>지금 어디에 가요</a:t>
             </a:r>
             <a:r>
-              <a:rPr lang="en-US" sz="2400" dirty="0">
+              <a:rPr lang="en-US" sz="2300" dirty="0">
                 <a:solidFill>
                   <a:srgbClr val="14142B"/>
                 </a:solidFill>
               </a:rPr>
               <a:t>?</a:t>
             </a:r>
-            <a:endParaRPr lang="en-US" sz="2400" dirty="0"/>
+            <a:endParaRPr lang="en-US" sz="2300" dirty="0"/>
           </a:p>
         </p:txBody>
       </p:sp>
@@ -9902,7 +9902,7 @@
         <p:spPr>
           <a:xfrm>
             <a:off x="548640" y="1325880"/>
-            <a:ext cx="11064240" cy="548640"/>
+            <a:ext cx="11091672" cy="548640"/>
           </a:xfrm>
           <a:prstGeom prst="rect">
             <a:avLst/>
@@ -10003,7 +10003,7 @@
         <p:spPr>
           <a:xfrm>
             <a:off x="1188720" y="1965960"/>
-            <a:ext cx="4462272" cy="868680"/>
+            <a:ext cx="4898989" cy="868680"/>
           </a:xfrm>
           <a:prstGeom prst="rect">
             <a:avLst/>
@@ -10089,8 +10089,8 @@
         </p:nvSpPr>
         <p:spPr>
           <a:xfrm>
-            <a:off x="5879592" y="2002536"/>
-            <a:ext cx="5760720" cy="795528"/>
+            <a:off x="6316309" y="2002536"/>
+            <a:ext cx="5324003" cy="795528"/>
           </a:xfrm>
           <a:prstGeom prst="roundRect">
             <a:avLst>
@@ -10116,8 +10116,8 @@
         </p:nvSpPr>
         <p:spPr>
           <a:xfrm>
-            <a:off x="5971032" y="2002536"/>
-            <a:ext cx="5577840" cy="795528"/>
+            <a:off x="6407749" y="2002536"/>
+            <a:ext cx="5141123" cy="795528"/>
           </a:xfrm>
           <a:prstGeom prst="rect">
             <a:avLst/>
@@ -10218,7 +10218,7 @@
         <p:spPr>
           <a:xfrm>
             <a:off x="1188720" y="2962656"/>
-            <a:ext cx="4462272" cy="868680"/>
+            <a:ext cx="4898989" cy="868680"/>
           </a:xfrm>
           <a:prstGeom prst="rect">
             <a:avLst/>
@@ -10304,8 +10304,8 @@
         </p:nvSpPr>
         <p:spPr>
           <a:xfrm>
-            <a:off x="5879592" y="2999232"/>
-            <a:ext cx="5760720" cy="795528"/>
+            <a:off x="6316309" y="2999232"/>
+            <a:ext cx="5324003" cy="795528"/>
           </a:xfrm>
           <a:prstGeom prst="roundRect">
             <a:avLst>
@@ -10331,8 +10331,8 @@
         </p:nvSpPr>
         <p:spPr>
           <a:xfrm>
-            <a:off x="5971032" y="2999232"/>
-            <a:ext cx="5577840" cy="795528"/>
+            <a:off x="6407749" y="2999232"/>
+            <a:ext cx="5141123" cy="795528"/>
           </a:xfrm>
           <a:prstGeom prst="rect">
             <a:avLst/>
@@ -10433,7 +10433,7 @@
         <p:spPr>
           <a:xfrm>
             <a:off x="1188720" y="3959352"/>
-            <a:ext cx="4462272" cy="868680"/>
+            <a:ext cx="4898989" cy="868680"/>
           </a:xfrm>
           <a:prstGeom prst="rect">
             <a:avLst/>
@@ -10557,8 +10557,8 @@
         </p:nvSpPr>
         <p:spPr>
           <a:xfrm>
-            <a:off x="5879592" y="3995928"/>
-            <a:ext cx="5760720" cy="795528"/>
+            <a:off x="6316309" y="3995928"/>
+            <a:ext cx="5324003" cy="795528"/>
           </a:xfrm>
           <a:prstGeom prst="roundRect">
             <a:avLst>
@@ -10584,8 +10584,8 @@
         </p:nvSpPr>
         <p:spPr>
           <a:xfrm>
-            <a:off x="5971032" y="3995928"/>
-            <a:ext cx="5577840" cy="795528"/>
+            <a:off x="6407749" y="3995928"/>
+            <a:ext cx="5141123" cy="795528"/>
           </a:xfrm>
           <a:prstGeom prst="rect">
             <a:avLst/>
@@ -10603,14 +10603,14 @@
               <a:buNone/>
             </a:pPr>
             <a:r>
-              <a:rPr lang="en-US" sz="1800" b="1" dirty="0">
+              <a:rPr lang="en-US" sz="1700" b="1" dirty="0">
                 <a:solidFill>
                   <a:srgbClr val="FFFFFF"/>
                 </a:solidFill>
               </a:rPr>
               <a:t>¡Gracias! ¡Ánimo con el coreano! Chao.</a:t>
             </a:r>
-            <a:endParaRPr lang="en-US" sz="1800" dirty="0"/>
+            <a:endParaRPr lang="en-US" sz="1700" dirty="0"/>
           </a:p>
         </p:txBody>
       </p:sp>
@@ -10686,7 +10686,7 @@
         <p:spPr>
           <a:xfrm>
             <a:off x="1188720" y="4956048"/>
-            <a:ext cx="4462272" cy="868680"/>
+            <a:ext cx="4898989" cy="868680"/>
           </a:xfrm>
           <a:prstGeom prst="rect">
             <a:avLst/>
@@ -10753,8 +10753,8 @@
         </p:nvSpPr>
         <p:spPr>
           <a:xfrm>
-            <a:off x="5879592" y="4992624"/>
-            <a:ext cx="5760720" cy="795528"/>
+            <a:off x="6316309" y="4992624"/>
+            <a:ext cx="5324003" cy="795528"/>
           </a:xfrm>
           <a:prstGeom prst="roundRect">
             <a:avLst>
@@ -10780,8 +10780,8 @@
         </p:nvSpPr>
         <p:spPr>
           <a:xfrm>
-            <a:off x="5971032" y="4992624"/>
-            <a:ext cx="5577840" cy="795528"/>
+            <a:off x="6407749" y="4992624"/>
+            <a:ext cx="5141123" cy="795528"/>
           </a:xfrm>
           <a:prstGeom prst="rect">
             <a:avLst/>
@@ -11267,7 +11267,7 @@
         <p:spPr>
           <a:xfrm>
             <a:off x="548640" y="1325880"/>
-            <a:ext cx="11064240" cy="457200"/>
+            <a:ext cx="11091672" cy="457200"/>
           </a:xfrm>
           <a:prstGeom prst="rect">
             <a:avLst/>
@@ -11930,16 +11930,40 @@
           </a:p>
         </p:txBody>
       </p:sp>
-      <p:sp>
-        <p:nvSpPr>
-          <p:cNvPr id="3" name="panel"/>
+      <p:pic>
+        <p:nvPicPr>
+          <p:cNvPr id="3" name="imagen" descr="C:\Users\Chingu\AppData\Local\Temp\claude\C--Users-Chingu-Desktop-ACADEMIASEULWEB\d4111e1b-5523-44ea-97b2-b1a1d9545b9e\scratchpad\decks\cache\img_eb9f6acb0ca9cbbe.png"/>
+          <p:cNvPicPr>
+            <a:picLocks noChangeAspect="1"/>
+          </p:cNvPicPr>
+          <p:nvPr/>
+        </p:nvPicPr>
+        <p:blipFill>
+          <a:blip r:embed="rId3"/>
+          <a:stretch>
+            <a:fillRect/>
+          </a:stretch>
+        </p:blipFill>
+        <p:spPr>
+          <a:xfrm>
+            <a:off x="7754112" y="1508760"/>
+            <a:ext cx="3886200" cy="4480560"/>
+          </a:xfrm>
+          <a:prstGeom prst="rect">
+            <a:avLst/>
+          </a:prstGeom>
+        </p:spPr>
+      </p:pic>
+      <p:sp>
+        <p:nvSpPr>
+          <p:cNvPr id="4" name="panel"/>
           <p:cNvSpPr/>
           <p:nvPr/>
         </p:nvSpPr>
         <p:spPr>
           <a:xfrm>
-            <a:off x="1280160" y="1645920"/>
-            <a:ext cx="9628632" cy="3108960"/>
+            <a:off x="548640" y="1645920"/>
+            <a:ext cx="6931152" cy="3108960"/>
           </a:xfrm>
           <a:prstGeom prst="roundRect">
             <a:avLst>
@@ -11959,14 +11983,14 @@
       </p:sp>
       <p:sp>
         <p:nvSpPr>
-          <p:cNvPr id="4" name="frase_ko"/>
+          <p:cNvPr id="5" name="frase_ko"/>
           <p:cNvSpPr txBox="1"/>
           <p:nvPr/>
         </p:nvSpPr>
         <p:spPr>
           <a:xfrm>
-            <a:off x="1463040" y="1828800"/>
-            <a:ext cx="9262872" cy="1828800"/>
+            <a:off x="731520" y="1828800"/>
+            <a:ext cx="6565392" cy="1828800"/>
           </a:xfrm>
           <a:prstGeom prst="rect">
             <a:avLst/>
@@ -11984,7 +12008,7 @@
               <a:buNone/>
             </a:pPr>
             <a:r>
-              <a:rPr lang="ko-KR" altLang="en-US" sz="5100" b="1" dirty="0">
+              <a:rPr lang="ko-KR" altLang="en-US" sz="5700" b="1" dirty="0">
                 <a:solidFill>
                   <a:srgbClr val="4236F6"/>
                 </a:solidFill>
@@ -11995,15 +12019,21 @@
               <a:t>지금 와요</a:t>
             </a:r>
             <a:r>
-              <a:rPr lang="en-US" sz="5100" b="1" dirty="0">
+              <a:rPr lang="en-US" sz="5700" b="1" dirty="0">
                 <a:solidFill>
                   <a:srgbClr val="4236F6"/>
                 </a:solidFill>
               </a:rPr>
-              <a:t>? — </a:t>
-            </a:r>
-            <a:r>
-              <a:rPr lang="ko-KR" altLang="en-US" sz="5100" b="1" dirty="0">
+              <a:t>? —</a:t>
+            </a:r>
+            <a:endParaRPr lang="en-US" sz="5700" dirty="0"/>
+          </a:p>
+          <a:p>
+            <a:pPr marL="0" indent="0" algn="ctr" eaLnBrk="1">
+              <a:buNone/>
+            </a:pPr>
+            <a:r>
+              <a:rPr lang="ko-KR" altLang="en-US" sz="5700" b="1" dirty="0">
                 <a:solidFill>
                   <a:srgbClr val="4236F6"/>
                 </a:solidFill>
@@ -12014,7 +12044,7 @@
               <a:t>네</a:t>
             </a:r>
             <a:r>
-              <a:rPr lang="en-US" sz="5100" b="1" dirty="0">
+              <a:rPr lang="en-US" sz="5700" b="1" dirty="0">
                 <a:solidFill>
                   <a:srgbClr val="4236F6"/>
                 </a:solidFill>
@@ -12022,7 +12052,7 @@
               <a:t>, </a:t>
             </a:r>
             <a:r>
-              <a:rPr lang="ko-KR" altLang="en-US" sz="5100" b="1" dirty="0">
+              <a:rPr lang="ko-KR" altLang="en-US" sz="5700" b="1" dirty="0">
                 <a:solidFill>
                   <a:srgbClr val="4236F6"/>
                 </a:solidFill>
@@ -12033,27 +12063,27 @@
               <a:t>지금 가요</a:t>
             </a:r>
             <a:r>
-              <a:rPr lang="en-US" sz="5100" b="1" dirty="0">
+              <a:rPr lang="en-US" sz="5700" b="1" dirty="0">
                 <a:solidFill>
                   <a:srgbClr val="4236F6"/>
                 </a:solidFill>
               </a:rPr>
               <a:t>!</a:t>
             </a:r>
-            <a:endParaRPr lang="en-US" sz="5100" dirty="0"/>
-          </a:p>
-        </p:txBody>
-      </p:sp>
-      <p:sp>
-        <p:nvSpPr>
-          <p:cNvPr id="5" name="Text 3"/>
+            <a:endParaRPr lang="en-US" sz="5700" dirty="0"/>
+          </a:p>
+        </p:txBody>
+      </p:sp>
+      <p:sp>
+        <p:nvSpPr>
+          <p:cNvPr id="6" name="Text 3"/>
           <p:cNvSpPr txBox="1"/>
           <p:nvPr/>
         </p:nvSpPr>
         <p:spPr>
           <a:xfrm>
-            <a:off x="1463040" y="3657600"/>
-            <a:ext cx="9262872" cy="822960"/>
+            <a:off x="1051560" y="3657600"/>
+            <a:ext cx="5742432" cy="822960"/>
           </a:xfrm>
           <a:prstGeom prst="rect">
             <a:avLst/>
@@ -12084,14 +12114,14 @@
       </p:sp>
       <p:sp>
         <p:nvSpPr>
-          <p:cNvPr id="6" name="lista"/>
+          <p:cNvPr id="7" name="lista"/>
           <p:cNvSpPr txBox="1"/>
           <p:nvPr/>
         </p:nvSpPr>
         <p:spPr>
           <a:xfrm>
-            <a:off x="1280160" y="4937760"/>
-            <a:ext cx="9628632" cy="1234440"/>
+            <a:off x="548640" y="4937760"/>
+            <a:ext cx="6931152" cy="1234440"/>
           </a:xfrm>
           <a:prstGeom prst="rect">
             <a:avLst/>
@@ -12397,8 +12427,8 @@
         </p:nvSpPr>
         <p:spPr>
           <a:xfrm>
-            <a:off x="1463040" y="3657600"/>
-            <a:ext cx="9262872" cy="822960"/>
+            <a:off x="1783080" y="3657600"/>
+            <a:ext cx="8439912" cy="822960"/>
           </a:xfrm>
           <a:prstGeom prst="rect">
             <a:avLst/>
@@ -12640,7 +12670,7 @@
         <p:spPr>
           <a:xfrm>
             <a:off x="548640" y="1325880"/>
-            <a:ext cx="6949440" cy="4846320"/>
+            <a:ext cx="5669280" cy="4846320"/>
           </a:xfrm>
           <a:prstGeom prst="rect">
             <a:avLst/>
@@ -12872,12 +12902,12 @@
         </p:nvSpPr>
         <p:spPr>
           <a:xfrm>
-            <a:off x="8001000" y="1417320"/>
-            <a:ext cx="3611880" cy="4480560"/>
+            <a:off x="6446520" y="1371600"/>
+            <a:ext cx="5193792" cy="4800600"/>
           </a:xfrm>
           <a:prstGeom prst="roundRect">
             <a:avLst>
-              <a:gd name="adj" fmla="val 6329"/>
+              <a:gd name="adj" fmla="val 4762"/>
             </a:avLst>
           </a:prstGeom>
           <a:solidFill>
@@ -12891,74 +12921,30 @@
           </a:ln>
         </p:spPr>
       </p:sp>
-      <p:sp>
-        <p:nvSpPr>
-          <p:cNvPr id="5" name="ko_grande"/>
-          <p:cNvSpPr txBox="1"/>
-          <p:nvPr/>
-        </p:nvSpPr>
-        <p:spPr>
-          <a:xfrm>
-            <a:off x="8092440" y="1874520"/>
-            <a:ext cx="3429000" cy="2926080"/>
+      <p:pic>
+        <p:nvPicPr>
+          <p:cNvPr id="5" name="imagen" descr="C:\Users\Chingu\AppData\Local\Temp\claude\C--Users-Chingu-Desktop-ACADEMIASEULWEB\d4111e1b-5523-44ea-97b2-b1a1d9545b9e\scratchpad\decks\cache\img_3b36587b867a303e.png"/>
+          <p:cNvPicPr>
+            <a:picLocks noChangeAspect="1"/>
+          </p:cNvPicPr>
+          <p:nvPr/>
+        </p:nvPicPr>
+        <p:blipFill>
+          <a:blip r:embed="rId3"/>
+          <a:stretch>
+            <a:fillRect/>
+          </a:stretch>
+        </p:blipFill>
+        <p:spPr>
+          <a:xfrm>
+            <a:off x="7040833" y="1463040"/>
+            <a:ext cx="4005165" cy="4617720"/>
           </a:xfrm>
           <a:prstGeom prst="rect">
             <a:avLst/>
           </a:prstGeom>
-          <a:noFill/>
-          <a:ln/>
-        </p:spPr>
-        <p:txBody>
-          <a:bodyPr wrap="square" lIns="0" tIns="0" rIns="0" bIns="0" rtlCol="0" anchor="ctr">
-            <a:normAutofit/>
-          </a:bodyPr>
-          <a:lstStyle/>
-          <a:p>
-            <a:pPr marL="0" indent="0" algn="ctr" eaLnBrk="1">
-              <a:buNone/>
-            </a:pPr>
-            <a:r>
-              <a:rPr lang="ko-KR" altLang="en-US" sz="2800" b="1" dirty="0">
-                <a:solidFill>
-                  <a:srgbClr val="4236F6"/>
-                </a:solidFill>
-                <a:latin typeface="Malgun Gothic" pitchFamily="34" charset="0"/>
-                <a:ea typeface="Malgun Gothic" pitchFamily="34" charset="-122"/>
-                <a:cs typeface="Malgun Gothic" pitchFamily="34" charset="-120"/>
-              </a:rPr>
-              <a:t>학교에 가요</a:t>
-            </a:r>
-            <a:r>
-              <a:rPr lang="en-US" sz="2800" b="1" dirty="0">
-                <a:solidFill>
-                  <a:srgbClr val="4236F6"/>
-                </a:solidFill>
-              </a:rPr>
-              <a:t>. </a:t>
-            </a:r>
-            <a:r>
-              <a:rPr lang="ko-KR" altLang="en-US" sz="2800" b="1" dirty="0">
-                <a:solidFill>
-                  <a:srgbClr val="4236F6"/>
-                </a:solidFill>
-                <a:latin typeface="Malgun Gothic" pitchFamily="34" charset="0"/>
-                <a:ea typeface="Malgun Gothic" pitchFamily="34" charset="-122"/>
-                <a:cs typeface="Malgun Gothic" pitchFamily="34" charset="-120"/>
-              </a:rPr>
-              <a:t>그리고 학원에 가요</a:t>
-            </a:r>
-            <a:r>
-              <a:rPr lang="en-US" sz="2800" b="1" dirty="0">
-                <a:solidFill>
-                  <a:srgbClr val="4236F6"/>
-                </a:solidFill>
-              </a:rPr>
-              <a:t>.</a:t>
-            </a:r>
-            <a:endParaRPr lang="en-US" sz="2800" dirty="0"/>
-          </a:p>
-        </p:txBody>
-      </p:sp>
+        </p:spPr>
+      </p:pic>
       <p:sp>
         <p:nvSpPr>
           <p:cNvPr id="25" name="Slide Number Placeholder 0"/>
@@ -13089,7 +13075,7 @@
         <p:spPr>
           <a:xfrm>
             <a:off x="548640" y="1325880"/>
-            <a:ext cx="6949440" cy="548640"/>
+            <a:ext cx="5669280" cy="548640"/>
           </a:xfrm>
           <a:prstGeom prst="rect">
             <a:avLst/>
@@ -13127,7 +13113,7 @@
         <p:spPr>
           <a:xfrm>
             <a:off x="548640" y="1965960"/>
-            <a:ext cx="6949440" cy="4206240"/>
+            <a:ext cx="5669280" cy="4206240"/>
           </a:xfrm>
           <a:prstGeom prst="rect">
             <a:avLst/>
@@ -13427,12 +13413,12 @@
         </p:nvSpPr>
         <p:spPr>
           <a:xfrm>
-            <a:off x="8001000" y="1417320"/>
-            <a:ext cx="3611880" cy="4480560"/>
+            <a:off x="6446520" y="1371600"/>
+            <a:ext cx="5193792" cy="4800600"/>
           </a:xfrm>
           <a:prstGeom prst="roundRect">
             <a:avLst>
-              <a:gd name="adj" fmla="val 6329"/>
+              <a:gd name="adj" fmla="val 4762"/>
             </a:avLst>
           </a:prstGeom>
           <a:solidFill>
@@ -13446,58 +13432,30 @@
           </a:ln>
         </p:spPr>
       </p:sp>
-      <p:sp>
-        <p:nvSpPr>
-          <p:cNvPr id="6" name="imagen_pendiente"/>
-          <p:cNvSpPr txBox="1"/>
-          <p:nvPr/>
-        </p:nvSpPr>
-        <p:spPr>
-          <a:xfrm>
-            <a:off x="8183880" y="1600200"/>
-            <a:ext cx="3246120" cy="4114800"/>
+      <p:pic>
+        <p:nvPicPr>
+          <p:cNvPr id="6" name="imagen" descr="C:\Users\Chingu\AppData\Local\Temp\claude\C--Users-Chingu-Desktop-ACADEMIASEULWEB\d4111e1b-5523-44ea-97b2-b1a1d9545b9e\scratchpad\decks\cache\img_4184bd60b3beb38d.png"/>
+          <p:cNvPicPr>
+            <a:picLocks noChangeAspect="1"/>
+          </p:cNvPicPr>
+          <p:nvPr/>
+        </p:nvPicPr>
+        <p:blipFill>
+          <a:blip r:embed="rId3"/>
+          <a:stretch>
+            <a:fillRect/>
+          </a:stretch>
+        </p:blipFill>
+        <p:spPr>
+          <a:xfrm>
+            <a:off x="7040833" y="1463040"/>
+            <a:ext cx="4005165" cy="4617720"/>
           </a:xfrm>
           <a:prstGeom prst="rect">
             <a:avLst/>
           </a:prstGeom>
-          <a:noFill/>
-          <a:ln/>
-        </p:spPr>
-        <p:txBody>
-          <a:bodyPr wrap="square" lIns="76200" tIns="76200" rIns="76200" bIns="76200" rtlCol="0" anchor="ctr">
-            <a:normAutofit/>
-          </a:bodyPr>
-          <a:lstStyle/>
-          <a:p>
-            <a:pPr marL="0" indent="0" algn="ctr" eaLnBrk="1">
-              <a:buNone/>
-            </a:pPr>
-            <a:r>
-              <a:rPr lang="en-US" sz="1600" b="1" dirty="0">
-                <a:solidFill>
-                  <a:srgbClr val="4236F6"/>
-                </a:solidFill>
-              </a:rPr>
-              <a:t>Imagen pendiente</a:t>
-            </a:r>
-            <a:endParaRPr lang="en-US" sz="1600" dirty="0"/>
-          </a:p>
-          <a:p>
-            <a:pPr marL="0" indent="0" algn="ctr" eaLnBrk="1">
-              <a:buNone/>
-            </a:pPr>
-            <a:r>
-              <a:rPr lang="en-US" sz="1300" dirty="0">
-                <a:solidFill>
-                  <a:srgbClr val="5C5F6B"/>
-                </a:solidFill>
-              </a:rPr>
-              <a:t>Dibujo del escritorio: computador encima del escritorio; al lado del computador, una taza de café; una silla con un libro encima; debajo de la silla, un bolso; sin paraguas</a:t>
-            </a:r>
-            <a:endParaRPr lang="en-US" sz="1600" dirty="0"/>
-          </a:p>
-        </p:txBody>
-      </p:sp>
+        </p:spPr>
+      </p:pic>
       <p:sp>
         <p:nvSpPr>
           <p:cNvPr id="25" name="Slide Number Placeholder 0"/>
@@ -13628,7 +13586,7 @@
         <p:spPr>
           <a:xfrm>
             <a:off x="548640" y="1325880"/>
-            <a:ext cx="11064240" cy="548640"/>
+            <a:ext cx="11091672" cy="548640"/>
           </a:xfrm>
           <a:prstGeom prst="rect">
             <a:avLst/>
@@ -15337,7 +15295,7 @@
         <p:spPr>
           <a:xfrm>
             <a:off x="548640" y="1325880"/>
-            <a:ext cx="11064240" cy="548640"/>
+            <a:ext cx="11091672" cy="548640"/>
           </a:xfrm>
           <a:prstGeom prst="rect">
             <a:avLst/>
@@ -17046,7 +17004,7 @@
         <p:spPr>
           <a:xfrm>
             <a:off x="548640" y="1325880"/>
-            <a:ext cx="11064240" cy="548640"/>
+            <a:ext cx="11091672" cy="548640"/>
           </a:xfrm>
           <a:prstGeom prst="rect">
             <a:avLst/>
@@ -18662,7 +18620,7 @@
         <p:spPr>
           <a:xfrm>
             <a:off x="548640" y="1325880"/>
-            <a:ext cx="11064240" cy="548640"/>
+            <a:ext cx="11091672" cy="548640"/>
           </a:xfrm>
           <a:prstGeom prst="rect">
             <a:avLst/>
@@ -20221,7 +20179,7 @@
         <p:spPr>
           <a:xfrm>
             <a:off x="548640" y="1325880"/>
-            <a:ext cx="11064240" cy="548640"/>
+            <a:ext cx="11091672" cy="548640"/>
           </a:xfrm>
           <a:prstGeom prst="rect">
             <a:avLst/>
@@ -21951,7 +21909,7 @@
           <p:nvPr>
             <p:extLst>
               <p:ext uri="{D42A27DB-BD31-4B8C-83A1-F6EECF244321}">
-                <p14:modId xmlns:p14="http://schemas.microsoft.com/office/powerpoint/2010/main" val="3510653334"/>
+                <p14:modId xmlns:p14="http://schemas.microsoft.com/office/powerpoint/2010/main" val="200615378"/>
               </p:ext>
             </p:extLst>
           </p:nvPr>
@@ -23054,7 +23012,7 @@
         <p:spPr>
           <a:xfrm>
             <a:off x="548640" y="1325880"/>
-            <a:ext cx="11064240" cy="457200"/>
+            <a:ext cx="11091672" cy="457200"/>
           </a:xfrm>
           <a:prstGeom prst="rect">
             <a:avLst/>
@@ -23140,16 +23098,40 @@
           </a:ln>
         </p:spPr>
       </p:sp>
-      <p:sp>
-        <p:nvSpPr>
-          <p:cNvPr id="5" name="Text 3"/>
+      <p:pic>
+        <p:nvPicPr>
+          <p:cNvPr id="5" name="glifo_img_0" descr="C:\Users\Chingu\AppData\Local\Temp\claude\C--Users-Chingu-Desktop-ACADEMIASEULWEB\d4111e1b-5523-44ea-97b2-b1a1d9545b9e\scratchpad\decks\cache\img_3374480fcf466346.png"/>
+          <p:cNvPicPr>
+            <a:picLocks noChangeAspect="1"/>
+          </p:cNvPicPr>
+          <p:nvPr/>
+        </p:nvPicPr>
+        <p:blipFill>
+          <a:blip r:embed="rId3"/>
+          <a:stretch>
+            <a:fillRect/>
+          </a:stretch>
+        </p:blipFill>
+        <p:spPr>
+          <a:xfrm>
+            <a:off x="621792" y="1929384"/>
+            <a:ext cx="915954" cy="915954"/>
+          </a:xfrm>
+          <a:prstGeom prst="rect">
+            <a:avLst/>
+          </a:prstGeom>
+        </p:spPr>
+      </p:pic>
+      <p:sp>
+        <p:nvSpPr>
+          <p:cNvPr id="6" name="Text 3"/>
           <p:cNvSpPr txBox="1"/>
           <p:nvPr/>
         </p:nvSpPr>
         <p:spPr>
           <a:xfrm>
-            <a:off x="548640" y="1947672"/>
-            <a:ext cx="2035454" cy="1261415"/>
+            <a:off x="1556034" y="1929384"/>
+            <a:ext cx="991484" cy="915954"/>
           </a:xfrm>
           <a:prstGeom prst="rect">
             <a:avLst/>
@@ -23167,7 +23149,7 @@
               <a:buNone/>
             </a:pPr>
             <a:r>
-              <a:rPr lang="ko-KR" altLang="en-US" sz="7600" b="1" dirty="0">
+              <a:rPr lang="ko-KR" altLang="en-US" sz="3100" b="1" dirty="0">
                 <a:solidFill>
                   <a:srgbClr val="4236F6"/>
                 </a:solidFill>
@@ -23177,20 +23159,20 @@
               </a:rPr>
               <a:t>집</a:t>
             </a:r>
-            <a:endParaRPr lang="en-US" sz="7600" dirty="0"/>
-          </a:p>
-        </p:txBody>
-      </p:sp>
-      <p:sp>
-        <p:nvSpPr>
-          <p:cNvPr id="6" name="Text 4"/>
+            <a:endParaRPr lang="en-US" sz="3100" dirty="0"/>
+          </a:p>
+        </p:txBody>
+      </p:sp>
+      <p:sp>
+        <p:nvSpPr>
+          <p:cNvPr id="7" name="Text 4"/>
           <p:cNvSpPr txBox="1"/>
           <p:nvPr/>
         </p:nvSpPr>
         <p:spPr>
           <a:xfrm>
-            <a:off x="594360" y="3176626"/>
-            <a:ext cx="1944014" cy="695858"/>
+            <a:off x="594360" y="2918490"/>
+            <a:ext cx="1944014" cy="953994"/>
           </a:xfrm>
           <a:prstGeom prst="rect">
             <a:avLst/>
@@ -23221,7 +23203,7 @@
       </p:sp>
       <p:sp>
         <p:nvSpPr>
-          <p:cNvPr id="7" name="tile_1"/>
+          <p:cNvPr id="8" name="tile_1"/>
           <p:cNvSpPr/>
           <p:nvPr/>
         </p:nvSpPr>
@@ -23246,16 +23228,40 @@
           </a:ln>
         </p:spPr>
       </p:sp>
-      <p:sp>
-        <p:nvSpPr>
-          <p:cNvPr id="8" name="Text 6"/>
+      <p:pic>
+        <p:nvPicPr>
+          <p:cNvPr id="9" name="glifo_img_1" descr="C:\Users\Chingu\AppData\Local\Temp\claude\C--Users-Chingu-Desktop-ACADEMIASEULWEB\d4111e1b-5523-44ea-97b2-b1a1d9545b9e\scratchpad\decks\cache\img_0be5544fa0677a11.png"/>
+          <p:cNvPicPr>
+            <a:picLocks noChangeAspect="1"/>
+          </p:cNvPicPr>
+          <p:nvPr/>
+        </p:nvPicPr>
+        <p:blipFill>
+          <a:blip r:embed="rId4"/>
+          <a:stretch>
+            <a:fillRect/>
+          </a:stretch>
+        </p:blipFill>
+        <p:spPr>
+          <a:xfrm>
+            <a:off x="2885846" y="1929384"/>
+            <a:ext cx="915954" cy="915954"/>
+          </a:xfrm>
+          <a:prstGeom prst="rect">
+            <a:avLst/>
+          </a:prstGeom>
+        </p:spPr>
+      </p:pic>
+      <p:sp>
+        <p:nvSpPr>
+          <p:cNvPr id="10" name="Text 6"/>
           <p:cNvSpPr txBox="1"/>
           <p:nvPr/>
         </p:nvSpPr>
         <p:spPr>
           <a:xfrm>
-            <a:off x="2812694" y="1947672"/>
-            <a:ext cx="2035454" cy="1261415"/>
+            <a:off x="3820089" y="1929384"/>
+            <a:ext cx="991484" cy="915954"/>
           </a:xfrm>
           <a:prstGeom prst="rect">
             <a:avLst/>
@@ -23273,7 +23279,7 @@
               <a:buNone/>
             </a:pPr>
             <a:r>
-              <a:rPr lang="ko-KR" altLang="en-US" sz="6800" b="1" dirty="0">
+              <a:rPr lang="ko-KR" altLang="en-US" sz="3100" b="1" dirty="0">
                 <a:solidFill>
                   <a:srgbClr val="4236F6"/>
                 </a:solidFill>
@@ -23283,20 +23289,20 @@
               </a:rPr>
               <a:t>학교</a:t>
             </a:r>
-            <a:endParaRPr lang="en-US" sz="6800" dirty="0"/>
-          </a:p>
-        </p:txBody>
-      </p:sp>
-      <p:sp>
-        <p:nvSpPr>
-          <p:cNvPr id="9" name="Text 7"/>
+            <a:endParaRPr lang="en-US" sz="3100" dirty="0"/>
+          </a:p>
+        </p:txBody>
+      </p:sp>
+      <p:sp>
+        <p:nvSpPr>
+          <p:cNvPr id="11" name="Text 7"/>
           <p:cNvSpPr txBox="1"/>
           <p:nvPr/>
         </p:nvSpPr>
         <p:spPr>
           <a:xfrm>
-            <a:off x="2858414" y="3176626"/>
-            <a:ext cx="1944014" cy="695858"/>
+            <a:off x="2858414" y="2918490"/>
+            <a:ext cx="1944014" cy="953994"/>
           </a:xfrm>
           <a:prstGeom prst="rect">
             <a:avLst/>
@@ -23327,7 +23333,7 @@
       </p:sp>
       <p:sp>
         <p:nvSpPr>
-          <p:cNvPr id="10" name="tile_2"/>
+          <p:cNvPr id="12" name="tile_2"/>
           <p:cNvSpPr/>
           <p:nvPr/>
         </p:nvSpPr>
@@ -23352,16 +23358,40 @@
           </a:ln>
         </p:spPr>
       </p:sp>
-      <p:sp>
-        <p:nvSpPr>
-          <p:cNvPr id="11" name="Text 9"/>
+      <p:pic>
+        <p:nvPicPr>
+          <p:cNvPr id="13" name="glifo_img_2" descr="C:\Users\Chingu\AppData\Local\Temp\claude\C--Users-Chingu-Desktop-ACADEMIASEULWEB\d4111e1b-5523-44ea-97b2-b1a1d9545b9e\scratchpad\decks\cache\img_df5dc0b88dfe9008.png"/>
+          <p:cNvPicPr>
+            <a:picLocks noChangeAspect="1"/>
+          </p:cNvPicPr>
+          <p:nvPr/>
+        </p:nvPicPr>
+        <p:blipFill>
+          <a:blip r:embed="rId5"/>
+          <a:stretch>
+            <a:fillRect/>
+          </a:stretch>
+        </p:blipFill>
+        <p:spPr>
+          <a:xfrm>
+            <a:off x="5149901" y="1929384"/>
+            <a:ext cx="915954" cy="915954"/>
+          </a:xfrm>
+          <a:prstGeom prst="rect">
+            <a:avLst/>
+          </a:prstGeom>
+        </p:spPr>
+      </p:pic>
+      <p:sp>
+        <p:nvSpPr>
+          <p:cNvPr id="14" name="Text 9"/>
           <p:cNvSpPr txBox="1"/>
           <p:nvPr/>
         </p:nvSpPr>
         <p:spPr>
           <a:xfrm>
-            <a:off x="5076749" y="1947672"/>
-            <a:ext cx="2035454" cy="1261415"/>
+            <a:off x="6084143" y="1929384"/>
+            <a:ext cx="991484" cy="915954"/>
           </a:xfrm>
           <a:prstGeom prst="rect">
             <a:avLst/>
@@ -23379,7 +23409,7 @@
               <a:buNone/>
             </a:pPr>
             <a:r>
-              <a:rPr lang="ko-KR" altLang="en-US" sz="6800" b="1" dirty="0">
+              <a:rPr lang="ko-KR" altLang="en-US" sz="3100" b="1" dirty="0">
                 <a:solidFill>
                   <a:srgbClr val="4236F6"/>
                 </a:solidFill>
@@ -23389,20 +23419,20 @@
               </a:rPr>
               <a:t>회사</a:t>
             </a:r>
-            <a:endParaRPr lang="en-US" sz="6800" dirty="0"/>
-          </a:p>
-        </p:txBody>
-      </p:sp>
-      <p:sp>
-        <p:nvSpPr>
-          <p:cNvPr id="12" name="Text 10"/>
+            <a:endParaRPr lang="en-US" sz="3100" dirty="0"/>
+          </a:p>
+        </p:txBody>
+      </p:sp>
+      <p:sp>
+        <p:nvSpPr>
+          <p:cNvPr id="15" name="Text 10"/>
           <p:cNvSpPr txBox="1"/>
           <p:nvPr/>
         </p:nvSpPr>
         <p:spPr>
           <a:xfrm>
-            <a:off x="5122469" y="3176626"/>
-            <a:ext cx="1944014" cy="695858"/>
+            <a:off x="5122469" y="2918490"/>
+            <a:ext cx="1944014" cy="953994"/>
           </a:xfrm>
           <a:prstGeom prst="rect">
             <a:avLst/>
@@ -23433,7 +23463,7 @@
       </p:sp>
       <p:sp>
         <p:nvSpPr>
-          <p:cNvPr id="13" name="tile_3"/>
+          <p:cNvPr id="16" name="tile_3"/>
           <p:cNvSpPr/>
           <p:nvPr/>
         </p:nvSpPr>
@@ -23458,16 +23488,40 @@
           </a:ln>
         </p:spPr>
       </p:sp>
-      <p:sp>
-        <p:nvSpPr>
-          <p:cNvPr id="14" name="Text 12"/>
+      <p:pic>
+        <p:nvPicPr>
+          <p:cNvPr id="17" name="glifo_img_3" descr="C:\Users\Chingu\AppData\Local\Temp\claude\C--Users-Chingu-Desktop-ACADEMIASEULWEB\d4111e1b-5523-44ea-97b2-b1a1d9545b9e\scratchpad\decks\cache\img_d6a9ee37c037d628.png"/>
+          <p:cNvPicPr>
+            <a:picLocks noChangeAspect="1"/>
+          </p:cNvPicPr>
+          <p:nvPr/>
+        </p:nvPicPr>
+        <p:blipFill>
+          <a:blip r:embed="rId6"/>
+          <a:stretch>
+            <a:fillRect/>
+          </a:stretch>
+        </p:blipFill>
+        <p:spPr>
+          <a:xfrm>
+            <a:off x="7413955" y="1929384"/>
+            <a:ext cx="915954" cy="915954"/>
+          </a:xfrm>
+          <a:prstGeom prst="rect">
+            <a:avLst/>
+          </a:prstGeom>
+        </p:spPr>
+      </p:pic>
+      <p:sp>
+        <p:nvSpPr>
+          <p:cNvPr id="18" name="Text 12"/>
           <p:cNvSpPr txBox="1"/>
           <p:nvPr/>
         </p:nvSpPr>
         <p:spPr>
           <a:xfrm>
-            <a:off x="7340803" y="1947672"/>
-            <a:ext cx="2035454" cy="1261415"/>
+            <a:off x="8348198" y="1929384"/>
+            <a:ext cx="991484" cy="915954"/>
           </a:xfrm>
           <a:prstGeom prst="rect">
             <a:avLst/>
@@ -23485,7 +23539,7 @@
               <a:buNone/>
             </a:pPr>
             <a:r>
-              <a:rPr lang="ko-KR" altLang="en-US" sz="6800" b="1" dirty="0">
+              <a:rPr lang="ko-KR" altLang="en-US" sz="3100" b="1" dirty="0">
                 <a:solidFill>
                   <a:srgbClr val="4236F6"/>
                 </a:solidFill>
@@ -23495,20 +23549,20 @@
               </a:rPr>
               <a:t>카페</a:t>
             </a:r>
-            <a:endParaRPr lang="en-US" sz="6800" dirty="0"/>
-          </a:p>
-        </p:txBody>
-      </p:sp>
-      <p:sp>
-        <p:nvSpPr>
-          <p:cNvPr id="15" name="Text 13"/>
+            <a:endParaRPr lang="en-US" sz="3100" dirty="0"/>
+          </a:p>
+        </p:txBody>
+      </p:sp>
+      <p:sp>
+        <p:nvSpPr>
+          <p:cNvPr id="19" name="Text 13"/>
           <p:cNvSpPr txBox="1"/>
           <p:nvPr/>
         </p:nvSpPr>
         <p:spPr>
           <a:xfrm>
-            <a:off x="7386523" y="3176626"/>
-            <a:ext cx="1944014" cy="695858"/>
+            <a:off x="7386523" y="2918490"/>
+            <a:ext cx="1944014" cy="953994"/>
           </a:xfrm>
           <a:prstGeom prst="rect">
             <a:avLst/>
@@ -23539,7 +23593,7 @@
       </p:sp>
       <p:sp>
         <p:nvSpPr>
-          <p:cNvPr id="16" name="tile_4"/>
+          <p:cNvPr id="20" name="tile_4"/>
           <p:cNvSpPr/>
           <p:nvPr/>
         </p:nvSpPr>
@@ -23564,16 +23618,40 @@
           </a:ln>
         </p:spPr>
       </p:sp>
-      <p:sp>
-        <p:nvSpPr>
-          <p:cNvPr id="17" name="Text 15"/>
+      <p:pic>
+        <p:nvPicPr>
+          <p:cNvPr id="21" name="glifo_img_4" descr="C:\Users\Chingu\AppData\Local\Temp\claude\C--Users-Chingu-Desktop-ACADEMIASEULWEB\d4111e1b-5523-44ea-97b2-b1a1d9545b9e\scratchpad\decks\cache\img_5fff6114e64cff8e.png"/>
+          <p:cNvPicPr>
+            <a:picLocks noChangeAspect="1"/>
+          </p:cNvPicPr>
+          <p:nvPr/>
+        </p:nvPicPr>
+        <p:blipFill>
+          <a:blip r:embed="rId7"/>
+          <a:stretch>
+            <a:fillRect/>
+          </a:stretch>
+        </p:blipFill>
+        <p:spPr>
+          <a:xfrm>
+            <a:off x="9678010" y="1929384"/>
+            <a:ext cx="915954" cy="915954"/>
+          </a:xfrm>
+          <a:prstGeom prst="rect">
+            <a:avLst/>
+          </a:prstGeom>
+        </p:spPr>
+      </p:pic>
+      <p:sp>
+        <p:nvSpPr>
+          <p:cNvPr id="22" name="Text 15"/>
           <p:cNvSpPr txBox="1"/>
           <p:nvPr/>
         </p:nvSpPr>
         <p:spPr>
           <a:xfrm>
-            <a:off x="9604858" y="1947672"/>
-            <a:ext cx="2035454" cy="1261415"/>
+            <a:off x="10612252" y="1929384"/>
+            <a:ext cx="991484" cy="915954"/>
           </a:xfrm>
           <a:prstGeom prst="rect">
             <a:avLst/>
@@ -23591,7 +23669,7 @@
               <a:buNone/>
             </a:pPr>
             <a:r>
-              <a:rPr lang="ko-KR" altLang="en-US" sz="6800" b="1" dirty="0">
+              <a:rPr lang="ko-KR" altLang="en-US" sz="3100" b="1" dirty="0">
                 <a:solidFill>
                   <a:srgbClr val="4236F6"/>
                 </a:solidFill>
@@ -23601,20 +23679,20 @@
               </a:rPr>
               <a:t>식당</a:t>
             </a:r>
-            <a:endParaRPr lang="en-US" sz="6800" dirty="0"/>
-          </a:p>
-        </p:txBody>
-      </p:sp>
-      <p:sp>
-        <p:nvSpPr>
-          <p:cNvPr id="18" name="Text 16"/>
+            <a:endParaRPr lang="en-US" sz="3100" dirty="0"/>
+          </a:p>
+        </p:txBody>
+      </p:sp>
+      <p:sp>
+        <p:nvSpPr>
+          <p:cNvPr id="23" name="Text 16"/>
           <p:cNvSpPr txBox="1"/>
           <p:nvPr/>
         </p:nvSpPr>
         <p:spPr>
           <a:xfrm>
-            <a:off x="9650578" y="3176626"/>
-            <a:ext cx="1944014" cy="695858"/>
+            <a:off x="9650578" y="2918490"/>
+            <a:ext cx="1944014" cy="953994"/>
           </a:xfrm>
           <a:prstGeom prst="rect">
             <a:avLst/>
@@ -23645,7 +23723,7 @@
       </p:sp>
       <p:sp>
         <p:nvSpPr>
-          <p:cNvPr id="19" name="tile_5"/>
+          <p:cNvPr id="24" name="tile_5"/>
           <p:cNvSpPr/>
           <p:nvPr/>
         </p:nvSpPr>
@@ -23670,16 +23748,40 @@
           </a:ln>
         </p:spPr>
       </p:sp>
-      <p:sp>
-        <p:nvSpPr>
-          <p:cNvPr id="20" name="Text 18"/>
+      <p:pic>
+        <p:nvPicPr>
+          <p:cNvPr id="25" name="glifo_img_5" descr="C:\Users\Chingu\AppData\Local\Temp\claude\C--Users-Chingu-Desktop-ACADEMIASEULWEB\d4111e1b-5523-44ea-97b2-b1a1d9545b9e\scratchpad\decks\cache\img_3dba05f205fab00a.png"/>
+          <p:cNvPicPr>
+            <a:picLocks noChangeAspect="1"/>
+          </p:cNvPicPr>
+          <p:nvPr/>
+        </p:nvPicPr>
+        <p:blipFill>
+          <a:blip r:embed="rId8"/>
+          <a:stretch>
+            <a:fillRect/>
+          </a:stretch>
+        </p:blipFill>
+        <p:spPr>
+          <a:xfrm>
+            <a:off x="621792" y="4192524"/>
+            <a:ext cx="915954" cy="915954"/>
+          </a:xfrm>
+          <a:prstGeom prst="rect">
+            <a:avLst/>
+          </a:prstGeom>
+        </p:spPr>
+      </p:pic>
+      <p:sp>
+        <p:nvSpPr>
+          <p:cNvPr id="26" name="Text 18"/>
           <p:cNvSpPr txBox="1"/>
           <p:nvPr/>
         </p:nvSpPr>
         <p:spPr>
           <a:xfrm>
-            <a:off x="548640" y="4210812"/>
-            <a:ext cx="2035454" cy="1261415"/>
+            <a:off x="1556034" y="4192524"/>
+            <a:ext cx="991484" cy="915954"/>
           </a:xfrm>
           <a:prstGeom prst="rect">
             <a:avLst/>
@@ -23697,7 +23799,7 @@
               <a:buNone/>
             </a:pPr>
             <a:r>
-              <a:rPr lang="ko-KR" altLang="en-US" sz="6800" b="1" dirty="0">
+              <a:rPr lang="ko-KR" altLang="en-US" sz="3100" b="1" dirty="0">
                 <a:solidFill>
                   <a:srgbClr val="4236F6"/>
                 </a:solidFill>
@@ -23707,20 +23809,20 @@
               </a:rPr>
               <a:t>공원</a:t>
             </a:r>
-            <a:endParaRPr lang="en-US" sz="6800" dirty="0"/>
-          </a:p>
-        </p:txBody>
-      </p:sp>
-      <p:sp>
-        <p:nvSpPr>
-          <p:cNvPr id="21" name="Text 19"/>
+            <a:endParaRPr lang="en-US" sz="3100" dirty="0"/>
+          </a:p>
+        </p:txBody>
+      </p:sp>
+      <p:sp>
+        <p:nvSpPr>
+          <p:cNvPr id="27" name="Text 19"/>
           <p:cNvSpPr txBox="1"/>
           <p:nvPr/>
         </p:nvSpPr>
         <p:spPr>
           <a:xfrm>
-            <a:off x="594360" y="5439766"/>
-            <a:ext cx="1944014" cy="695858"/>
+            <a:off x="594360" y="5181630"/>
+            <a:ext cx="1944014" cy="953994"/>
           </a:xfrm>
           <a:prstGeom prst="rect">
             <a:avLst/>
@@ -23751,7 +23853,7 @@
       </p:sp>
       <p:sp>
         <p:nvSpPr>
-          <p:cNvPr id="22" name="tile_6"/>
+          <p:cNvPr id="28" name="tile_6"/>
           <p:cNvSpPr/>
           <p:nvPr/>
         </p:nvSpPr>
@@ -23776,16 +23878,40 @@
           </a:ln>
         </p:spPr>
       </p:sp>
-      <p:sp>
-        <p:nvSpPr>
-          <p:cNvPr id="23" name="Text 21"/>
+      <p:pic>
+        <p:nvPicPr>
+          <p:cNvPr id="29" name="glifo_img_6" descr="C:\Users\Chingu\AppData\Local\Temp\claude\C--Users-Chingu-Desktop-ACADEMIASEULWEB\d4111e1b-5523-44ea-97b2-b1a1d9545b9e\scratchpad\decks\cache\img_a647b55f43a1fa22.png"/>
+          <p:cNvPicPr>
+            <a:picLocks noChangeAspect="1"/>
+          </p:cNvPicPr>
+          <p:nvPr/>
+        </p:nvPicPr>
+        <p:blipFill>
+          <a:blip r:embed="rId9"/>
+          <a:stretch>
+            <a:fillRect/>
+          </a:stretch>
+        </p:blipFill>
+        <p:spPr>
+          <a:xfrm>
+            <a:off x="2885846" y="4192524"/>
+            <a:ext cx="915954" cy="915954"/>
+          </a:xfrm>
+          <a:prstGeom prst="rect">
+            <a:avLst/>
+          </a:prstGeom>
+        </p:spPr>
+      </p:pic>
+      <p:sp>
+        <p:nvSpPr>
+          <p:cNvPr id="30" name="Text 21"/>
           <p:cNvSpPr txBox="1"/>
           <p:nvPr/>
         </p:nvSpPr>
         <p:spPr>
           <a:xfrm>
-            <a:off x="2812694" y="4210812"/>
-            <a:ext cx="2035454" cy="1261415"/>
+            <a:off x="3820089" y="4192524"/>
+            <a:ext cx="991484" cy="915954"/>
           </a:xfrm>
           <a:prstGeom prst="rect">
             <a:avLst/>
@@ -23803,7 +23929,7 @@
               <a:buNone/>
             </a:pPr>
             <a:r>
-              <a:rPr lang="ko-KR" altLang="en-US" sz="6800" b="1" dirty="0">
+              <a:rPr lang="ko-KR" altLang="en-US" sz="3100" b="1" dirty="0">
                 <a:solidFill>
                   <a:srgbClr val="4236F6"/>
                 </a:solidFill>
@@ -23813,20 +23939,20 @@
               </a:rPr>
               <a:t>병원</a:t>
             </a:r>
-            <a:endParaRPr lang="en-US" sz="6800" dirty="0"/>
-          </a:p>
-        </p:txBody>
-      </p:sp>
-      <p:sp>
-        <p:nvSpPr>
-          <p:cNvPr id="24" name="Text 22"/>
+            <a:endParaRPr lang="en-US" sz="3100" dirty="0"/>
+          </a:p>
+        </p:txBody>
+      </p:sp>
+      <p:sp>
+        <p:nvSpPr>
+          <p:cNvPr id="31" name="Text 22"/>
           <p:cNvSpPr txBox="1"/>
           <p:nvPr/>
         </p:nvSpPr>
         <p:spPr>
           <a:xfrm>
-            <a:off x="2858414" y="5439766"/>
-            <a:ext cx="1944014" cy="695858"/>
+            <a:off x="2858414" y="5181630"/>
+            <a:ext cx="1944014" cy="953994"/>
           </a:xfrm>
           <a:prstGeom prst="rect">
             <a:avLst/>
@@ -23857,7 +23983,7 @@
       </p:sp>
       <p:sp>
         <p:nvSpPr>
-          <p:cNvPr id="25" name="tile_7"/>
+          <p:cNvPr id="32" name="tile_7"/>
           <p:cNvSpPr/>
           <p:nvPr/>
         </p:nvSpPr>
@@ -23882,16 +24008,40 @@
           </a:ln>
         </p:spPr>
       </p:sp>
-      <p:sp>
-        <p:nvSpPr>
-          <p:cNvPr id="26" name="Text 24"/>
+      <p:pic>
+        <p:nvPicPr>
+          <p:cNvPr id="33" name="glifo_img_7" descr="C:\Users\Chingu\AppData\Local\Temp\claude\C--Users-Chingu-Desktop-ACADEMIASEULWEB\d4111e1b-5523-44ea-97b2-b1a1d9545b9e\scratchpad\decks\cache\img_46537238c7f3edf6.png"/>
+          <p:cNvPicPr>
+            <a:picLocks noChangeAspect="1"/>
+          </p:cNvPicPr>
+          <p:nvPr/>
+        </p:nvPicPr>
+        <p:blipFill>
+          <a:blip r:embed="rId10"/>
+          <a:stretch>
+            <a:fillRect/>
+          </a:stretch>
+        </p:blipFill>
+        <p:spPr>
+          <a:xfrm>
+            <a:off x="5149901" y="4192524"/>
+            <a:ext cx="915954" cy="915954"/>
+          </a:xfrm>
+          <a:prstGeom prst="rect">
+            <a:avLst/>
+          </a:prstGeom>
+        </p:spPr>
+      </p:pic>
+      <p:sp>
+        <p:nvSpPr>
+          <p:cNvPr id="34" name="Text 24"/>
           <p:cNvSpPr txBox="1"/>
           <p:nvPr/>
         </p:nvSpPr>
         <p:spPr>
           <a:xfrm>
-            <a:off x="5076749" y="4210812"/>
-            <a:ext cx="2035454" cy="1261415"/>
+            <a:off x="6084143" y="4192524"/>
+            <a:ext cx="991484" cy="915954"/>
           </a:xfrm>
           <a:prstGeom prst="rect">
             <a:avLst/>
@@ -23909,7 +24059,7 @@
               <a:buNone/>
             </a:pPr>
             <a:r>
-              <a:rPr lang="ko-KR" altLang="en-US" sz="6800" b="1" dirty="0">
+              <a:rPr lang="ko-KR" altLang="en-US" sz="3100" b="1" dirty="0">
                 <a:solidFill>
                   <a:srgbClr val="4236F6"/>
                 </a:solidFill>
@@ -23919,20 +24069,20 @@
               </a:rPr>
               <a:t>은행</a:t>
             </a:r>
-            <a:endParaRPr lang="en-US" sz="6800" dirty="0"/>
-          </a:p>
-        </p:txBody>
-      </p:sp>
-      <p:sp>
-        <p:nvSpPr>
-          <p:cNvPr id="27" name="Text 25"/>
+            <a:endParaRPr lang="en-US" sz="3100" dirty="0"/>
+          </a:p>
+        </p:txBody>
+      </p:sp>
+      <p:sp>
+        <p:nvSpPr>
+          <p:cNvPr id="35" name="Text 25"/>
           <p:cNvSpPr txBox="1"/>
           <p:nvPr/>
         </p:nvSpPr>
         <p:spPr>
           <a:xfrm>
-            <a:off x="5122469" y="5439766"/>
-            <a:ext cx="1944014" cy="695858"/>
+            <a:off x="5122469" y="5181630"/>
+            <a:ext cx="1944014" cy="953994"/>
           </a:xfrm>
           <a:prstGeom prst="rect">
             <a:avLst/>
@@ -23963,7 +24113,7 @@
       </p:sp>
       <p:sp>
         <p:nvSpPr>
-          <p:cNvPr id="28" name="tile_8"/>
+          <p:cNvPr id="36" name="tile_8"/>
           <p:cNvSpPr/>
           <p:nvPr/>
         </p:nvSpPr>
@@ -23988,16 +24138,40 @@
           </a:ln>
         </p:spPr>
       </p:sp>
-      <p:sp>
-        <p:nvSpPr>
-          <p:cNvPr id="29" name="Text 27"/>
+      <p:pic>
+        <p:nvPicPr>
+          <p:cNvPr id="37" name="glifo_img_8" descr="C:\Users\Chingu\AppData\Local\Temp\claude\C--Users-Chingu-Desktop-ACADEMIASEULWEB\d4111e1b-5523-44ea-97b2-b1a1d9545b9e\scratchpad\decks\cache\img_dbdfbd128138425a.png"/>
+          <p:cNvPicPr>
+            <a:picLocks noChangeAspect="1"/>
+          </p:cNvPicPr>
+          <p:nvPr/>
+        </p:nvPicPr>
+        <p:blipFill>
+          <a:blip r:embed="rId11"/>
+          <a:stretch>
+            <a:fillRect/>
+          </a:stretch>
+        </p:blipFill>
+        <p:spPr>
+          <a:xfrm>
+            <a:off x="7413955" y="4192524"/>
+            <a:ext cx="915954" cy="915954"/>
+          </a:xfrm>
+          <a:prstGeom prst="rect">
+            <a:avLst/>
+          </a:prstGeom>
+        </p:spPr>
+      </p:pic>
+      <p:sp>
+        <p:nvSpPr>
+          <p:cNvPr id="38" name="Text 27"/>
           <p:cNvSpPr txBox="1"/>
           <p:nvPr/>
         </p:nvSpPr>
         <p:spPr>
           <a:xfrm>
-            <a:off x="7340803" y="4210812"/>
-            <a:ext cx="2035454" cy="1261415"/>
+            <a:off x="8348198" y="4192524"/>
+            <a:ext cx="991484" cy="915954"/>
           </a:xfrm>
           <a:prstGeom prst="rect">
             <a:avLst/>
@@ -24015,7 +24189,7 @@
               <a:buNone/>
             </a:pPr>
             <a:r>
-              <a:rPr lang="ko-KR" altLang="en-US" sz="6800" b="1" dirty="0">
+              <a:rPr lang="ko-KR" altLang="en-US" sz="3100" b="1" dirty="0">
                 <a:solidFill>
                   <a:srgbClr val="4236F6"/>
                 </a:solidFill>
@@ -24025,20 +24199,20 @@
               </a:rPr>
               <a:t>학원</a:t>
             </a:r>
-            <a:endParaRPr lang="en-US" sz="6800" dirty="0"/>
-          </a:p>
-        </p:txBody>
-      </p:sp>
-      <p:sp>
-        <p:nvSpPr>
-          <p:cNvPr id="30" name="Text 28"/>
+            <a:endParaRPr lang="en-US" sz="3100" dirty="0"/>
+          </a:p>
+        </p:txBody>
+      </p:sp>
+      <p:sp>
+        <p:nvSpPr>
+          <p:cNvPr id="39" name="Text 28"/>
           <p:cNvSpPr txBox="1"/>
           <p:nvPr/>
         </p:nvSpPr>
         <p:spPr>
           <a:xfrm>
-            <a:off x="7386523" y="5439766"/>
-            <a:ext cx="1944014" cy="695858"/>
+            <a:off x="7386523" y="5181630"/>
+            <a:ext cx="1944014" cy="953994"/>
           </a:xfrm>
           <a:prstGeom prst="rect">
             <a:avLst/>
@@ -24069,7 +24243,7 @@
       </p:sp>
       <p:sp>
         <p:nvSpPr>
-          <p:cNvPr id="31" name="tile_9"/>
+          <p:cNvPr id="40" name="tile_9"/>
           <p:cNvSpPr/>
           <p:nvPr/>
         </p:nvSpPr>
@@ -24094,16 +24268,40 @@
           </a:ln>
         </p:spPr>
       </p:sp>
-      <p:sp>
-        <p:nvSpPr>
-          <p:cNvPr id="32" name="Text 30"/>
+      <p:pic>
+        <p:nvPicPr>
+          <p:cNvPr id="41" name="glifo_img_9" descr="C:\Users\Chingu\AppData\Local\Temp\claude\C--Users-Chingu-Desktop-ACADEMIASEULWEB\d4111e1b-5523-44ea-97b2-b1a1d9545b9e\scratchpad\decks\cache\img_a587f50a4a667ec7.png"/>
+          <p:cNvPicPr>
+            <a:picLocks noChangeAspect="1"/>
+          </p:cNvPicPr>
+          <p:nvPr/>
+        </p:nvPicPr>
+        <p:blipFill>
+          <a:blip r:embed="rId12"/>
+          <a:stretch>
+            <a:fillRect/>
+          </a:stretch>
+        </p:blipFill>
+        <p:spPr>
+          <a:xfrm>
+            <a:off x="9678010" y="4192524"/>
+            <a:ext cx="915954" cy="915954"/>
+          </a:xfrm>
+          <a:prstGeom prst="rect">
+            <a:avLst/>
+          </a:prstGeom>
+        </p:spPr>
+      </p:pic>
+      <p:sp>
+        <p:nvSpPr>
+          <p:cNvPr id="42" name="Text 30"/>
           <p:cNvSpPr txBox="1"/>
           <p:nvPr/>
         </p:nvSpPr>
         <p:spPr>
           <a:xfrm>
-            <a:off x="9604858" y="4210812"/>
-            <a:ext cx="2035454" cy="1261415"/>
+            <a:off x="10612252" y="4192524"/>
+            <a:ext cx="991484" cy="915954"/>
           </a:xfrm>
           <a:prstGeom prst="rect">
             <a:avLst/>
@@ -24121,7 +24319,7 @@
               <a:buNone/>
             </a:pPr>
             <a:r>
-              <a:rPr lang="ko-KR" altLang="en-US" sz="6800" b="1" dirty="0">
+              <a:rPr lang="ko-KR" altLang="en-US" sz="3100" b="1" dirty="0">
                 <a:solidFill>
                   <a:srgbClr val="4236F6"/>
                 </a:solidFill>
@@ -24131,20 +24329,20 @@
               </a:rPr>
               <a:t>한국</a:t>
             </a:r>
-            <a:endParaRPr lang="en-US" sz="6800" dirty="0"/>
-          </a:p>
-        </p:txBody>
-      </p:sp>
-      <p:sp>
-        <p:nvSpPr>
-          <p:cNvPr id="33" name="Text 31"/>
+            <a:endParaRPr lang="en-US" sz="3100" dirty="0"/>
+          </a:p>
+        </p:txBody>
+      </p:sp>
+      <p:sp>
+        <p:nvSpPr>
+          <p:cNvPr id="43" name="Text 31"/>
           <p:cNvSpPr txBox="1"/>
           <p:nvPr/>
         </p:nvSpPr>
         <p:spPr>
           <a:xfrm>
-            <a:off x="9650578" y="5439766"/>
-            <a:ext cx="1944014" cy="695858"/>
+            <a:off x="9650578" y="5181630"/>
+            <a:ext cx="1944014" cy="953994"/>
           </a:xfrm>
           <a:prstGeom prst="rect">
             <a:avLst/>
@@ -24175,7 +24373,7 @@
       </p:sp>
       <p:sp>
         <p:nvSpPr>
-          <p:cNvPr id="34" name="Slide Number Placeholder 0"/>
+          <p:cNvPr id="44" name="Slide Number Placeholder 0"/>
           <p:cNvSpPr>
             <a:spLocks noGrp="1"/>
           </p:cNvSpPr>
@@ -25064,7 +25262,7 @@
               <a:buChar char="•"/>
             </a:pPr>
             <a:r>
-              <a:rPr lang="ko-KR" altLang="en-US" sz="2400" dirty="0">
+              <a:rPr lang="ko-KR" altLang="en-US" sz="2800" dirty="0">
                 <a:solidFill>
                   <a:srgbClr val="14142B"/>
                 </a:solidFill>
@@ -25075,14 +25273,14 @@
               <a:t>오늘 뭐 해요</a:t>
             </a:r>
             <a:r>
-              <a:rPr lang="en-US" sz="2400" dirty="0">
+              <a:rPr lang="en-US" sz="2800" dirty="0">
                 <a:solidFill>
                   <a:srgbClr val="14142B"/>
                 </a:solidFill>
               </a:rPr>
               <a:t>?</a:t>
             </a:r>
-            <a:endParaRPr lang="en-US" sz="2400" dirty="0"/>
+            <a:endParaRPr lang="en-US" sz="2800" dirty="0"/>
           </a:p>
           <a:p>
             <a:pPr marL="228600" indent="-228600" eaLnBrk="1">
@@ -25093,7 +25291,7 @@
               <a:buChar char="•"/>
             </a:pPr>
             <a:r>
-              <a:rPr lang="ko-KR" altLang="en-US" sz="2400" dirty="0">
+              <a:rPr lang="ko-KR" altLang="en-US" sz="2800" dirty="0">
                 <a:solidFill>
                   <a:srgbClr val="14142B"/>
                 </a:solidFill>
@@ -25104,14 +25302,14 @@
               <a:t>집이 어디예요</a:t>
             </a:r>
             <a:r>
-              <a:rPr lang="en-US" sz="2400" dirty="0">
+              <a:rPr lang="en-US" sz="2800" dirty="0">
                 <a:solidFill>
                   <a:srgbClr val="14142B"/>
                 </a:solidFill>
               </a:rPr>
               <a:t>?</a:t>
             </a:r>
-            <a:endParaRPr lang="en-US" sz="2400" dirty="0"/>
+            <a:endParaRPr lang="en-US" sz="2800" dirty="0"/>
           </a:p>
           <a:p>
             <a:pPr marL="228600" indent="-228600" eaLnBrk="1">
@@ -25122,14 +25320,14 @@
               <a:buChar char="•"/>
             </a:pPr>
             <a:r>
-              <a:rPr lang="en-US" sz="2400" dirty="0">
+              <a:rPr lang="en-US" sz="2800" dirty="0">
                 <a:solidFill>
                   <a:srgbClr val="14142B"/>
                 </a:solidFill>
               </a:rPr>
               <a:t>Pregunten en cualquier orden · quien responde no mira el cuaderno</a:t>
             </a:r>
-            <a:endParaRPr lang="en-US" sz="2400" dirty="0"/>
+            <a:endParaRPr lang="en-US" sz="2800" dirty="0"/>
           </a:p>
           <a:p>
             <a:pPr marL="228600" indent="-228600" eaLnBrk="1">
@@ -25140,7 +25338,7 @@
               <a:buChar char="•"/>
             </a:pPr>
             <a:r>
-              <a:rPr lang="ko-KR" altLang="en-US" sz="2400" dirty="0">
+              <a:rPr lang="ko-KR" altLang="en-US" sz="2800" dirty="0">
                 <a:solidFill>
                   <a:srgbClr val="14142B"/>
                 </a:solidFill>
@@ -25151,14 +25349,14 @@
               <a:t>¿No entiendes? 다시 한번</a:t>
             </a:r>
             <a:r>
-              <a:rPr lang="en-US" sz="2400" dirty="0">
+              <a:rPr lang="en-US" sz="2800" dirty="0">
                 <a:solidFill>
                   <a:srgbClr val="14142B"/>
                 </a:solidFill>
               </a:rPr>
               <a:t>!</a:t>
             </a:r>
-            <a:endParaRPr lang="en-US" sz="2400" dirty="0"/>
+            <a:endParaRPr lang="en-US" sz="2800" dirty="0"/>
           </a:p>
         </p:txBody>
       </p:sp>
@@ -25875,16 +26073,40 @@
           </a:p>
         </p:txBody>
       </p:sp>
-      <p:sp>
-        <p:nvSpPr>
-          <p:cNvPr id="3" name="Text 1"/>
+      <p:pic>
+        <p:nvPicPr>
+          <p:cNvPr id="3" name="imagen" descr="C:\Users\Chingu\AppData\Local\Temp\claude\C--Users-Chingu-Desktop-ACADEMIASEULWEB\d4111e1b-5523-44ea-97b2-b1a1d9545b9e\scratchpad\decks\cache\img_32ebea89337f79b9.png"/>
+          <p:cNvPicPr>
+            <a:picLocks noChangeAspect="1"/>
+          </p:cNvPicPr>
+          <p:nvPr/>
+        </p:nvPicPr>
+        <p:blipFill>
+          <a:blip r:embed="rId3"/>
+          <a:stretch>
+            <a:fillRect/>
+          </a:stretch>
+        </p:blipFill>
+        <p:spPr>
+          <a:xfrm>
+            <a:off x="7754112" y="1508760"/>
+            <a:ext cx="3886200" cy="4480560"/>
+          </a:xfrm>
+          <a:prstGeom prst="rect">
+            <a:avLst/>
+          </a:prstGeom>
+        </p:spPr>
+      </p:pic>
+      <p:sp>
+        <p:nvSpPr>
+          <p:cNvPr id="4" name="Text 1"/>
           <p:cNvSpPr txBox="1"/>
           <p:nvPr/>
         </p:nvSpPr>
         <p:spPr>
           <a:xfrm>
             <a:off x="548640" y="1325880"/>
-            <a:ext cx="11064240" cy="548640"/>
+            <a:ext cx="6931152" cy="548640"/>
           </a:xfrm>
           <a:prstGeom prst="rect">
             <a:avLst/>
@@ -25915,7 +26137,7 @@
       </p:sp>
       <p:sp>
         <p:nvSpPr>
-          <p:cNvPr id="4" name="num_0"/>
+          <p:cNvPr id="5" name="num_0"/>
           <p:cNvSpPr/>
           <p:nvPr/>
         </p:nvSpPr>
@@ -25940,7 +26162,7 @@
       </p:sp>
       <p:sp>
         <p:nvSpPr>
-          <p:cNvPr id="5" name="Text 3"/>
+          <p:cNvPr id="6" name="Text 3"/>
           <p:cNvSpPr txBox="1"/>
           <p:nvPr/>
         </p:nvSpPr>
@@ -25978,14 +26200,14 @@
       </p:sp>
       <p:sp>
         <p:nvSpPr>
-          <p:cNvPr id="6" name="Text 4"/>
+          <p:cNvPr id="7" name="Text 4"/>
           <p:cNvSpPr txBox="1"/>
           <p:nvPr/>
         </p:nvSpPr>
         <p:spPr>
           <a:xfrm>
             <a:off x="1188720" y="1965960"/>
-            <a:ext cx="5285232" cy="738835"/>
+            <a:ext cx="2735519" cy="738835"/>
           </a:xfrm>
           <a:prstGeom prst="rect">
             <a:avLst/>
@@ -26003,7 +26225,7 @@
               <a:buNone/>
             </a:pPr>
             <a:r>
-              <a:rPr lang="ko-KR" altLang="en-US" sz="2400" dirty="0">
+              <a:rPr lang="ko-KR" altLang="en-US" sz="2300" dirty="0">
                 <a:solidFill>
                   <a:srgbClr val="14142B"/>
                 </a:solidFill>
@@ -26014,7 +26236,7 @@
               <a:t>컴퓨터가 책상 </a:t>
             </a:r>
             <a:r>
-              <a:rPr lang="en-US" sz="2400" dirty="0">
+              <a:rPr lang="en-US" sz="2300" dirty="0">
                 <a:solidFill>
                   <a:srgbClr val="14142B"/>
                 </a:solidFill>
@@ -26022,7 +26244,7 @@
               <a:t>___</a:t>
             </a:r>
             <a:r>
-              <a:rPr lang="ko-KR" altLang="en-US" sz="2400" dirty="0">
+              <a:rPr lang="ko-KR" altLang="en-US" sz="2300" dirty="0">
                 <a:solidFill>
                   <a:srgbClr val="14142B"/>
                 </a:solidFill>
@@ -26033,27 +26255,27 @@
               <a:t>에 있어요</a:t>
             </a:r>
             <a:r>
-              <a:rPr lang="en-US" sz="2400" dirty="0">
+              <a:rPr lang="en-US" sz="2300" dirty="0">
                 <a:solidFill>
                   <a:srgbClr val="14142B"/>
                 </a:solidFill>
               </a:rPr>
               <a:t>.</a:t>
             </a:r>
-            <a:endParaRPr lang="en-US" sz="2400" dirty="0"/>
-          </a:p>
-        </p:txBody>
-      </p:sp>
-      <p:sp>
-        <p:nvSpPr>
-          <p:cNvPr id="7" name="rev_0_caja"/>
+            <a:endParaRPr lang="en-US" sz="2300" dirty="0"/>
+          </a:p>
+        </p:txBody>
+      </p:sp>
+      <p:sp>
+        <p:nvSpPr>
+          <p:cNvPr id="8" name="rev_0_caja"/>
           <p:cNvSpPr/>
           <p:nvPr/>
         </p:nvSpPr>
         <p:spPr>
           <a:xfrm>
-            <a:off x="6702552" y="2002536"/>
-            <a:ext cx="4937760" cy="665683"/>
+            <a:off x="4152839" y="2002536"/>
+            <a:ext cx="3326953" cy="665683"/>
           </a:xfrm>
           <a:prstGeom prst="roundRect">
             <a:avLst>
@@ -26073,14 +26295,14 @@
       </p:sp>
       <p:sp>
         <p:nvSpPr>
-          <p:cNvPr id="8" name="rev_0_txt"/>
+          <p:cNvPr id="9" name="rev_0_txt"/>
           <p:cNvSpPr txBox="1"/>
           <p:nvPr/>
         </p:nvSpPr>
         <p:spPr>
           <a:xfrm>
-            <a:off x="6793992" y="2002536"/>
-            <a:ext cx="4754880" cy="665683"/>
+            <a:off x="4244279" y="2002536"/>
+            <a:ext cx="3144073" cy="665683"/>
           </a:xfrm>
           <a:prstGeom prst="rect">
             <a:avLst/>
@@ -26114,7 +26336,7 @@
       </p:sp>
       <p:sp>
         <p:nvSpPr>
-          <p:cNvPr id="9" name="num_1"/>
+          <p:cNvPr id="10" name="num_1"/>
           <p:cNvSpPr/>
           <p:nvPr/>
         </p:nvSpPr>
@@ -26139,7 +26361,7 @@
       </p:sp>
       <p:sp>
         <p:nvSpPr>
-          <p:cNvPr id="10" name="Text 8"/>
+          <p:cNvPr id="11" name="Text 8"/>
           <p:cNvSpPr txBox="1"/>
           <p:nvPr/>
         </p:nvSpPr>
@@ -26177,14 +26399,14 @@
       </p:sp>
       <p:sp>
         <p:nvSpPr>
-          <p:cNvPr id="11" name="Text 9"/>
+          <p:cNvPr id="12" name="Text 9"/>
           <p:cNvSpPr txBox="1"/>
           <p:nvPr/>
         </p:nvSpPr>
         <p:spPr>
           <a:xfrm>
             <a:off x="1188720" y="2832811"/>
-            <a:ext cx="5285232" cy="738835"/>
+            <a:ext cx="2735519" cy="738835"/>
           </a:xfrm>
           <a:prstGeom prst="rect">
             <a:avLst/>
@@ -26202,7 +26424,7 @@
               <a:buNone/>
             </a:pPr>
             <a:r>
-              <a:rPr lang="ko-KR" altLang="en-US" sz="2400" dirty="0">
+              <a:rPr lang="ko-KR" altLang="en-US" sz="2300" dirty="0">
                 <a:solidFill>
                   <a:srgbClr val="14142B"/>
                 </a:solidFill>
@@ -26213,7 +26435,7 @@
               <a:t>커피가 컴퓨터 </a:t>
             </a:r>
             <a:r>
-              <a:rPr lang="en-US" sz="2400" dirty="0">
+              <a:rPr lang="en-US" sz="2300" dirty="0">
                 <a:solidFill>
                   <a:srgbClr val="14142B"/>
                 </a:solidFill>
@@ -26221,7 +26443,7 @@
               <a:t>___</a:t>
             </a:r>
             <a:r>
-              <a:rPr lang="ko-KR" altLang="en-US" sz="2400" dirty="0">
+              <a:rPr lang="ko-KR" altLang="en-US" sz="2300" dirty="0">
                 <a:solidFill>
                   <a:srgbClr val="14142B"/>
                 </a:solidFill>
@@ -26232,27 +26454,27 @@
               <a:t>에 있어요</a:t>
             </a:r>
             <a:r>
-              <a:rPr lang="en-US" sz="2400" dirty="0">
+              <a:rPr lang="en-US" sz="2300" dirty="0">
                 <a:solidFill>
                   <a:srgbClr val="14142B"/>
                 </a:solidFill>
               </a:rPr>
               <a:t>.</a:t>
             </a:r>
-            <a:endParaRPr lang="en-US" sz="2400" dirty="0"/>
-          </a:p>
-        </p:txBody>
-      </p:sp>
-      <p:sp>
-        <p:nvSpPr>
-          <p:cNvPr id="12" name="rev_1_caja"/>
+            <a:endParaRPr lang="en-US" sz="2300" dirty="0"/>
+          </a:p>
+        </p:txBody>
+      </p:sp>
+      <p:sp>
+        <p:nvSpPr>
+          <p:cNvPr id="13" name="rev_1_caja"/>
           <p:cNvSpPr/>
           <p:nvPr/>
         </p:nvSpPr>
         <p:spPr>
           <a:xfrm>
-            <a:off x="6702552" y="2869387"/>
-            <a:ext cx="4937760" cy="665683"/>
+            <a:off x="4152839" y="2869387"/>
+            <a:ext cx="3326953" cy="665683"/>
           </a:xfrm>
           <a:prstGeom prst="roundRect">
             <a:avLst>
@@ -26272,14 +26494,14 @@
       </p:sp>
       <p:sp>
         <p:nvSpPr>
-          <p:cNvPr id="13" name="rev_1_txt"/>
+          <p:cNvPr id="14" name="rev_1_txt"/>
           <p:cNvSpPr txBox="1"/>
           <p:nvPr/>
         </p:nvSpPr>
         <p:spPr>
           <a:xfrm>
-            <a:off x="6793992" y="2869387"/>
-            <a:ext cx="4754880" cy="665683"/>
+            <a:off x="4244279" y="2869387"/>
+            <a:ext cx="3144073" cy="665683"/>
           </a:xfrm>
           <a:prstGeom prst="rect">
             <a:avLst/>
@@ -26313,7 +26535,7 @@
       </p:sp>
       <p:sp>
         <p:nvSpPr>
-          <p:cNvPr id="14" name="num_2"/>
+          <p:cNvPr id="15" name="num_2"/>
           <p:cNvSpPr/>
           <p:nvPr/>
         </p:nvSpPr>
@@ -26338,7 +26560,7 @@
       </p:sp>
       <p:sp>
         <p:nvSpPr>
-          <p:cNvPr id="15" name="Text 13"/>
+          <p:cNvPr id="16" name="Text 13"/>
           <p:cNvSpPr txBox="1"/>
           <p:nvPr/>
         </p:nvSpPr>
@@ -26376,14 +26598,14 @@
       </p:sp>
       <p:sp>
         <p:nvSpPr>
-          <p:cNvPr id="16" name="Text 14"/>
+          <p:cNvPr id="17" name="Text 14"/>
           <p:cNvSpPr txBox="1"/>
           <p:nvPr/>
         </p:nvSpPr>
         <p:spPr>
           <a:xfrm>
             <a:off x="1188720" y="3699662"/>
-            <a:ext cx="5285232" cy="738835"/>
+            <a:ext cx="2735519" cy="738835"/>
           </a:xfrm>
           <a:prstGeom prst="rect">
             <a:avLst/>
@@ -26401,7 +26623,7 @@
               <a:buNone/>
             </a:pPr>
             <a:r>
-              <a:rPr lang="ko-KR" altLang="en-US" sz="2400" dirty="0">
+              <a:rPr lang="ko-KR" altLang="en-US" sz="2300" dirty="0">
                 <a:solidFill>
                   <a:srgbClr val="14142B"/>
                 </a:solidFill>
@@ -26412,7 +26634,7 @@
               <a:t>책</a:t>
             </a:r>
             <a:r>
-              <a:rPr lang="en-US" sz="2400" dirty="0">
+              <a:rPr lang="en-US" sz="2300" dirty="0">
                 <a:solidFill>
                   <a:srgbClr val="14142B"/>
                 </a:solidFill>
@@ -26420,7 +26642,7 @@
               <a:t>___ </a:t>
             </a:r>
             <a:r>
-              <a:rPr lang="ko-KR" altLang="en-US" sz="2400" dirty="0">
+              <a:rPr lang="ko-KR" altLang="en-US" sz="2300" dirty="0">
                 <a:solidFill>
                   <a:srgbClr val="14142B"/>
                 </a:solidFill>
@@ -26431,27 +26653,27 @@
               <a:t>의자 위에 있어요</a:t>
             </a:r>
             <a:r>
-              <a:rPr lang="en-US" sz="2400" dirty="0">
+              <a:rPr lang="en-US" sz="2300" dirty="0">
                 <a:solidFill>
                   <a:srgbClr val="14142B"/>
                 </a:solidFill>
               </a:rPr>
               <a:t>.</a:t>
             </a:r>
-            <a:endParaRPr lang="en-US" sz="2400" dirty="0"/>
-          </a:p>
-        </p:txBody>
-      </p:sp>
-      <p:sp>
-        <p:nvSpPr>
-          <p:cNvPr id="17" name="rev_2_caja"/>
+            <a:endParaRPr lang="en-US" sz="2300" dirty="0"/>
+          </a:p>
+        </p:txBody>
+      </p:sp>
+      <p:sp>
+        <p:nvSpPr>
+          <p:cNvPr id="18" name="rev_2_caja"/>
           <p:cNvSpPr/>
           <p:nvPr/>
         </p:nvSpPr>
         <p:spPr>
           <a:xfrm>
-            <a:off x="6702552" y="3736238"/>
-            <a:ext cx="4937760" cy="665683"/>
+            <a:off x="4152839" y="3736238"/>
+            <a:ext cx="3326953" cy="665683"/>
           </a:xfrm>
           <a:prstGeom prst="roundRect">
             <a:avLst>
@@ -26471,14 +26693,14 @@
       </p:sp>
       <p:sp>
         <p:nvSpPr>
-          <p:cNvPr id="18" name="rev_2_txt"/>
+          <p:cNvPr id="19" name="rev_2_txt"/>
           <p:cNvSpPr txBox="1"/>
           <p:nvPr/>
         </p:nvSpPr>
         <p:spPr>
           <a:xfrm>
-            <a:off x="6793992" y="3736238"/>
-            <a:ext cx="4754880" cy="665683"/>
+            <a:off x="4244279" y="3736238"/>
+            <a:ext cx="3144073" cy="665683"/>
           </a:xfrm>
           <a:prstGeom prst="rect">
             <a:avLst/>
@@ -26496,7 +26718,7 @@
               <a:buNone/>
             </a:pPr>
             <a:r>
-              <a:rPr lang="ko-KR" altLang="en-US" sz="2200" b="1" dirty="0">
+              <a:rPr lang="ko-KR" altLang="en-US" sz="1900" b="1" dirty="0">
                 <a:solidFill>
                   <a:srgbClr val="FFFFFF"/>
                 </a:solidFill>
@@ -26507,7 +26729,7 @@
               <a:t>이 </a:t>
             </a:r>
             <a:r>
-              <a:rPr lang="en-US" sz="2200" b="1" dirty="0">
+              <a:rPr lang="en-US" sz="1900" b="1" dirty="0">
                 <a:solidFill>
                   <a:srgbClr val="FFFFFF"/>
                 </a:solidFill>
@@ -26515,7 +26737,7 @@
               <a:t>→ </a:t>
             </a:r>
             <a:r>
-              <a:rPr lang="ko-KR" altLang="en-US" sz="2200" b="1" dirty="0">
+              <a:rPr lang="ko-KR" altLang="en-US" sz="1900" b="1" dirty="0">
                 <a:solidFill>
                   <a:srgbClr val="FFFFFF"/>
                 </a:solidFill>
@@ -26526,7 +26748,7 @@
               <a:t>책이 </a:t>
             </a:r>
             <a:r>
-              <a:rPr lang="en-US" sz="2200" b="1" dirty="0">
+              <a:rPr lang="en-US" sz="1900" b="1" dirty="0">
                 <a:solidFill>
                   <a:srgbClr val="FFFFFF"/>
                 </a:solidFill>
@@ -26534,7 +26756,7 @@
               <a:t>(</a:t>
             </a:r>
             <a:r>
-              <a:rPr lang="ko-KR" altLang="en-US" sz="2200" b="1" dirty="0">
+              <a:rPr lang="ko-KR" altLang="en-US" sz="1900" b="1" dirty="0">
                 <a:solidFill>
                   <a:srgbClr val="FFFFFF"/>
                 </a:solidFill>
@@ -26545,7 +26767,7 @@
               <a:t>책 </a:t>
             </a:r>
             <a:r>
-              <a:rPr lang="en-US" sz="2200" b="1" dirty="0">
+              <a:rPr lang="en-US" sz="1900" b="1" dirty="0">
                 <a:solidFill>
                   <a:srgbClr val="FFFFFF"/>
                 </a:solidFill>
@@ -26553,7 +26775,7 @@
               <a:t>termina en </a:t>
             </a:r>
             <a:r>
-              <a:rPr lang="ko-KR" altLang="en-US" sz="2200" b="1" dirty="0">
+              <a:rPr lang="ko-KR" altLang="en-US" sz="1900" b="1" dirty="0">
                 <a:solidFill>
                   <a:srgbClr val="FFFFFF"/>
                 </a:solidFill>
@@ -26564,20 +26786,20 @@
               <a:t>받침</a:t>
             </a:r>
             <a:r>
-              <a:rPr lang="en-US" sz="2200" b="1" dirty="0">
+              <a:rPr lang="en-US" sz="1900" b="1" dirty="0">
                 <a:solidFill>
                   <a:srgbClr val="FFFFFF"/>
                 </a:solidFill>
               </a:rPr>
               <a:t>)</a:t>
             </a:r>
-            <a:endParaRPr lang="en-US" sz="2200" dirty="0"/>
-          </a:p>
-        </p:txBody>
-      </p:sp>
-      <p:sp>
-        <p:nvSpPr>
-          <p:cNvPr id="19" name="num_3"/>
+            <a:endParaRPr lang="en-US" sz="1900" dirty="0"/>
+          </a:p>
+        </p:txBody>
+      </p:sp>
+      <p:sp>
+        <p:nvSpPr>
+          <p:cNvPr id="20" name="num_3"/>
           <p:cNvSpPr/>
           <p:nvPr/>
         </p:nvSpPr>
@@ -26602,7 +26824,7 @@
       </p:sp>
       <p:sp>
         <p:nvSpPr>
-          <p:cNvPr id="20" name="Text 18"/>
+          <p:cNvPr id="21" name="Text 18"/>
           <p:cNvSpPr txBox="1"/>
           <p:nvPr/>
         </p:nvSpPr>
@@ -26640,14 +26862,14 @@
       </p:sp>
       <p:sp>
         <p:nvSpPr>
-          <p:cNvPr id="21" name="Text 19"/>
+          <p:cNvPr id="22" name="Text 19"/>
           <p:cNvSpPr txBox="1"/>
           <p:nvPr/>
         </p:nvSpPr>
         <p:spPr>
           <a:xfrm>
             <a:off x="1188720" y="4566514"/>
-            <a:ext cx="5285232" cy="738835"/>
+            <a:ext cx="2735519" cy="738835"/>
           </a:xfrm>
           <a:prstGeom prst="rect">
             <a:avLst/>
@@ -26665,27 +26887,27 @@
               <a:buNone/>
             </a:pPr>
             <a:r>
-              <a:rPr lang="en-US" sz="2400" dirty="0">
+              <a:rPr lang="en-US" sz="2300" dirty="0">
                 <a:solidFill>
                   <a:srgbClr val="14142B"/>
                 </a:solidFill>
               </a:rPr>
               <a:t>¿Dónde está el banco?</a:t>
             </a:r>
-            <a:endParaRPr lang="en-US" sz="2400" dirty="0"/>
-          </a:p>
-        </p:txBody>
-      </p:sp>
-      <p:sp>
-        <p:nvSpPr>
-          <p:cNvPr id="22" name="rev_3_caja"/>
+            <a:endParaRPr lang="en-US" sz="2300" dirty="0"/>
+          </a:p>
+        </p:txBody>
+      </p:sp>
+      <p:sp>
+        <p:nvSpPr>
+          <p:cNvPr id="23" name="rev_3_caja"/>
           <p:cNvSpPr/>
           <p:nvPr/>
         </p:nvSpPr>
         <p:spPr>
           <a:xfrm>
-            <a:off x="6702552" y="4603090"/>
-            <a:ext cx="4937760" cy="665683"/>
+            <a:off x="4152839" y="4603090"/>
+            <a:ext cx="3326953" cy="665683"/>
           </a:xfrm>
           <a:prstGeom prst="roundRect">
             <a:avLst>
@@ -26705,14 +26927,14 @@
       </p:sp>
       <p:sp>
         <p:nvSpPr>
-          <p:cNvPr id="23" name="rev_3_txt"/>
+          <p:cNvPr id="24" name="rev_3_txt"/>
           <p:cNvSpPr txBox="1"/>
           <p:nvPr/>
         </p:nvSpPr>
         <p:spPr>
           <a:xfrm>
-            <a:off x="6793992" y="4603090"/>
-            <a:ext cx="4754880" cy="665683"/>
+            <a:off x="4244279" y="4603090"/>
+            <a:ext cx="3144073" cy="665683"/>
           </a:xfrm>
           <a:prstGeom prst="rect">
             <a:avLst/>
@@ -26730,7 +26952,7 @@
               <a:buNone/>
             </a:pPr>
             <a:r>
-              <a:rPr lang="ko-KR" altLang="en-US" sz="1900" b="1" dirty="0">
+              <a:rPr lang="ko-KR" altLang="en-US" sz="1700" b="1" dirty="0">
                 <a:solidFill>
                   <a:srgbClr val="FFFFFF"/>
                 </a:solidFill>
@@ -26741,7 +26963,7 @@
               <a:t>은행이 어디예요</a:t>
             </a:r>
             <a:r>
-              <a:rPr lang="en-US" sz="1900" b="1" dirty="0">
+              <a:rPr lang="en-US" sz="1700" b="1" dirty="0">
                 <a:solidFill>
                   <a:srgbClr val="FFFFFF"/>
                 </a:solidFill>
@@ -26749,7 +26971,7 @@
               <a:t>? (también: </a:t>
             </a:r>
             <a:r>
-              <a:rPr lang="ko-KR" altLang="en-US" sz="1900" b="1" dirty="0">
+              <a:rPr lang="ko-KR" altLang="en-US" sz="1700" b="1" dirty="0">
                 <a:solidFill>
                   <a:srgbClr val="FFFFFF"/>
                 </a:solidFill>
@@ -26760,20 +26982,20 @@
               <a:t>은행이 어디에 있어요</a:t>
             </a:r>
             <a:r>
-              <a:rPr lang="en-US" sz="1900" b="1" dirty="0">
+              <a:rPr lang="en-US" sz="1700" b="1" dirty="0">
                 <a:solidFill>
                   <a:srgbClr val="FFFFFF"/>
                 </a:solidFill>
               </a:rPr>
               <a:t>?)</a:t>
             </a:r>
-            <a:endParaRPr lang="en-US" sz="1900" dirty="0"/>
-          </a:p>
-        </p:txBody>
-      </p:sp>
-      <p:sp>
-        <p:nvSpPr>
-          <p:cNvPr id="24" name="num_4"/>
+            <a:endParaRPr lang="en-US" sz="1700" dirty="0"/>
+          </a:p>
+        </p:txBody>
+      </p:sp>
+      <p:sp>
+        <p:nvSpPr>
+          <p:cNvPr id="25" name="num_4"/>
           <p:cNvSpPr/>
           <p:nvPr/>
         </p:nvSpPr>
@@ -26798,7 +27020,7 @@
       </p:sp>
       <p:sp>
         <p:nvSpPr>
-          <p:cNvPr id="25" name="Text 23"/>
+          <p:cNvPr id="26" name="Text 23"/>
           <p:cNvSpPr txBox="1"/>
           <p:nvPr/>
         </p:nvSpPr>
@@ -26836,14 +27058,14 @@
       </p:sp>
       <p:sp>
         <p:nvSpPr>
-          <p:cNvPr id="26" name="Text 24"/>
+          <p:cNvPr id="27" name="Text 24"/>
           <p:cNvSpPr txBox="1"/>
           <p:nvPr/>
         </p:nvSpPr>
         <p:spPr>
           <a:xfrm>
             <a:off x="1188720" y="5433365"/>
-            <a:ext cx="5285232" cy="738835"/>
+            <a:ext cx="2735519" cy="738835"/>
           </a:xfrm>
           <a:prstGeom prst="rect">
             <a:avLst/>
@@ -26861,7 +27083,7 @@
               <a:buNone/>
             </a:pPr>
             <a:r>
-              <a:rPr lang="ko-KR" altLang="en-US" sz="2400" dirty="0">
+              <a:rPr lang="ko-KR" altLang="en-US" sz="2300" dirty="0">
                 <a:solidFill>
                   <a:srgbClr val="14142B"/>
                 </a:solidFill>
@@ -26872,27 +27094,27 @@
               <a:t>우산이 책상 위에 있어요</a:t>
             </a:r>
             <a:r>
-              <a:rPr lang="en-US" sz="2400" dirty="0">
+              <a:rPr lang="en-US" sz="2300" dirty="0">
                 <a:solidFill>
                   <a:srgbClr val="14142B"/>
                 </a:solidFill>
               </a:rPr>
               <a:t>?</a:t>
             </a:r>
-            <a:endParaRPr lang="en-US" sz="2400" dirty="0"/>
-          </a:p>
-        </p:txBody>
-      </p:sp>
-      <p:sp>
-        <p:nvSpPr>
-          <p:cNvPr id="27" name="rev_4_caja"/>
+            <a:endParaRPr lang="en-US" sz="2300" dirty="0"/>
+          </a:p>
+        </p:txBody>
+      </p:sp>
+      <p:sp>
+        <p:nvSpPr>
+          <p:cNvPr id="28" name="rev_4_caja"/>
           <p:cNvSpPr/>
           <p:nvPr/>
         </p:nvSpPr>
         <p:spPr>
           <a:xfrm>
-            <a:off x="6702552" y="5469941"/>
-            <a:ext cx="4937760" cy="665683"/>
+            <a:off x="4152839" y="5469941"/>
+            <a:ext cx="3326953" cy="665683"/>
           </a:xfrm>
           <a:prstGeom prst="roundRect">
             <a:avLst>
@@ -26912,14 +27134,14 @@
       </p:sp>
       <p:sp>
         <p:nvSpPr>
-          <p:cNvPr id="28" name="rev_4_txt"/>
+          <p:cNvPr id="29" name="rev_4_txt"/>
           <p:cNvSpPr txBox="1"/>
           <p:nvPr/>
         </p:nvSpPr>
         <p:spPr>
           <a:xfrm>
-            <a:off x="6793992" y="5469941"/>
-            <a:ext cx="4754880" cy="665683"/>
+            <a:off x="4244279" y="5469941"/>
+            <a:ext cx="3144073" cy="665683"/>
           </a:xfrm>
           <a:prstGeom prst="rect">
             <a:avLst/>
@@ -26980,7 +27202,7 @@
       </p:sp>
       <p:sp>
         <p:nvSpPr>
-          <p:cNvPr id="29" name="Slide Number Placeholder 0"/>
+          <p:cNvPr id="30" name="Slide Number Placeholder 0"/>
           <p:cNvSpPr>
             <a:spLocks noGrp="1"/>
           </p:cNvSpPr>
@@ -27065,7 +27287,7 @@
                                           </p:stCondLst>
                                         </p:cTn>
                                         <p:tgtEl>
-                                          <p:spTgt spid="7"/>
+                                          <p:spTgt spid="8"/>
                                         </p:tgtEl>
                                         <p:attrNameLst>
                                           <p:attrName>style.visibility</p:attrName>
@@ -27092,7 +27314,7 @@
                                           </p:stCondLst>
                                         </p:cTn>
                                         <p:tgtEl>
-                                          <p:spTgt spid="8"/>
+                                          <p:spTgt spid="9"/>
                                         </p:tgtEl>
                                         <p:attrNameLst>
                                           <p:attrName>style.visibility</p:attrName>
@@ -27137,7 +27359,7 @@
                                           </p:stCondLst>
                                         </p:cTn>
                                         <p:tgtEl>
-                                          <p:spTgt spid="12"/>
+                                          <p:spTgt spid="13"/>
                                         </p:tgtEl>
                                         <p:attrNameLst>
                                           <p:attrName>style.visibility</p:attrName>
@@ -27164,7 +27386,7 @@
                                           </p:stCondLst>
                                         </p:cTn>
                                         <p:tgtEl>
-                                          <p:spTgt spid="13"/>
+                                          <p:spTgt spid="14"/>
                                         </p:tgtEl>
                                         <p:attrNameLst>
                                           <p:attrName>style.visibility</p:attrName>
@@ -27209,7 +27431,7 @@
                                           </p:stCondLst>
                                         </p:cTn>
                                         <p:tgtEl>
-                                          <p:spTgt spid="17"/>
+                                          <p:spTgt spid="18"/>
                                         </p:tgtEl>
                                         <p:attrNameLst>
                                           <p:attrName>style.visibility</p:attrName>
@@ -27236,7 +27458,7 @@
                                           </p:stCondLst>
                                         </p:cTn>
                                         <p:tgtEl>
-                                          <p:spTgt spid="18"/>
+                                          <p:spTgt spid="19"/>
                                         </p:tgtEl>
                                         <p:attrNameLst>
                                           <p:attrName>style.visibility</p:attrName>
@@ -27281,7 +27503,7 @@
                                           </p:stCondLst>
                                         </p:cTn>
                                         <p:tgtEl>
-                                          <p:spTgt spid="22"/>
+                                          <p:spTgt spid="23"/>
                                         </p:tgtEl>
                                         <p:attrNameLst>
                                           <p:attrName>style.visibility</p:attrName>
@@ -27308,7 +27530,7 @@
                                           </p:stCondLst>
                                         </p:cTn>
                                         <p:tgtEl>
-                                          <p:spTgt spid="23"/>
+                                          <p:spTgt spid="24"/>
                                         </p:tgtEl>
                                         <p:attrNameLst>
                                           <p:attrName>style.visibility</p:attrName>
@@ -27353,7 +27575,7 @@
                                           </p:stCondLst>
                                         </p:cTn>
                                         <p:tgtEl>
-                                          <p:spTgt spid="27"/>
+                                          <p:spTgt spid="28"/>
                                         </p:tgtEl>
                                         <p:attrNameLst>
                                           <p:attrName>style.visibility</p:attrName>
@@ -27380,7 +27602,7 @@
                                           </p:stCondLst>
                                         </p:cTn>
                                         <p:tgtEl>
-                                          <p:spTgt spid="28"/>
+                                          <p:spTgt spid="29"/>
                                         </p:tgtEl>
                                         <p:attrNameLst>
                                           <p:attrName>style.visibility</p:attrName>
@@ -27421,11 +27643,11 @@
       </p:par>
     </p:tnLst>
     <p:bldLst>
-      <p:bldP spid="8" grpId="0" animBg="1"/>
-      <p:bldP spid="13" grpId="0" animBg="1"/>
-      <p:bldP spid="18" grpId="0" animBg="1"/>
-      <p:bldP spid="23" grpId="0" animBg="1"/>
-      <p:bldP spid="28" grpId="0" animBg="1"/>
+      <p:bldP spid="9" grpId="0" animBg="1"/>
+      <p:bldP spid="14" grpId="0" animBg="1"/>
+      <p:bldP spid="19" grpId="0" animBg="1"/>
+      <p:bldP spid="24" grpId="0" animBg="1"/>
+      <p:bldP spid="29" grpId="0" animBg="1"/>
     </p:bldLst>
   </p:timing>
 </p:sld>
@@ -28012,7 +28234,7 @@
           <p:nvPr>
             <p:extLst>
               <p:ext uri="{D42A27DB-BD31-4B8C-83A1-F6EECF244321}">
-                <p14:modId xmlns:p14="http://schemas.microsoft.com/office/powerpoint/2010/main" val="2938447054"/>
+                <p14:modId xmlns:p14="http://schemas.microsoft.com/office/powerpoint/2010/main" val="1221861107"/>
               </p:ext>
             </p:extLst>
           </p:nvPr>
@@ -29061,7 +29283,7 @@
         <p:spPr>
           <a:xfrm>
             <a:off x="548640" y="1325880"/>
-            <a:ext cx="11064240" cy="548640"/>
+            <a:ext cx="11091672" cy="548640"/>
           </a:xfrm>
           <a:prstGeom prst="rect">
             <a:avLst/>
@@ -29092,14 +29314,72 @@
       </p:sp>
       <p:sp>
         <p:nvSpPr>
-          <p:cNvPr id="4" name="num_0"/>
+          <p:cNvPr id="4" name="card_0"/>
           <p:cNvSpPr/>
           <p:nvPr/>
         </p:nvSpPr>
         <p:spPr>
           <a:xfrm>
-            <a:off x="548640" y="2106778"/>
-            <a:ext cx="457200" cy="457200"/>
+            <a:off x="548640" y="1965960"/>
+            <a:ext cx="2072030" cy="4206240"/>
+          </a:xfrm>
+          <a:prstGeom prst="roundRect">
+            <a:avLst>
+              <a:gd name="adj" fmla="val 6620"/>
+            </a:avLst>
+          </a:prstGeom>
+          <a:solidFill>
+            <a:srgbClr val="FFFFFF"/>
+          </a:solidFill>
+          <a:ln w="12700">
+            <a:solidFill>
+              <a:srgbClr val="D9D7F7"/>
+            </a:solidFill>
+            <a:prstDash val="solid"/>
+          </a:ln>
+          <a:effectLst>
+            <a:outerShdw blurRad="76200" dist="25400" dir="5400000" algn="bl" rotWithShape="0">
+              <a:srgbClr val="14142B">
+                <a:alpha val="12000"/>
+              </a:srgbClr>
+            </a:outerShdw>
+          </a:effectLst>
+        </p:spPr>
+      </p:sp>
+      <p:pic>
+        <p:nvPicPr>
+          <p:cNvPr id="5" name="item_img_0" descr="C:\Users\Chingu\AppData\Local\Temp\claude\C--Users-Chingu-Desktop-ACADEMIASEULWEB\d4111e1b-5523-44ea-97b2-b1a1d9545b9e\scratchpad\decks\cache\img_b2b9b3d55cfff56b.png"/>
+          <p:cNvPicPr>
+            <a:picLocks noChangeAspect="1"/>
+          </p:cNvPicPr>
+          <p:nvPr/>
+        </p:nvPicPr>
+        <p:blipFill>
+          <a:blip r:embed="rId3"/>
+          <a:stretch>
+            <a:fillRect/>
+          </a:stretch>
+        </p:blipFill>
+        <p:spPr>
+          <a:xfrm>
+            <a:off x="670255" y="2057400"/>
+            <a:ext cx="1828800" cy="1828800"/>
+          </a:xfrm>
+          <a:prstGeom prst="rect">
+            <a:avLst/>
+          </a:prstGeom>
+        </p:spPr>
+      </p:pic>
+      <p:sp>
+        <p:nvSpPr>
+          <p:cNvPr id="6" name="num_0"/>
+          <p:cNvSpPr/>
+          <p:nvPr/>
+        </p:nvSpPr>
+        <p:spPr>
+          <a:xfrm>
+            <a:off x="640080" y="2057400"/>
+            <a:ext cx="420624" cy="420624"/>
           </a:xfrm>
           <a:prstGeom prst="ellipse">
             <a:avLst/>
@@ -29107,9 +29387,9 @@
           <a:solidFill>
             <a:srgbClr val="003478"/>
           </a:solidFill>
-          <a:ln w="12700">
+          <a:ln w="19050">
             <a:solidFill>
-              <a:srgbClr val="003478"/>
+              <a:srgbClr val="FFFFFF"/>
             </a:solidFill>
             <a:prstDash val="solid"/>
           </a:ln>
@@ -29117,14 +29397,14 @@
       </p:sp>
       <p:sp>
         <p:nvSpPr>
-          <p:cNvPr id="5" name="Text 3"/>
+          <p:cNvPr id="7" name="Text 4"/>
           <p:cNvSpPr txBox="1"/>
           <p:nvPr/>
         </p:nvSpPr>
         <p:spPr>
           <a:xfrm>
-            <a:off x="548640" y="2106778"/>
-            <a:ext cx="457200" cy="457200"/>
+            <a:off x="640080" y="2057400"/>
+            <a:ext cx="420624" cy="420624"/>
           </a:xfrm>
           <a:prstGeom prst="rect">
             <a:avLst/>
@@ -29142,27 +29422,27 @@
               <a:buNone/>
             </a:pPr>
             <a:r>
-              <a:rPr lang="en-US" sz="1600" b="1" dirty="0">
+              <a:rPr lang="en-US" sz="1500" b="1" dirty="0">
                 <a:solidFill>
                   <a:srgbClr val="FFFFFF"/>
                 </a:solidFill>
               </a:rPr>
               <a:t>1</a:t>
             </a:r>
-            <a:endParaRPr lang="en-US" sz="1600" dirty="0"/>
-          </a:p>
-        </p:txBody>
-      </p:sp>
-      <p:sp>
-        <p:nvSpPr>
-          <p:cNvPr id="6" name="Text 4"/>
+            <a:endParaRPr lang="en-US" sz="1500" dirty="0"/>
+          </a:p>
+        </p:txBody>
+      </p:sp>
+      <p:sp>
+        <p:nvSpPr>
+          <p:cNvPr id="8" name="Text 5"/>
           <p:cNvSpPr txBox="1"/>
           <p:nvPr/>
         </p:nvSpPr>
         <p:spPr>
           <a:xfrm>
-            <a:off x="1188720" y="1965960"/>
-            <a:ext cx="5285232" cy="738835"/>
+            <a:off x="640080" y="3931920"/>
+            <a:ext cx="1889150" cy="1234440"/>
           </a:xfrm>
           <a:prstGeom prst="rect">
             <a:avLst/>
@@ -29176,35 +29456,35 @@
           </a:bodyPr>
           <a:lstStyle/>
           <a:p>
-            <a:pPr marL="0" indent="0" eaLnBrk="1">
+            <a:pPr marL="0" indent="0" algn="ctr" eaLnBrk="1">
               <a:buNone/>
             </a:pPr>
             <a:r>
-              <a:rPr lang="en-US" sz="2400" dirty="0">
+              <a:rPr lang="en-US" sz="2200" dirty="0">
                 <a:solidFill>
                   <a:srgbClr val="14142B"/>
                 </a:solidFill>
               </a:rPr>
               <a:t>Imagen 1</a:t>
             </a:r>
-            <a:endParaRPr lang="en-US" sz="2400" dirty="0"/>
-          </a:p>
-        </p:txBody>
-      </p:sp>
-      <p:sp>
-        <p:nvSpPr>
-          <p:cNvPr id="7" name="rev_5_caja"/>
+            <a:endParaRPr lang="en-US" sz="2200" dirty="0"/>
+          </a:p>
+        </p:txBody>
+      </p:sp>
+      <p:sp>
+        <p:nvSpPr>
+          <p:cNvPr id="9" name="rev_5_caja"/>
           <p:cNvSpPr/>
           <p:nvPr/>
         </p:nvSpPr>
         <p:spPr>
           <a:xfrm>
-            <a:off x="6702552" y="2002536"/>
-            <a:ext cx="4937760" cy="665683"/>
+            <a:off x="658368" y="5212080"/>
+            <a:ext cx="1852574" cy="868680"/>
           </a:xfrm>
           <a:prstGeom prst="roundRect">
             <a:avLst>
-              <a:gd name="adj" fmla="val 16484"/>
+              <a:gd name="adj" fmla="val 12632"/>
             </a:avLst>
           </a:prstGeom>
           <a:solidFill>
@@ -29220,14 +29500,14 @@
       </p:sp>
       <p:sp>
         <p:nvSpPr>
-          <p:cNvPr id="8" name="rev_5_txt"/>
+          <p:cNvPr id="10" name="rev_5_txt"/>
           <p:cNvSpPr txBox="1"/>
           <p:nvPr/>
         </p:nvSpPr>
         <p:spPr>
           <a:xfrm>
-            <a:off x="6793992" y="2002536"/>
-            <a:ext cx="4754880" cy="665683"/>
+            <a:off x="685800" y="5212080"/>
+            <a:ext cx="1797710" cy="868680"/>
           </a:xfrm>
           <a:prstGeom prst="rect">
             <a:avLst/>
@@ -29245,27 +29525,85 @@
               <a:buNone/>
             </a:pPr>
             <a:r>
-              <a:rPr lang="en-US" sz="2200" b="1" dirty="0">
+              <a:rPr lang="en-US" sz="1700" b="1" dirty="0">
                 <a:solidFill>
                   <a:srgbClr val="FFFFFF"/>
                 </a:solidFill>
               </a:rPr>
               <a:t>Se levanta.</a:t>
             </a:r>
-            <a:endParaRPr lang="en-US" sz="2200" dirty="0"/>
-          </a:p>
-        </p:txBody>
-      </p:sp>
-      <p:sp>
-        <p:nvSpPr>
-          <p:cNvPr id="9" name="num_1"/>
+            <a:endParaRPr lang="en-US" sz="1700" dirty="0"/>
+          </a:p>
+        </p:txBody>
+      </p:sp>
+      <p:sp>
+        <p:nvSpPr>
+          <p:cNvPr id="11" name="card_1"/>
           <p:cNvSpPr/>
           <p:nvPr/>
         </p:nvSpPr>
         <p:spPr>
           <a:xfrm>
-            <a:off x="548640" y="2973629"/>
-            <a:ext cx="457200" cy="457200"/>
+            <a:off x="2803550" y="1965960"/>
+            <a:ext cx="2072030" cy="4206240"/>
+          </a:xfrm>
+          <a:prstGeom prst="roundRect">
+            <a:avLst>
+              <a:gd name="adj" fmla="val 6620"/>
+            </a:avLst>
+          </a:prstGeom>
+          <a:solidFill>
+            <a:srgbClr val="FFFFFF"/>
+          </a:solidFill>
+          <a:ln w="12700">
+            <a:solidFill>
+              <a:srgbClr val="D9D7F7"/>
+            </a:solidFill>
+            <a:prstDash val="solid"/>
+          </a:ln>
+          <a:effectLst>
+            <a:outerShdw blurRad="76200" dist="25400" dir="5400000" algn="bl" rotWithShape="0">
+              <a:srgbClr val="14142B">
+                <a:alpha val="12000"/>
+              </a:srgbClr>
+            </a:outerShdw>
+          </a:effectLst>
+        </p:spPr>
+      </p:sp>
+      <p:pic>
+        <p:nvPicPr>
+          <p:cNvPr id="12" name="item_img_1" descr="C:\Users\Chingu\AppData\Local\Temp\claude\C--Users-Chingu-Desktop-ACADEMIASEULWEB\d4111e1b-5523-44ea-97b2-b1a1d9545b9e\scratchpad\decks\cache\img_34e2704b45229a72.png"/>
+          <p:cNvPicPr>
+            <a:picLocks noChangeAspect="1"/>
+          </p:cNvPicPr>
+          <p:nvPr/>
+        </p:nvPicPr>
+        <p:blipFill>
+          <a:blip r:embed="rId4"/>
+          <a:stretch>
+            <a:fillRect/>
+          </a:stretch>
+        </p:blipFill>
+        <p:spPr>
+          <a:xfrm>
+            <a:off x="2925166" y="2057400"/>
+            <a:ext cx="1828800" cy="1828800"/>
+          </a:xfrm>
+          <a:prstGeom prst="rect">
+            <a:avLst/>
+          </a:prstGeom>
+        </p:spPr>
+      </p:pic>
+      <p:sp>
+        <p:nvSpPr>
+          <p:cNvPr id="13" name="num_1"/>
+          <p:cNvSpPr/>
+          <p:nvPr/>
+        </p:nvSpPr>
+        <p:spPr>
+          <a:xfrm>
+            <a:off x="2894990" y="2057400"/>
+            <a:ext cx="420624" cy="420624"/>
           </a:xfrm>
           <a:prstGeom prst="ellipse">
             <a:avLst/>
@@ -29273,9 +29611,9 @@
           <a:solidFill>
             <a:srgbClr val="003478"/>
           </a:solidFill>
-          <a:ln w="12700">
+          <a:ln w="19050">
             <a:solidFill>
-              <a:srgbClr val="003478"/>
+              <a:srgbClr val="FFFFFF"/>
             </a:solidFill>
             <a:prstDash val="solid"/>
           </a:ln>
@@ -29283,14 +29621,14 @@
       </p:sp>
       <p:sp>
         <p:nvSpPr>
-          <p:cNvPr id="10" name="Text 8"/>
+          <p:cNvPr id="14" name="Text 10"/>
           <p:cNvSpPr txBox="1"/>
           <p:nvPr/>
         </p:nvSpPr>
         <p:spPr>
           <a:xfrm>
-            <a:off x="548640" y="2973629"/>
-            <a:ext cx="457200" cy="457200"/>
+            <a:off x="2894990" y="2057400"/>
+            <a:ext cx="420624" cy="420624"/>
           </a:xfrm>
           <a:prstGeom prst="rect">
             <a:avLst/>
@@ -29308,27 +29646,27 @@
               <a:buNone/>
             </a:pPr>
             <a:r>
-              <a:rPr lang="en-US" sz="1600" b="1" dirty="0">
+              <a:rPr lang="en-US" sz="1500" b="1" dirty="0">
                 <a:solidFill>
                   <a:srgbClr val="FFFFFF"/>
                 </a:solidFill>
               </a:rPr>
               <a:t>2</a:t>
             </a:r>
-            <a:endParaRPr lang="en-US" sz="1600" dirty="0"/>
-          </a:p>
-        </p:txBody>
-      </p:sp>
-      <p:sp>
-        <p:nvSpPr>
-          <p:cNvPr id="11" name="Text 9"/>
+            <a:endParaRPr lang="en-US" sz="1500" dirty="0"/>
+          </a:p>
+        </p:txBody>
+      </p:sp>
+      <p:sp>
+        <p:nvSpPr>
+          <p:cNvPr id="15" name="Text 11"/>
           <p:cNvSpPr txBox="1"/>
           <p:nvPr/>
         </p:nvSpPr>
         <p:spPr>
           <a:xfrm>
-            <a:off x="1188720" y="2832811"/>
-            <a:ext cx="5285232" cy="738835"/>
+            <a:off x="2894990" y="3931920"/>
+            <a:ext cx="1889150" cy="1234440"/>
           </a:xfrm>
           <a:prstGeom prst="rect">
             <a:avLst/>
@@ -29342,35 +29680,35 @@
           </a:bodyPr>
           <a:lstStyle/>
           <a:p>
-            <a:pPr marL="0" indent="0" eaLnBrk="1">
+            <a:pPr marL="0" indent="0" algn="ctr" eaLnBrk="1">
               <a:buNone/>
             </a:pPr>
             <a:r>
-              <a:rPr lang="en-US" sz="2400" dirty="0">
+              <a:rPr lang="en-US" sz="2200" dirty="0">
                 <a:solidFill>
                   <a:srgbClr val="14142B"/>
                 </a:solidFill>
               </a:rPr>
               <a:t>Imagen 2</a:t>
             </a:r>
-            <a:endParaRPr lang="en-US" sz="2400" dirty="0"/>
-          </a:p>
-        </p:txBody>
-      </p:sp>
-      <p:sp>
-        <p:nvSpPr>
-          <p:cNvPr id="12" name="rev_6_caja"/>
+            <a:endParaRPr lang="en-US" sz="2200" dirty="0"/>
+          </a:p>
+        </p:txBody>
+      </p:sp>
+      <p:sp>
+        <p:nvSpPr>
+          <p:cNvPr id="16" name="rev_6_caja"/>
           <p:cNvSpPr/>
           <p:nvPr/>
         </p:nvSpPr>
         <p:spPr>
           <a:xfrm>
-            <a:off x="6702552" y="2869387"/>
-            <a:ext cx="4937760" cy="665683"/>
+            <a:off x="2913278" y="5212080"/>
+            <a:ext cx="1852574" cy="868680"/>
           </a:xfrm>
           <a:prstGeom prst="roundRect">
             <a:avLst>
-              <a:gd name="adj" fmla="val 16484"/>
+              <a:gd name="adj" fmla="val 12632"/>
             </a:avLst>
           </a:prstGeom>
           <a:solidFill>
@@ -29386,14 +29724,14 @@
       </p:sp>
       <p:sp>
         <p:nvSpPr>
-          <p:cNvPr id="13" name="rev_6_txt"/>
+          <p:cNvPr id="17" name="rev_6_txt"/>
           <p:cNvSpPr txBox="1"/>
           <p:nvPr/>
         </p:nvSpPr>
         <p:spPr>
           <a:xfrm>
-            <a:off x="6793992" y="2869387"/>
-            <a:ext cx="4754880" cy="665683"/>
+            <a:off x="2940710" y="5212080"/>
+            <a:ext cx="1797710" cy="868680"/>
           </a:xfrm>
           <a:prstGeom prst="rect">
             <a:avLst/>
@@ -29411,27 +29749,85 @@
               <a:buNone/>
             </a:pPr>
             <a:r>
-              <a:rPr lang="en-US" sz="2200" b="1" dirty="0">
+              <a:rPr lang="en-US" sz="1700" b="1" dirty="0">
                 <a:solidFill>
                   <a:srgbClr val="FFFFFF"/>
                 </a:solidFill>
               </a:rPr>
               <a:t>Toma café todos los días.</a:t>
             </a:r>
-            <a:endParaRPr lang="en-US" sz="2200" dirty="0"/>
-          </a:p>
-        </p:txBody>
-      </p:sp>
-      <p:sp>
-        <p:nvSpPr>
-          <p:cNvPr id="14" name="num_2"/>
+            <a:endParaRPr lang="en-US" sz="1700" dirty="0"/>
+          </a:p>
+        </p:txBody>
+      </p:sp>
+      <p:sp>
+        <p:nvSpPr>
+          <p:cNvPr id="18" name="card_2"/>
           <p:cNvSpPr/>
           <p:nvPr/>
         </p:nvSpPr>
         <p:spPr>
           <a:xfrm>
-            <a:off x="548640" y="3840480"/>
-            <a:ext cx="457200" cy="457200"/>
+            <a:off x="5058461" y="1965960"/>
+            <a:ext cx="2072030" cy="4206240"/>
+          </a:xfrm>
+          <a:prstGeom prst="roundRect">
+            <a:avLst>
+              <a:gd name="adj" fmla="val 6620"/>
+            </a:avLst>
+          </a:prstGeom>
+          <a:solidFill>
+            <a:srgbClr val="FFFFFF"/>
+          </a:solidFill>
+          <a:ln w="12700">
+            <a:solidFill>
+              <a:srgbClr val="D9D7F7"/>
+            </a:solidFill>
+            <a:prstDash val="solid"/>
+          </a:ln>
+          <a:effectLst>
+            <a:outerShdw blurRad="76200" dist="25400" dir="5400000" algn="bl" rotWithShape="0">
+              <a:srgbClr val="14142B">
+                <a:alpha val="12000"/>
+              </a:srgbClr>
+            </a:outerShdw>
+          </a:effectLst>
+        </p:spPr>
+      </p:sp>
+      <p:pic>
+        <p:nvPicPr>
+          <p:cNvPr id="19" name="item_img_2" descr="C:\Users\Chingu\AppData\Local\Temp\claude\C--Users-Chingu-Desktop-ACADEMIASEULWEB\d4111e1b-5523-44ea-97b2-b1a1d9545b9e\scratchpad\decks\cache\img_2c4e47e0cd3483cf.png"/>
+          <p:cNvPicPr>
+            <a:picLocks noChangeAspect="1"/>
+          </p:cNvPicPr>
+          <p:nvPr/>
+        </p:nvPicPr>
+        <p:blipFill>
+          <a:blip r:embed="rId5"/>
+          <a:stretch>
+            <a:fillRect/>
+          </a:stretch>
+        </p:blipFill>
+        <p:spPr>
+          <a:xfrm>
+            <a:off x="5180076" y="2057400"/>
+            <a:ext cx="1828800" cy="1828800"/>
+          </a:xfrm>
+          <a:prstGeom prst="rect">
+            <a:avLst/>
+          </a:prstGeom>
+        </p:spPr>
+      </p:pic>
+      <p:sp>
+        <p:nvSpPr>
+          <p:cNvPr id="20" name="num_2"/>
+          <p:cNvSpPr/>
+          <p:nvPr/>
+        </p:nvSpPr>
+        <p:spPr>
+          <a:xfrm>
+            <a:off x="5149901" y="2057400"/>
+            <a:ext cx="420624" cy="420624"/>
           </a:xfrm>
           <a:prstGeom prst="ellipse">
             <a:avLst/>
@@ -29439,9 +29835,9 @@
           <a:solidFill>
             <a:srgbClr val="003478"/>
           </a:solidFill>
-          <a:ln w="12700">
+          <a:ln w="19050">
             <a:solidFill>
-              <a:srgbClr val="003478"/>
+              <a:srgbClr val="FFFFFF"/>
             </a:solidFill>
             <a:prstDash val="solid"/>
           </a:ln>
@@ -29449,14 +29845,14 @@
       </p:sp>
       <p:sp>
         <p:nvSpPr>
-          <p:cNvPr id="15" name="Text 13"/>
+          <p:cNvPr id="21" name="Text 16"/>
           <p:cNvSpPr txBox="1"/>
           <p:nvPr/>
         </p:nvSpPr>
         <p:spPr>
           <a:xfrm>
-            <a:off x="548640" y="3840480"/>
-            <a:ext cx="457200" cy="457200"/>
+            <a:off x="5149901" y="2057400"/>
+            <a:ext cx="420624" cy="420624"/>
           </a:xfrm>
           <a:prstGeom prst="rect">
             <a:avLst/>
@@ -29474,27 +29870,27 @@
               <a:buNone/>
             </a:pPr>
             <a:r>
-              <a:rPr lang="en-US" sz="1600" b="1" dirty="0">
+              <a:rPr lang="en-US" sz="1500" b="1" dirty="0">
                 <a:solidFill>
                   <a:srgbClr val="FFFFFF"/>
                 </a:solidFill>
               </a:rPr>
               <a:t>3</a:t>
             </a:r>
-            <a:endParaRPr lang="en-US" sz="1600" dirty="0"/>
-          </a:p>
-        </p:txBody>
-      </p:sp>
-      <p:sp>
-        <p:nvSpPr>
-          <p:cNvPr id="16" name="Text 14"/>
+            <a:endParaRPr lang="en-US" sz="1500" dirty="0"/>
+          </a:p>
+        </p:txBody>
+      </p:sp>
+      <p:sp>
+        <p:nvSpPr>
+          <p:cNvPr id="22" name="Text 17"/>
           <p:cNvSpPr txBox="1"/>
           <p:nvPr/>
         </p:nvSpPr>
         <p:spPr>
           <a:xfrm>
-            <a:off x="1188720" y="3699662"/>
-            <a:ext cx="5285232" cy="738835"/>
+            <a:off x="5149901" y="3931920"/>
+            <a:ext cx="1889150" cy="1234440"/>
           </a:xfrm>
           <a:prstGeom prst="rect">
             <a:avLst/>
@@ -29508,35 +29904,35 @@
           </a:bodyPr>
           <a:lstStyle/>
           <a:p>
-            <a:pPr marL="0" indent="0" eaLnBrk="1">
+            <a:pPr marL="0" indent="0" algn="ctr" eaLnBrk="1">
               <a:buNone/>
             </a:pPr>
             <a:r>
-              <a:rPr lang="en-US" sz="2400" dirty="0">
+              <a:rPr lang="en-US" sz="2200" dirty="0">
                 <a:solidFill>
                   <a:srgbClr val="14142B"/>
                 </a:solidFill>
               </a:rPr>
               <a:t>Imagen 3</a:t>
             </a:r>
-            <a:endParaRPr lang="en-US" sz="2400" dirty="0"/>
-          </a:p>
-        </p:txBody>
-      </p:sp>
-      <p:sp>
-        <p:nvSpPr>
-          <p:cNvPr id="17" name="rev_7_caja"/>
+            <a:endParaRPr lang="en-US" sz="2200" dirty="0"/>
+          </a:p>
+        </p:txBody>
+      </p:sp>
+      <p:sp>
+        <p:nvSpPr>
+          <p:cNvPr id="23" name="rev_7_caja"/>
           <p:cNvSpPr/>
           <p:nvPr/>
         </p:nvSpPr>
         <p:spPr>
           <a:xfrm>
-            <a:off x="6702552" y="3736238"/>
-            <a:ext cx="4937760" cy="665683"/>
+            <a:off x="5168189" y="5212080"/>
+            <a:ext cx="1852574" cy="868680"/>
           </a:xfrm>
           <a:prstGeom prst="roundRect">
             <a:avLst>
-              <a:gd name="adj" fmla="val 16484"/>
+              <a:gd name="adj" fmla="val 12632"/>
             </a:avLst>
           </a:prstGeom>
           <a:solidFill>
@@ -29552,14 +29948,14 @@
       </p:sp>
       <p:sp>
         <p:nvSpPr>
-          <p:cNvPr id="18" name="rev_7_txt"/>
+          <p:cNvPr id="24" name="rev_7_txt"/>
           <p:cNvSpPr txBox="1"/>
           <p:nvPr/>
         </p:nvSpPr>
         <p:spPr>
           <a:xfrm>
-            <a:off x="6793992" y="3736238"/>
-            <a:ext cx="4754880" cy="665683"/>
+            <a:off x="5195621" y="5212080"/>
+            <a:ext cx="1797710" cy="868680"/>
           </a:xfrm>
           <a:prstGeom prst="rect">
             <a:avLst/>
@@ -29577,27 +29973,85 @@
               <a:buNone/>
             </a:pPr>
             <a:r>
-              <a:rPr lang="en-US" sz="2000" b="1" dirty="0">
+              <a:rPr lang="en-US" sz="1700" b="1" dirty="0">
                 <a:solidFill>
                   <a:srgbClr val="FFFFFF"/>
                 </a:solidFill>
               </a:rPr>
               <a:t>Va al parque y hace ejercicio.</a:t>
             </a:r>
-            <a:endParaRPr lang="en-US" sz="2000" dirty="0"/>
-          </a:p>
-        </p:txBody>
-      </p:sp>
-      <p:sp>
-        <p:nvSpPr>
-          <p:cNvPr id="19" name="num_3"/>
+            <a:endParaRPr lang="en-US" sz="1700" dirty="0"/>
+          </a:p>
+        </p:txBody>
+      </p:sp>
+      <p:sp>
+        <p:nvSpPr>
+          <p:cNvPr id="25" name="card_3"/>
           <p:cNvSpPr/>
           <p:nvPr/>
         </p:nvSpPr>
         <p:spPr>
           <a:xfrm>
-            <a:off x="548640" y="4707331"/>
-            <a:ext cx="457200" cy="457200"/>
+            <a:off x="7313371" y="1965960"/>
+            <a:ext cx="2072030" cy="4206240"/>
+          </a:xfrm>
+          <a:prstGeom prst="roundRect">
+            <a:avLst>
+              <a:gd name="adj" fmla="val 6620"/>
+            </a:avLst>
+          </a:prstGeom>
+          <a:solidFill>
+            <a:srgbClr val="FFFFFF"/>
+          </a:solidFill>
+          <a:ln w="12700">
+            <a:solidFill>
+              <a:srgbClr val="D9D7F7"/>
+            </a:solidFill>
+            <a:prstDash val="solid"/>
+          </a:ln>
+          <a:effectLst>
+            <a:outerShdw blurRad="76200" dist="25400" dir="5400000" algn="bl" rotWithShape="0">
+              <a:srgbClr val="14142B">
+                <a:alpha val="12000"/>
+              </a:srgbClr>
+            </a:outerShdw>
+          </a:effectLst>
+        </p:spPr>
+      </p:sp>
+      <p:pic>
+        <p:nvPicPr>
+          <p:cNvPr id="26" name="item_img_3" descr="C:\Users\Chingu\AppData\Local\Temp\claude\C--Users-Chingu-Desktop-ACADEMIASEULWEB\d4111e1b-5523-44ea-97b2-b1a1d9545b9e\scratchpad\decks\cache\img_517fc8860eb4f783.png"/>
+          <p:cNvPicPr>
+            <a:picLocks noChangeAspect="1"/>
+          </p:cNvPicPr>
+          <p:nvPr/>
+        </p:nvPicPr>
+        <p:blipFill>
+          <a:blip r:embed="rId6"/>
+          <a:stretch>
+            <a:fillRect/>
+          </a:stretch>
+        </p:blipFill>
+        <p:spPr>
+          <a:xfrm>
+            <a:off x="7434986" y="2057400"/>
+            <a:ext cx="1828800" cy="1828800"/>
+          </a:xfrm>
+          <a:prstGeom prst="rect">
+            <a:avLst/>
+          </a:prstGeom>
+        </p:spPr>
+      </p:pic>
+      <p:sp>
+        <p:nvSpPr>
+          <p:cNvPr id="27" name="num_3"/>
+          <p:cNvSpPr/>
+          <p:nvPr/>
+        </p:nvSpPr>
+        <p:spPr>
+          <a:xfrm>
+            <a:off x="7404811" y="2057400"/>
+            <a:ext cx="420624" cy="420624"/>
           </a:xfrm>
           <a:prstGeom prst="ellipse">
             <a:avLst/>
@@ -29605,9 +30059,9 @@
           <a:solidFill>
             <a:srgbClr val="003478"/>
           </a:solidFill>
-          <a:ln w="12700">
+          <a:ln w="19050">
             <a:solidFill>
-              <a:srgbClr val="003478"/>
+              <a:srgbClr val="FFFFFF"/>
             </a:solidFill>
             <a:prstDash val="solid"/>
           </a:ln>
@@ -29615,14 +30069,14 @@
       </p:sp>
       <p:sp>
         <p:nvSpPr>
-          <p:cNvPr id="20" name="Text 18"/>
+          <p:cNvPr id="28" name="Text 22"/>
           <p:cNvSpPr txBox="1"/>
           <p:nvPr/>
         </p:nvSpPr>
         <p:spPr>
           <a:xfrm>
-            <a:off x="548640" y="4707331"/>
-            <a:ext cx="457200" cy="457200"/>
+            <a:off x="7404811" y="2057400"/>
+            <a:ext cx="420624" cy="420624"/>
           </a:xfrm>
           <a:prstGeom prst="rect">
             <a:avLst/>
@@ -29640,27 +30094,27 @@
               <a:buNone/>
             </a:pPr>
             <a:r>
-              <a:rPr lang="en-US" sz="1600" b="1" dirty="0">
+              <a:rPr lang="en-US" sz="1500" b="1" dirty="0">
                 <a:solidFill>
                   <a:srgbClr val="FFFFFF"/>
                 </a:solidFill>
               </a:rPr>
               <a:t>4</a:t>
             </a:r>
-            <a:endParaRPr lang="en-US" sz="1600" dirty="0"/>
-          </a:p>
-        </p:txBody>
-      </p:sp>
-      <p:sp>
-        <p:nvSpPr>
-          <p:cNvPr id="21" name="Text 19"/>
+            <a:endParaRPr lang="en-US" sz="1500" dirty="0"/>
+          </a:p>
+        </p:txBody>
+      </p:sp>
+      <p:sp>
+        <p:nvSpPr>
+          <p:cNvPr id="29" name="Text 23"/>
           <p:cNvSpPr txBox="1"/>
           <p:nvPr/>
         </p:nvSpPr>
         <p:spPr>
           <a:xfrm>
-            <a:off x="1188720" y="4566514"/>
-            <a:ext cx="5285232" cy="738835"/>
+            <a:off x="7404811" y="3931920"/>
+            <a:ext cx="1889150" cy="1234440"/>
           </a:xfrm>
           <a:prstGeom prst="rect">
             <a:avLst/>
@@ -29674,35 +30128,35 @@
           </a:bodyPr>
           <a:lstStyle/>
           <a:p>
-            <a:pPr marL="0" indent="0" eaLnBrk="1">
+            <a:pPr marL="0" indent="0" algn="ctr" eaLnBrk="1">
               <a:buNone/>
             </a:pPr>
             <a:r>
-              <a:rPr lang="en-US" sz="2400" dirty="0">
+              <a:rPr lang="en-US" sz="2200" dirty="0">
                 <a:solidFill>
                   <a:srgbClr val="14142B"/>
                 </a:solidFill>
               </a:rPr>
               <a:t>Imagen 4</a:t>
             </a:r>
-            <a:endParaRPr lang="en-US" sz="2400" dirty="0"/>
-          </a:p>
-        </p:txBody>
-      </p:sp>
-      <p:sp>
-        <p:nvSpPr>
-          <p:cNvPr id="22" name="rev_8_caja"/>
+            <a:endParaRPr lang="en-US" sz="2200" dirty="0"/>
+          </a:p>
+        </p:txBody>
+      </p:sp>
+      <p:sp>
+        <p:nvSpPr>
+          <p:cNvPr id="30" name="rev_8_caja"/>
           <p:cNvSpPr/>
           <p:nvPr/>
         </p:nvSpPr>
         <p:spPr>
           <a:xfrm>
-            <a:off x="6702552" y="4603090"/>
-            <a:ext cx="4937760" cy="665683"/>
+            <a:off x="7423099" y="5212080"/>
+            <a:ext cx="1852574" cy="868680"/>
           </a:xfrm>
           <a:prstGeom prst="roundRect">
             <a:avLst>
-              <a:gd name="adj" fmla="val 16484"/>
+              <a:gd name="adj" fmla="val 12632"/>
             </a:avLst>
           </a:prstGeom>
           <a:solidFill>
@@ -29718,14 +30172,14 @@
       </p:sp>
       <p:sp>
         <p:nvSpPr>
-          <p:cNvPr id="23" name="rev_8_txt"/>
+          <p:cNvPr id="31" name="rev_8_txt"/>
           <p:cNvSpPr txBox="1"/>
           <p:nvPr/>
         </p:nvSpPr>
         <p:spPr>
           <a:xfrm>
-            <a:off x="6793992" y="4603090"/>
-            <a:ext cx="4754880" cy="665683"/>
+            <a:off x="7450531" y="5212080"/>
+            <a:ext cx="1797710" cy="868680"/>
           </a:xfrm>
           <a:prstGeom prst="rect">
             <a:avLst/>
@@ -29743,27 +30197,85 @@
               <a:buNone/>
             </a:pPr>
             <a:r>
-              <a:rPr lang="en-US" sz="2200" b="1" dirty="0">
+              <a:rPr lang="en-US" sz="1700" b="1" dirty="0">
                 <a:solidFill>
                   <a:srgbClr val="FFFFFF"/>
                 </a:solidFill>
               </a:rPr>
               <a:t>Va a casa y come.</a:t>
             </a:r>
-            <a:endParaRPr lang="en-US" sz="2200" dirty="0"/>
-          </a:p>
-        </p:txBody>
-      </p:sp>
-      <p:sp>
-        <p:nvSpPr>
-          <p:cNvPr id="24" name="num_4"/>
+            <a:endParaRPr lang="en-US" sz="1700" dirty="0"/>
+          </a:p>
+        </p:txBody>
+      </p:sp>
+      <p:sp>
+        <p:nvSpPr>
+          <p:cNvPr id="32" name="card_4"/>
           <p:cNvSpPr/>
           <p:nvPr/>
         </p:nvSpPr>
         <p:spPr>
           <a:xfrm>
-            <a:off x="548640" y="5574182"/>
-            <a:ext cx="457200" cy="457200"/>
+            <a:off x="9568282" y="1965960"/>
+            <a:ext cx="2072030" cy="4206240"/>
+          </a:xfrm>
+          <a:prstGeom prst="roundRect">
+            <a:avLst>
+              <a:gd name="adj" fmla="val 6620"/>
+            </a:avLst>
+          </a:prstGeom>
+          <a:solidFill>
+            <a:srgbClr val="FFFFFF"/>
+          </a:solidFill>
+          <a:ln w="12700">
+            <a:solidFill>
+              <a:srgbClr val="D9D7F7"/>
+            </a:solidFill>
+            <a:prstDash val="solid"/>
+          </a:ln>
+          <a:effectLst>
+            <a:outerShdw blurRad="76200" dist="25400" dir="5400000" algn="bl" rotWithShape="0">
+              <a:srgbClr val="14142B">
+                <a:alpha val="12000"/>
+              </a:srgbClr>
+            </a:outerShdw>
+          </a:effectLst>
+        </p:spPr>
+      </p:sp>
+      <p:pic>
+        <p:nvPicPr>
+          <p:cNvPr id="33" name="item_img_4" descr="C:\Users\Chingu\AppData\Local\Temp\claude\C--Users-Chingu-Desktop-ACADEMIASEULWEB\d4111e1b-5523-44ea-97b2-b1a1d9545b9e\scratchpad\decks\cache\img_0eb9c0c15217995e.png"/>
+          <p:cNvPicPr>
+            <a:picLocks noChangeAspect="1"/>
+          </p:cNvPicPr>
+          <p:nvPr/>
+        </p:nvPicPr>
+        <p:blipFill>
+          <a:blip r:embed="rId7"/>
+          <a:stretch>
+            <a:fillRect/>
+          </a:stretch>
+        </p:blipFill>
+        <p:spPr>
+          <a:xfrm>
+            <a:off x="9689897" y="2057400"/>
+            <a:ext cx="1828800" cy="1828800"/>
+          </a:xfrm>
+          <a:prstGeom prst="rect">
+            <a:avLst/>
+          </a:prstGeom>
+        </p:spPr>
+      </p:pic>
+      <p:sp>
+        <p:nvSpPr>
+          <p:cNvPr id="34" name="num_4"/>
+          <p:cNvSpPr/>
+          <p:nvPr/>
+        </p:nvSpPr>
+        <p:spPr>
+          <a:xfrm>
+            <a:off x="9659722" y="2057400"/>
+            <a:ext cx="420624" cy="420624"/>
           </a:xfrm>
           <a:prstGeom prst="ellipse">
             <a:avLst/>
@@ -29771,9 +30283,9 @@
           <a:solidFill>
             <a:srgbClr val="003478"/>
           </a:solidFill>
-          <a:ln w="12700">
+          <a:ln w="19050">
             <a:solidFill>
-              <a:srgbClr val="003478"/>
+              <a:srgbClr val="FFFFFF"/>
             </a:solidFill>
             <a:prstDash val="solid"/>
           </a:ln>
@@ -29781,14 +30293,14 @@
       </p:sp>
       <p:sp>
         <p:nvSpPr>
-          <p:cNvPr id="25" name="Text 23"/>
+          <p:cNvPr id="35" name="Text 28"/>
           <p:cNvSpPr txBox="1"/>
           <p:nvPr/>
         </p:nvSpPr>
         <p:spPr>
           <a:xfrm>
-            <a:off x="548640" y="5574182"/>
-            <a:ext cx="457200" cy="457200"/>
+            <a:off x="9659722" y="2057400"/>
+            <a:ext cx="420624" cy="420624"/>
           </a:xfrm>
           <a:prstGeom prst="rect">
             <a:avLst/>
@@ -29806,27 +30318,27 @@
               <a:buNone/>
             </a:pPr>
             <a:r>
-              <a:rPr lang="en-US" sz="1600" b="1" dirty="0">
+              <a:rPr lang="en-US" sz="1500" b="1" dirty="0">
                 <a:solidFill>
                   <a:srgbClr val="FFFFFF"/>
                 </a:solidFill>
               </a:rPr>
               <a:t>5</a:t>
             </a:r>
-            <a:endParaRPr lang="en-US" sz="1600" dirty="0"/>
-          </a:p>
-        </p:txBody>
-      </p:sp>
-      <p:sp>
-        <p:nvSpPr>
-          <p:cNvPr id="26" name="Text 24"/>
+            <a:endParaRPr lang="en-US" sz="1500" dirty="0"/>
+          </a:p>
+        </p:txBody>
+      </p:sp>
+      <p:sp>
+        <p:nvSpPr>
+          <p:cNvPr id="36" name="Text 29"/>
           <p:cNvSpPr txBox="1"/>
           <p:nvPr/>
         </p:nvSpPr>
         <p:spPr>
           <a:xfrm>
-            <a:off x="1188720" y="5433365"/>
-            <a:ext cx="5285232" cy="738835"/>
+            <a:off x="9659722" y="3931920"/>
+            <a:ext cx="1889150" cy="1234440"/>
           </a:xfrm>
           <a:prstGeom prst="rect">
             <a:avLst/>
@@ -29840,35 +30352,35 @@
           </a:bodyPr>
           <a:lstStyle/>
           <a:p>
-            <a:pPr marL="0" indent="0" eaLnBrk="1">
+            <a:pPr marL="0" indent="0" algn="ctr" eaLnBrk="1">
               <a:buNone/>
             </a:pPr>
             <a:r>
-              <a:rPr lang="en-US" sz="2400" dirty="0">
+              <a:rPr lang="en-US" sz="2200" dirty="0">
                 <a:solidFill>
                   <a:srgbClr val="14142B"/>
                 </a:solidFill>
               </a:rPr>
               <a:t>Imagen 5</a:t>
             </a:r>
-            <a:endParaRPr lang="en-US" sz="2400" dirty="0"/>
-          </a:p>
-        </p:txBody>
-      </p:sp>
-      <p:sp>
-        <p:nvSpPr>
-          <p:cNvPr id="27" name="rev_9_caja"/>
+            <a:endParaRPr lang="en-US" sz="2200" dirty="0"/>
+          </a:p>
+        </p:txBody>
+      </p:sp>
+      <p:sp>
+        <p:nvSpPr>
+          <p:cNvPr id="37" name="rev_9_caja"/>
           <p:cNvSpPr/>
           <p:nvPr/>
         </p:nvSpPr>
         <p:spPr>
           <a:xfrm>
-            <a:off x="6702552" y="5469941"/>
-            <a:ext cx="4937760" cy="665683"/>
+            <a:off x="9678010" y="5212080"/>
+            <a:ext cx="1852574" cy="868680"/>
           </a:xfrm>
           <a:prstGeom prst="roundRect">
             <a:avLst>
-              <a:gd name="adj" fmla="val 16484"/>
+              <a:gd name="adj" fmla="val 12632"/>
             </a:avLst>
           </a:prstGeom>
           <a:solidFill>
@@ -29884,14 +30396,14 @@
       </p:sp>
       <p:sp>
         <p:nvSpPr>
-          <p:cNvPr id="28" name="rev_9_txt"/>
+          <p:cNvPr id="38" name="rev_9_txt"/>
           <p:cNvSpPr txBox="1"/>
           <p:nvPr/>
         </p:nvSpPr>
         <p:spPr>
           <a:xfrm>
-            <a:off x="6793992" y="5469941"/>
-            <a:ext cx="4754880" cy="665683"/>
+            <a:off x="9705442" y="5212080"/>
+            <a:ext cx="1797710" cy="868680"/>
           </a:xfrm>
           <a:prstGeom prst="rect">
             <a:avLst/>
@@ -29909,20 +30421,20 @@
               <a:buNone/>
             </a:pPr>
             <a:r>
-              <a:rPr lang="en-US" sz="1900" b="1" dirty="0">
+              <a:rPr lang="en-US" sz="1700" b="1" dirty="0">
                 <a:solidFill>
                   <a:srgbClr val="FFFFFF"/>
                 </a:solidFill>
               </a:rPr>
               <a:t>Ahora trabaja (¡con ustedes!).</a:t>
             </a:r>
-            <a:endParaRPr lang="en-US" sz="1900" dirty="0"/>
-          </a:p>
-        </p:txBody>
-      </p:sp>
-      <p:sp>
-        <p:nvSpPr>
-          <p:cNvPr id="29" name="Slide Number Placeholder 0"/>
+            <a:endParaRPr lang="en-US" sz="1700" dirty="0"/>
+          </a:p>
+        </p:txBody>
+      </p:sp>
+      <p:sp>
+        <p:nvSpPr>
+          <p:cNvPr id="39" name="Slide Number Placeholder 0"/>
           <p:cNvSpPr>
             <a:spLocks noGrp="1"/>
           </p:cNvSpPr>
@@ -30007,7 +30519,7 @@
                                           </p:stCondLst>
                                         </p:cTn>
                                         <p:tgtEl>
-                                          <p:spTgt spid="7"/>
+                                          <p:spTgt spid="9"/>
                                         </p:tgtEl>
                                         <p:attrNameLst>
                                           <p:attrName>style.visibility</p:attrName>
@@ -30034,7 +30546,7 @@
                                           </p:stCondLst>
                                         </p:cTn>
                                         <p:tgtEl>
-                                          <p:spTgt spid="8"/>
+                                          <p:spTgt spid="10"/>
                                         </p:tgtEl>
                                         <p:attrNameLst>
                                           <p:attrName>style.visibility</p:attrName>
@@ -30079,7 +30591,7 @@
                                           </p:stCondLst>
                                         </p:cTn>
                                         <p:tgtEl>
-                                          <p:spTgt spid="12"/>
+                                          <p:spTgt spid="16"/>
                                         </p:tgtEl>
                                         <p:attrNameLst>
                                           <p:attrName>style.visibility</p:attrName>
@@ -30106,7 +30618,7 @@
                                           </p:stCondLst>
                                         </p:cTn>
                                         <p:tgtEl>
-                                          <p:spTgt spid="13"/>
+                                          <p:spTgt spid="17"/>
                                         </p:tgtEl>
                                         <p:attrNameLst>
                                           <p:attrName>style.visibility</p:attrName>
@@ -30151,7 +30663,7 @@
                                           </p:stCondLst>
                                         </p:cTn>
                                         <p:tgtEl>
-                                          <p:spTgt spid="17"/>
+                                          <p:spTgt spid="23"/>
                                         </p:tgtEl>
                                         <p:attrNameLst>
                                           <p:attrName>style.visibility</p:attrName>
@@ -30178,7 +30690,7 @@
                                           </p:stCondLst>
                                         </p:cTn>
                                         <p:tgtEl>
-                                          <p:spTgt spid="18"/>
+                                          <p:spTgt spid="24"/>
                                         </p:tgtEl>
                                         <p:attrNameLst>
                                           <p:attrName>style.visibility</p:attrName>
@@ -30223,7 +30735,7 @@
                                           </p:stCondLst>
                                         </p:cTn>
                                         <p:tgtEl>
-                                          <p:spTgt spid="22"/>
+                                          <p:spTgt spid="30"/>
                                         </p:tgtEl>
                                         <p:attrNameLst>
                                           <p:attrName>style.visibility</p:attrName>
@@ -30250,7 +30762,7 @@
                                           </p:stCondLst>
                                         </p:cTn>
                                         <p:tgtEl>
-                                          <p:spTgt spid="23"/>
+                                          <p:spTgt spid="31"/>
                                         </p:tgtEl>
                                         <p:attrNameLst>
                                           <p:attrName>style.visibility</p:attrName>
@@ -30295,7 +30807,7 @@
                                           </p:stCondLst>
                                         </p:cTn>
                                         <p:tgtEl>
-                                          <p:spTgt spid="27"/>
+                                          <p:spTgt spid="37"/>
                                         </p:tgtEl>
                                         <p:attrNameLst>
                                           <p:attrName>style.visibility</p:attrName>
@@ -30322,7 +30834,7 @@
                                           </p:stCondLst>
                                         </p:cTn>
                                         <p:tgtEl>
-                                          <p:spTgt spid="28"/>
+                                          <p:spTgt spid="38"/>
                                         </p:tgtEl>
                                         <p:attrNameLst>
                                           <p:attrName>style.visibility</p:attrName>
@@ -30363,11 +30875,11 @@
       </p:par>
     </p:tnLst>
     <p:bldLst>
-      <p:bldP spid="8" grpId="0" animBg="1"/>
-      <p:bldP spid="13" grpId="0" animBg="1"/>
-      <p:bldP spid="18" grpId="0" animBg="1"/>
-      <p:bldP spid="23" grpId="0" animBg="1"/>
-      <p:bldP spid="28" grpId="0" animBg="1"/>
+      <p:bldP spid="10" grpId="0" animBg="1"/>
+      <p:bldP spid="17" grpId="0" animBg="1"/>
+      <p:bldP spid="24" grpId="0" animBg="1"/>
+      <p:bldP spid="31" grpId="0" animBg="1"/>
+      <p:bldP spid="38" grpId="0" animBg="1"/>
     </p:bldLst>
   </p:timing>
 </p:sld>
@@ -30438,6 +30950,30 @@
           </a:p>
         </p:txBody>
       </p:sp>
+      <p:pic>
+        <p:nvPicPr>
+          <p:cNvPr id="3" name="imagen" descr="C:\Users\Chingu\AppData\Local\Temp\claude\C--Users-Chingu-Desktop-ACADEMIASEULWEB\d4111e1b-5523-44ea-97b2-b1a1d9545b9e\scratchpad\decks\cache\img_18c09010d961723e.png"/>
+          <p:cNvPicPr>
+            <a:picLocks noChangeAspect="1"/>
+          </p:cNvPicPr>
+          <p:nvPr/>
+        </p:nvPicPr>
+        <p:blipFill>
+          <a:blip r:embed="rId3"/>
+          <a:stretch>
+            <a:fillRect/>
+          </a:stretch>
+        </p:blipFill>
+        <p:spPr>
+          <a:xfrm>
+            <a:off x="7754112" y="1508760"/>
+            <a:ext cx="3886200" cy="4480560"/>
+          </a:xfrm>
+          <a:prstGeom prst="rect">
+            <a:avLst/>
+          </a:prstGeom>
+        </p:spPr>
+      </p:pic>
       <p:graphicFrame>
         <p:nvGraphicFramePr>
           <p:cNvPr id="7" name="tabla"/>
@@ -30447,35 +30983,35 @@
           <p:nvPr>
             <p:extLst>
               <p:ext uri="{D42A27DB-BD31-4B8C-83A1-F6EECF244321}">
-                <p14:modId xmlns:p14="http://schemas.microsoft.com/office/powerpoint/2010/main" val="1453355341"/>
+                <p14:modId xmlns:p14="http://schemas.microsoft.com/office/powerpoint/2010/main" val="196607029"/>
               </p:ext>
             </p:extLst>
           </p:nvPr>
         </p:nvGraphicFramePr>
         <p:xfrm>
           <a:off x="548640" y="1325880"/>
-          <a:ext cx="11091672" cy="914400"/>
+          <a:ext cx="6931152" cy="914400"/>
         </p:xfrm>
         <a:graphic>
           <a:graphicData uri="http://schemas.openxmlformats.org/drawingml/2006/table">
             <a:tbl>
               <a:tblPr/>
               <a:tblGrid>
-                <a:gridCol w="3697224">
+                <a:gridCol w="2310384">
                   <a:extLst>
                     <a:ext uri="{9D8B030D-6E8A-4147-A177-3AD203B41FA5}">
                       <a16:colId xmlns:a16="http://schemas.microsoft.com/office/drawing/2014/main" val="20000"/>
                     </a:ext>
                   </a:extLst>
                 </a:gridCol>
-                <a:gridCol w="3697224">
+                <a:gridCol w="2310384">
                   <a:extLst>
                     <a:ext uri="{9D8B030D-6E8A-4147-A177-3AD203B41FA5}">
                       <a16:colId xmlns:a16="http://schemas.microsoft.com/office/drawing/2014/main" val="20001"/>
                     </a:ext>
                   </a:extLst>
                 </a:gridCol>
-                <a:gridCol w="3697224">
+                <a:gridCol w="2310384">
                   <a:extLst>
                     <a:ext uri="{9D8B030D-6E8A-4147-A177-3AD203B41FA5}">
                       <a16:colId xmlns:a16="http://schemas.microsoft.com/office/drawing/2014/main" val="20002"/>
@@ -31902,7 +32438,7 @@
         <p:spPr>
           <a:xfrm>
             <a:off x="548640" y="1325880"/>
-            <a:ext cx="11064240" cy="457200"/>
+            <a:ext cx="11091672" cy="457200"/>
           </a:xfrm>
           <a:prstGeom prst="rect">
             <a:avLst/>
@@ -31970,7 +32506,7 @@
           <p:nvPr>
             <p:extLst>
               <p:ext uri="{D42A27DB-BD31-4B8C-83A1-F6EECF244321}">
-                <p14:modId xmlns:p14="http://schemas.microsoft.com/office/powerpoint/2010/main" val="3297350924"/>
+                <p14:modId xmlns:p14="http://schemas.microsoft.com/office/powerpoint/2010/main" val="1414547428"/>
               </p:ext>
             </p:extLst>
           </p:nvPr>
@@ -33073,7 +33609,7 @@
         <p:spPr>
           <a:xfrm>
             <a:off x="548640" y="1325880"/>
-            <a:ext cx="11064240" cy="457200"/>
+            <a:ext cx="11091672" cy="457200"/>
           </a:xfrm>
           <a:prstGeom prst="rect">
             <a:avLst/>
@@ -33136,16 +33672,40 @@
           </a:effectLst>
         </p:spPr>
       </p:sp>
-      <p:sp>
-        <p:nvSpPr>
-          <p:cNvPr id="5" name="Text 3"/>
+      <p:pic>
+        <p:nvPicPr>
+          <p:cNvPr id="5" name="dibujo_0" descr="C:\Users\Chingu\AppData\Local\Temp\claude\C--Users-Chingu-Desktop-ACADEMIASEULWEB\d4111e1b-5523-44ea-97b2-b1a1d9545b9e\scratchpad\decks\cache\img_6ed44828e512e297.png"/>
+          <p:cNvPicPr>
+            <a:picLocks noChangeAspect="1"/>
+          </p:cNvPicPr>
+          <p:nvPr/>
+        </p:nvPicPr>
+        <p:blipFill>
+          <a:blip r:embed="rId3"/>
+          <a:stretch>
+            <a:fillRect/>
+          </a:stretch>
+        </p:blipFill>
+        <p:spPr>
+          <a:xfrm>
+            <a:off x="1832762" y="1984248"/>
+            <a:ext cx="976579" cy="976579"/>
+          </a:xfrm>
+          <a:prstGeom prst="rect">
+            <a:avLst/>
+          </a:prstGeom>
+        </p:spPr>
+      </p:pic>
+      <p:sp>
+        <p:nvSpPr>
+          <p:cNvPr id="6" name="Text 3"/>
           <p:cNvSpPr txBox="1"/>
           <p:nvPr/>
         </p:nvSpPr>
         <p:spPr>
           <a:xfrm>
-            <a:off x="548640" y="2228393"/>
-            <a:ext cx="3544824" cy="691744"/>
+            <a:off x="548640" y="2979115"/>
+            <a:ext cx="3544824" cy="406908"/>
           </a:xfrm>
           <a:prstGeom prst="rect">
             <a:avLst/>
@@ -33163,7 +33723,7 @@
               <a:buNone/>
             </a:pPr>
             <a:r>
-              <a:rPr lang="ko-KR" altLang="en-US" sz="4300" b="1" dirty="0">
+              <a:rPr lang="ko-KR" altLang="en-US" sz="2500" b="1" dirty="0">
                 <a:solidFill>
                   <a:srgbClr val="4236F6"/>
                 </a:solidFill>
@@ -33174,7 +33734,7 @@
               <a:t>가다 </a:t>
             </a:r>
             <a:r>
-              <a:rPr lang="en-US" sz="4300" b="1" dirty="0">
+              <a:rPr lang="en-US" sz="2500" b="1" dirty="0">
                 <a:solidFill>
                   <a:srgbClr val="4236F6"/>
                 </a:solidFill>
@@ -33182,7 +33742,7 @@
               <a:t>→ </a:t>
             </a:r>
             <a:r>
-              <a:rPr lang="ko-KR" altLang="en-US" sz="4300" b="1" dirty="0">
+              <a:rPr lang="ko-KR" altLang="en-US" sz="2500" b="1" dirty="0">
                 <a:solidFill>
                   <a:srgbClr val="4236F6"/>
                 </a:solidFill>
@@ -33192,20 +33752,20 @@
               </a:rPr>
               <a:t>가요</a:t>
             </a:r>
-            <a:endParaRPr lang="en-US" sz="4300" dirty="0"/>
-          </a:p>
-        </p:txBody>
-      </p:sp>
-      <p:sp>
-        <p:nvSpPr>
-          <p:cNvPr id="6" name="Text 4"/>
+            <a:endParaRPr lang="en-US" sz="2500" dirty="0"/>
+          </a:p>
+        </p:txBody>
+      </p:sp>
+      <p:sp>
+        <p:nvSpPr>
+          <p:cNvPr id="7" name="Text 4"/>
           <p:cNvSpPr txBox="1"/>
           <p:nvPr/>
         </p:nvSpPr>
         <p:spPr>
           <a:xfrm>
-            <a:off x="621792" y="2920136"/>
-            <a:ext cx="3398520" cy="577444"/>
+            <a:off x="621792" y="3386023"/>
+            <a:ext cx="3398520" cy="449885"/>
           </a:xfrm>
           <a:prstGeom prst="rect">
             <a:avLst/>
@@ -33236,7 +33796,7 @@
       </p:sp>
       <p:sp>
         <p:nvSpPr>
-          <p:cNvPr id="7" name="card_1"/>
+          <p:cNvPr id="8" name="card_1"/>
           <p:cNvSpPr/>
           <p:nvPr/>
         </p:nvSpPr>
@@ -33268,16 +33828,40 @@
           </a:effectLst>
         </p:spPr>
       </p:sp>
-      <p:sp>
-        <p:nvSpPr>
-          <p:cNvPr id="8" name="Text 6"/>
+      <p:pic>
+        <p:nvPicPr>
+          <p:cNvPr id="9" name="dibujo_1" descr="C:\Users\Chingu\AppData\Local\Temp\claude\C--Users-Chingu-Desktop-ACADEMIASEULWEB\d4111e1b-5523-44ea-97b2-b1a1d9545b9e\scratchpad\decks\cache\img_719ac7e6d7b53d4b.png"/>
+          <p:cNvPicPr>
+            <a:picLocks noChangeAspect="1"/>
+          </p:cNvPicPr>
+          <p:nvPr/>
+        </p:nvPicPr>
+        <p:blipFill>
+          <a:blip r:embed="rId4"/>
+          <a:stretch>
+            <a:fillRect/>
+          </a:stretch>
+        </p:blipFill>
+        <p:spPr>
+          <a:xfrm>
+            <a:off x="5606186" y="1984248"/>
+            <a:ext cx="976579" cy="976579"/>
+          </a:xfrm>
+          <a:prstGeom prst="rect">
+            <a:avLst/>
+          </a:prstGeom>
+        </p:spPr>
+      </p:pic>
+      <p:sp>
+        <p:nvSpPr>
+          <p:cNvPr id="10" name="Text 6"/>
           <p:cNvSpPr txBox="1"/>
           <p:nvPr/>
         </p:nvSpPr>
         <p:spPr>
           <a:xfrm>
-            <a:off x="4322064" y="2228393"/>
-            <a:ext cx="3544824" cy="691744"/>
+            <a:off x="4322064" y="2979115"/>
+            <a:ext cx="3544824" cy="406908"/>
           </a:xfrm>
           <a:prstGeom prst="rect">
             <a:avLst/>
@@ -33295,7 +33879,7 @@
               <a:buNone/>
             </a:pPr>
             <a:r>
-              <a:rPr lang="ko-KR" altLang="en-US" sz="4300" b="1" dirty="0">
+              <a:rPr lang="ko-KR" altLang="en-US" sz="2500" b="1" dirty="0">
                 <a:solidFill>
                   <a:srgbClr val="4236F6"/>
                 </a:solidFill>
@@ -33306,7 +33890,7 @@
               <a:t>오다 </a:t>
             </a:r>
             <a:r>
-              <a:rPr lang="en-US" sz="4300" b="1" dirty="0">
+              <a:rPr lang="en-US" sz="2500" b="1" dirty="0">
                 <a:solidFill>
                   <a:srgbClr val="4236F6"/>
                 </a:solidFill>
@@ -33314,7 +33898,7 @@
               <a:t>→ </a:t>
             </a:r>
             <a:r>
-              <a:rPr lang="ko-KR" altLang="en-US" sz="4300" b="1" dirty="0">
+              <a:rPr lang="ko-KR" altLang="en-US" sz="2500" b="1" dirty="0">
                 <a:solidFill>
                   <a:srgbClr val="4236F6"/>
                 </a:solidFill>
@@ -33324,20 +33908,20 @@
               </a:rPr>
               <a:t>와요</a:t>
             </a:r>
-            <a:endParaRPr lang="en-US" sz="4300" dirty="0"/>
-          </a:p>
-        </p:txBody>
-      </p:sp>
-      <p:sp>
-        <p:nvSpPr>
-          <p:cNvPr id="9" name="Text 7"/>
+            <a:endParaRPr lang="en-US" sz="2500" dirty="0"/>
+          </a:p>
+        </p:txBody>
+      </p:sp>
+      <p:sp>
+        <p:nvSpPr>
+          <p:cNvPr id="11" name="Text 7"/>
           <p:cNvSpPr txBox="1"/>
           <p:nvPr/>
         </p:nvSpPr>
         <p:spPr>
           <a:xfrm>
-            <a:off x="4395216" y="2920136"/>
-            <a:ext cx="3398520" cy="577444"/>
+            <a:off x="4395216" y="3386023"/>
+            <a:ext cx="3398520" cy="449885"/>
           </a:xfrm>
           <a:prstGeom prst="rect">
             <a:avLst/>
@@ -33368,7 +33952,7 @@
       </p:sp>
       <p:sp>
         <p:nvSpPr>
-          <p:cNvPr id="10" name="card_2"/>
+          <p:cNvPr id="12" name="card_2"/>
           <p:cNvSpPr/>
           <p:nvPr/>
         </p:nvSpPr>
@@ -33400,16 +33984,40 @@
           </a:effectLst>
         </p:spPr>
       </p:sp>
-      <p:sp>
-        <p:nvSpPr>
-          <p:cNvPr id="11" name="Text 9"/>
+      <p:pic>
+        <p:nvPicPr>
+          <p:cNvPr id="13" name="dibujo_2" descr="C:\Users\Chingu\AppData\Local\Temp\claude\C--Users-Chingu-Desktop-ACADEMIASEULWEB\d4111e1b-5523-44ea-97b2-b1a1d9545b9e\scratchpad\decks\cache\img_86b94e78155865d8.png"/>
+          <p:cNvPicPr>
+            <a:picLocks noChangeAspect="1"/>
+          </p:cNvPicPr>
+          <p:nvPr/>
+        </p:nvPicPr>
+        <p:blipFill>
+          <a:blip r:embed="rId5"/>
+          <a:stretch>
+            <a:fillRect/>
+          </a:stretch>
+        </p:blipFill>
+        <p:spPr>
+          <a:xfrm>
+            <a:off x="9379610" y="1984248"/>
+            <a:ext cx="976579" cy="976579"/>
+          </a:xfrm>
+          <a:prstGeom prst="rect">
+            <a:avLst/>
+          </a:prstGeom>
+        </p:spPr>
+      </p:pic>
+      <p:sp>
+        <p:nvSpPr>
+          <p:cNvPr id="14" name="Text 9"/>
           <p:cNvSpPr txBox="1"/>
           <p:nvPr/>
         </p:nvSpPr>
         <p:spPr>
           <a:xfrm>
-            <a:off x="8095488" y="2228393"/>
-            <a:ext cx="3544824" cy="691744"/>
+            <a:off x="8095488" y="2979115"/>
+            <a:ext cx="3544824" cy="406908"/>
           </a:xfrm>
           <a:prstGeom prst="rect">
             <a:avLst/>
@@ -33427,7 +34035,7 @@
               <a:buNone/>
             </a:pPr>
             <a:r>
-              <a:rPr lang="ko-KR" altLang="en-US" sz="3800" b="1" dirty="0">
+              <a:rPr lang="ko-KR" altLang="en-US" sz="2500" b="1" dirty="0">
                 <a:solidFill>
                   <a:srgbClr val="4236F6"/>
                 </a:solidFill>
@@ -33438,7 +34046,7 @@
               <a:t>먹다 </a:t>
             </a:r>
             <a:r>
-              <a:rPr lang="en-US" sz="3800" b="1" dirty="0">
+              <a:rPr lang="en-US" sz="2500" b="1" dirty="0">
                 <a:solidFill>
                   <a:srgbClr val="4236F6"/>
                 </a:solidFill>
@@ -33446,7 +34054,7 @@
               <a:t>→ </a:t>
             </a:r>
             <a:r>
-              <a:rPr lang="ko-KR" altLang="en-US" sz="3800" b="1" dirty="0">
+              <a:rPr lang="ko-KR" altLang="en-US" sz="2500" b="1" dirty="0">
                 <a:solidFill>
                   <a:srgbClr val="4236F6"/>
                 </a:solidFill>
@@ -33456,19 +34064,19 @@
               </a:rPr>
               <a:t>먹어요</a:t>
             </a:r>
-            <a:endParaRPr lang="en-US" sz="3800" dirty="0"/>
-          </a:p>
-        </p:txBody>
-      </p:sp>
-      <p:sp>
-        <p:nvSpPr>
-          <p:cNvPr id="12" name="Text 10"/>
+            <a:endParaRPr lang="en-US" sz="2500" dirty="0"/>
+          </a:p>
+        </p:txBody>
+      </p:sp>
+      <p:sp>
+        <p:nvSpPr>
+          <p:cNvPr id="15" name="Text 10"/>
           <p:cNvSpPr txBox="1"/>
           <p:nvPr/>
         </p:nvSpPr>
         <p:spPr>
           <a:xfrm>
-            <a:off x="8095488" y="2920136"/>
+            <a:off x="8095488" y="3386023"/>
             <a:ext cx="3544824" cy="274320"/>
           </a:xfrm>
           <a:prstGeom prst="rect">
@@ -33511,14 +34119,14 @@
       </p:sp>
       <p:sp>
         <p:nvSpPr>
-          <p:cNvPr id="13" name="Text 11"/>
+          <p:cNvPr id="16" name="Text 11"/>
           <p:cNvSpPr txBox="1"/>
           <p:nvPr/>
         </p:nvSpPr>
         <p:spPr>
           <a:xfrm>
-            <a:off x="8168640" y="3194456"/>
-            <a:ext cx="3398520" cy="303124"/>
+            <a:off x="8168640" y="3660343"/>
+            <a:ext cx="3398520" cy="274320"/>
           </a:xfrm>
           <a:prstGeom prst="rect">
             <a:avLst/>
@@ -33549,7 +34157,7 @@
       </p:sp>
       <p:sp>
         <p:nvSpPr>
-          <p:cNvPr id="14" name="card_3"/>
+          <p:cNvPr id="17" name="card_3"/>
           <p:cNvSpPr/>
           <p:nvPr/>
         </p:nvSpPr>
@@ -33581,16 +34189,40 @@
           </a:effectLst>
         </p:spPr>
       </p:sp>
-      <p:sp>
-        <p:nvSpPr>
-          <p:cNvPr id="15" name="Text 13"/>
+      <p:pic>
+        <p:nvPicPr>
+          <p:cNvPr id="18" name="dibujo_3" descr="C:\Users\Chingu\AppData\Local\Temp\claude\C--Users-Chingu-Desktop-ACADEMIASEULWEB\d4111e1b-5523-44ea-97b2-b1a1d9545b9e\scratchpad\decks\cache\img_14ad6445a3f36e26.png"/>
+          <p:cNvPicPr>
+            <a:picLocks noChangeAspect="1"/>
+          </p:cNvPicPr>
+          <p:nvPr/>
+        </p:nvPicPr>
+        <p:blipFill>
+          <a:blip r:embed="rId6"/>
+          <a:stretch>
+            <a:fillRect/>
+          </a:stretch>
+        </p:blipFill>
+        <p:spPr>
+          <a:xfrm>
+            <a:off x="1832762" y="4247388"/>
+            <a:ext cx="976579" cy="976579"/>
+          </a:xfrm>
+          <a:prstGeom prst="rect">
+            <a:avLst/>
+          </a:prstGeom>
+        </p:spPr>
+      </p:pic>
+      <p:sp>
+        <p:nvSpPr>
+          <p:cNvPr id="19" name="Text 13"/>
           <p:cNvSpPr txBox="1"/>
           <p:nvPr/>
         </p:nvSpPr>
         <p:spPr>
           <a:xfrm>
-            <a:off x="548640" y="4491533"/>
-            <a:ext cx="3544824" cy="691744"/>
+            <a:off x="548640" y="5242255"/>
+            <a:ext cx="3544824" cy="406908"/>
           </a:xfrm>
           <a:prstGeom prst="rect">
             <a:avLst/>
@@ -33608,7 +34240,7 @@
               <a:buNone/>
             </a:pPr>
             <a:r>
-              <a:rPr lang="ko-KR" altLang="en-US" sz="3300" b="1" dirty="0">
+              <a:rPr lang="ko-KR" altLang="en-US" sz="2500" b="1" dirty="0">
                 <a:solidFill>
                   <a:srgbClr val="4236F6"/>
                 </a:solidFill>
@@ -33619,7 +34251,7 @@
               <a:t>마시다 </a:t>
             </a:r>
             <a:r>
-              <a:rPr lang="en-US" sz="3300" b="1" dirty="0">
+              <a:rPr lang="en-US" sz="2500" b="1" dirty="0">
                 <a:solidFill>
                   <a:srgbClr val="4236F6"/>
                 </a:solidFill>
@@ -33627,7 +34259,7 @@
               <a:t>→ </a:t>
             </a:r>
             <a:r>
-              <a:rPr lang="ko-KR" altLang="en-US" sz="3300" b="1" dirty="0">
+              <a:rPr lang="ko-KR" altLang="en-US" sz="2500" b="1" dirty="0">
                 <a:solidFill>
                   <a:srgbClr val="4236F6"/>
                 </a:solidFill>
@@ -33637,20 +34269,20 @@
               </a:rPr>
               <a:t>마셔요</a:t>
             </a:r>
-            <a:endParaRPr lang="en-US" sz="3300" dirty="0"/>
-          </a:p>
-        </p:txBody>
-      </p:sp>
-      <p:sp>
-        <p:nvSpPr>
-          <p:cNvPr id="16" name="Text 14"/>
+            <a:endParaRPr lang="en-US" sz="2500" dirty="0"/>
+          </a:p>
+        </p:txBody>
+      </p:sp>
+      <p:sp>
+        <p:nvSpPr>
+          <p:cNvPr id="20" name="Text 14"/>
           <p:cNvSpPr txBox="1"/>
           <p:nvPr/>
         </p:nvSpPr>
         <p:spPr>
           <a:xfrm>
-            <a:off x="621792" y="5183276"/>
-            <a:ext cx="3398520" cy="577444"/>
+            <a:off x="621792" y="5649163"/>
+            <a:ext cx="3398520" cy="449885"/>
           </a:xfrm>
           <a:prstGeom prst="rect">
             <a:avLst/>
@@ -33681,7 +34313,7 @@
       </p:sp>
       <p:sp>
         <p:nvSpPr>
-          <p:cNvPr id="17" name="card_4"/>
+          <p:cNvPr id="21" name="card_4"/>
           <p:cNvSpPr/>
           <p:nvPr/>
         </p:nvSpPr>
@@ -33713,16 +34345,40 @@
           </a:effectLst>
         </p:spPr>
       </p:sp>
-      <p:sp>
-        <p:nvSpPr>
-          <p:cNvPr id="18" name="Text 16"/>
+      <p:pic>
+        <p:nvPicPr>
+          <p:cNvPr id="22" name="dibujo_4" descr="C:\Users\Chingu\AppData\Local\Temp\claude\C--Users-Chingu-Desktop-ACADEMIASEULWEB\d4111e1b-5523-44ea-97b2-b1a1d9545b9e\scratchpad\decks\cache\img_93de982f438044da.png"/>
+          <p:cNvPicPr>
+            <a:picLocks noChangeAspect="1"/>
+          </p:cNvPicPr>
+          <p:nvPr/>
+        </p:nvPicPr>
+        <p:blipFill>
+          <a:blip r:embed="rId7"/>
+          <a:stretch>
+            <a:fillRect/>
+          </a:stretch>
+        </p:blipFill>
+        <p:spPr>
+          <a:xfrm>
+            <a:off x="5606186" y="4247388"/>
+            <a:ext cx="976579" cy="976579"/>
+          </a:xfrm>
+          <a:prstGeom prst="rect">
+            <a:avLst/>
+          </a:prstGeom>
+        </p:spPr>
+      </p:pic>
+      <p:sp>
+        <p:nvSpPr>
+          <p:cNvPr id="23" name="Text 16"/>
           <p:cNvSpPr txBox="1"/>
           <p:nvPr/>
         </p:nvSpPr>
         <p:spPr>
           <a:xfrm>
-            <a:off x="4322064" y="4491533"/>
-            <a:ext cx="3544824" cy="691744"/>
+            <a:off x="4322064" y="5242255"/>
+            <a:ext cx="3544824" cy="406908"/>
           </a:xfrm>
           <a:prstGeom prst="rect">
             <a:avLst/>
@@ -33740,7 +34396,7 @@
               <a:buNone/>
             </a:pPr>
             <a:r>
-              <a:rPr lang="ko-KR" altLang="en-US" sz="4300" b="1" dirty="0">
+              <a:rPr lang="ko-KR" altLang="en-US" sz="2500" b="1" dirty="0">
                 <a:solidFill>
                   <a:srgbClr val="4236F6"/>
                 </a:solidFill>
@@ -33751,7 +34407,7 @@
               <a:t>보다 </a:t>
             </a:r>
             <a:r>
-              <a:rPr lang="en-US" sz="4300" b="1" dirty="0">
+              <a:rPr lang="en-US" sz="2500" b="1" dirty="0">
                 <a:solidFill>
                   <a:srgbClr val="4236F6"/>
                 </a:solidFill>
@@ -33759,7 +34415,7 @@
               <a:t>→ </a:t>
             </a:r>
             <a:r>
-              <a:rPr lang="ko-KR" altLang="en-US" sz="4300" b="1" dirty="0">
+              <a:rPr lang="ko-KR" altLang="en-US" sz="2500" b="1" dirty="0">
                 <a:solidFill>
                   <a:srgbClr val="4236F6"/>
                 </a:solidFill>
@@ -33769,20 +34425,20 @@
               </a:rPr>
               <a:t>봐요</a:t>
             </a:r>
-            <a:endParaRPr lang="en-US" sz="4300" dirty="0"/>
-          </a:p>
-        </p:txBody>
-      </p:sp>
-      <p:sp>
-        <p:nvSpPr>
-          <p:cNvPr id="19" name="Text 17"/>
+            <a:endParaRPr lang="en-US" sz="2500" dirty="0"/>
+          </a:p>
+        </p:txBody>
+      </p:sp>
+      <p:sp>
+        <p:nvSpPr>
+          <p:cNvPr id="24" name="Text 17"/>
           <p:cNvSpPr txBox="1"/>
           <p:nvPr/>
         </p:nvSpPr>
         <p:spPr>
           <a:xfrm>
-            <a:off x="4395216" y="5183276"/>
-            <a:ext cx="3398520" cy="577444"/>
+            <a:off x="4395216" y="5649163"/>
+            <a:ext cx="3398520" cy="449885"/>
           </a:xfrm>
           <a:prstGeom prst="rect">
             <a:avLst/>
@@ -33813,7 +34469,7 @@
       </p:sp>
       <p:sp>
         <p:nvSpPr>
-          <p:cNvPr id="20" name="card_5"/>
+          <p:cNvPr id="25" name="card_5"/>
           <p:cNvSpPr/>
           <p:nvPr/>
         </p:nvSpPr>
@@ -33845,16 +34501,40 @@
           </a:effectLst>
         </p:spPr>
       </p:sp>
-      <p:sp>
-        <p:nvSpPr>
-          <p:cNvPr id="21" name="Text 19"/>
+      <p:pic>
+        <p:nvPicPr>
+          <p:cNvPr id="26" name="dibujo_5" descr="C:\Users\Chingu\AppData\Local\Temp\claude\C--Users-Chingu-Desktop-ACADEMIASEULWEB\d4111e1b-5523-44ea-97b2-b1a1d9545b9e\scratchpad\decks\cache\img_2a219bc5df84b156.png"/>
+          <p:cNvPicPr>
+            <a:picLocks noChangeAspect="1"/>
+          </p:cNvPicPr>
+          <p:nvPr/>
+        </p:nvPicPr>
+        <p:blipFill>
+          <a:blip r:embed="rId8"/>
+          <a:stretch>
+            <a:fillRect/>
+          </a:stretch>
+        </p:blipFill>
+        <p:spPr>
+          <a:xfrm>
+            <a:off x="9379610" y="4247388"/>
+            <a:ext cx="976579" cy="976579"/>
+          </a:xfrm>
+          <a:prstGeom prst="rect">
+            <a:avLst/>
+          </a:prstGeom>
+        </p:spPr>
+      </p:pic>
+      <p:sp>
+        <p:nvSpPr>
+          <p:cNvPr id="27" name="Text 19"/>
           <p:cNvSpPr txBox="1"/>
           <p:nvPr/>
         </p:nvSpPr>
         <p:spPr>
           <a:xfrm>
-            <a:off x="8095488" y="4491533"/>
-            <a:ext cx="3544824" cy="691744"/>
+            <a:off x="8095488" y="5242255"/>
+            <a:ext cx="3544824" cy="406908"/>
           </a:xfrm>
           <a:prstGeom prst="rect">
             <a:avLst/>
@@ -33872,7 +34552,7 @@
               <a:buNone/>
             </a:pPr>
             <a:r>
-              <a:rPr lang="ko-KR" altLang="en-US" sz="4300" b="1" dirty="0">
+              <a:rPr lang="ko-KR" altLang="en-US" sz="2500" b="1" dirty="0">
                 <a:solidFill>
                   <a:srgbClr val="4236F6"/>
                 </a:solidFill>
@@ -33883,7 +34563,7 @@
               <a:t>자다 </a:t>
             </a:r>
             <a:r>
-              <a:rPr lang="en-US" sz="4300" b="1" dirty="0">
+              <a:rPr lang="en-US" sz="2500" b="1" dirty="0">
                 <a:solidFill>
                   <a:srgbClr val="4236F6"/>
                 </a:solidFill>
@@ -33891,7 +34571,7 @@
               <a:t>→ </a:t>
             </a:r>
             <a:r>
-              <a:rPr lang="ko-KR" altLang="en-US" sz="4300" b="1" dirty="0">
+              <a:rPr lang="ko-KR" altLang="en-US" sz="2500" b="1" dirty="0">
                 <a:solidFill>
                   <a:srgbClr val="4236F6"/>
                 </a:solidFill>
@@ -33901,20 +34581,20 @@
               </a:rPr>
               <a:t>자요</a:t>
             </a:r>
-            <a:endParaRPr lang="en-US" sz="4300" dirty="0"/>
-          </a:p>
-        </p:txBody>
-      </p:sp>
-      <p:sp>
-        <p:nvSpPr>
-          <p:cNvPr id="22" name="Text 20"/>
+            <a:endParaRPr lang="en-US" sz="2500" dirty="0"/>
+          </a:p>
+        </p:txBody>
+      </p:sp>
+      <p:sp>
+        <p:nvSpPr>
+          <p:cNvPr id="28" name="Text 20"/>
           <p:cNvSpPr txBox="1"/>
           <p:nvPr/>
         </p:nvSpPr>
         <p:spPr>
           <a:xfrm>
-            <a:off x="8168640" y="5183276"/>
-            <a:ext cx="3398520" cy="577444"/>
+            <a:off x="8168640" y="5649163"/>
+            <a:ext cx="3398520" cy="449885"/>
           </a:xfrm>
           <a:prstGeom prst="rect">
             <a:avLst/>
@@ -33945,7 +34625,7 @@
       </p:sp>
       <p:sp>
         <p:nvSpPr>
-          <p:cNvPr id="25" name="Slide Number Placeholder 0"/>
+          <p:cNvPr id="29" name="Slide Number Placeholder 0"/>
           <p:cNvSpPr>
             <a:spLocks noGrp="1"/>
           </p:cNvSpPr>
@@ -34073,7 +34753,7 @@
         <p:spPr>
           <a:xfrm>
             <a:off x="548640" y="1325880"/>
-            <a:ext cx="11064240" cy="457200"/>
+            <a:ext cx="11091672" cy="457200"/>
           </a:xfrm>
           <a:prstGeom prst="rect">
             <a:avLst/>
@@ -34234,16 +34914,40 @@
           </a:effectLst>
         </p:spPr>
       </p:sp>
-      <p:sp>
-        <p:nvSpPr>
-          <p:cNvPr id="5" name="Text 3"/>
+      <p:pic>
+        <p:nvPicPr>
+          <p:cNvPr id="5" name="dibujo_0" descr="C:\Users\Chingu\AppData\Local\Temp\claude\C--Users-Chingu-Desktop-ACADEMIASEULWEB\d4111e1b-5523-44ea-97b2-b1a1d9545b9e\scratchpad\decks\cache\img_e02331c0407cc539.png"/>
+          <p:cNvPicPr>
+            <a:picLocks noChangeAspect="1"/>
+          </p:cNvPicPr>
+          <p:nvPr/>
+        </p:nvPicPr>
+        <p:blipFill>
+          <a:blip r:embed="rId3"/>
+          <a:stretch>
+            <a:fillRect/>
+          </a:stretch>
+        </p:blipFill>
+        <p:spPr>
+          <a:xfrm>
+            <a:off x="1832762" y="1984248"/>
+            <a:ext cx="976579" cy="976579"/>
+          </a:xfrm>
+          <a:prstGeom prst="rect">
+            <a:avLst/>
+          </a:prstGeom>
+        </p:spPr>
+      </p:pic>
+      <p:sp>
+        <p:nvSpPr>
+          <p:cNvPr id="6" name="Text 3"/>
           <p:cNvSpPr txBox="1"/>
           <p:nvPr/>
         </p:nvSpPr>
         <p:spPr>
           <a:xfrm>
-            <a:off x="548640" y="2228393"/>
-            <a:ext cx="3544824" cy="691744"/>
+            <a:off x="548640" y="2979115"/>
+            <a:ext cx="3544824" cy="406908"/>
           </a:xfrm>
           <a:prstGeom prst="rect">
             <a:avLst/>
@@ -34296,14 +35000,14 @@
       </p:sp>
       <p:sp>
         <p:nvSpPr>
-          <p:cNvPr id="6" name="Text 4"/>
+          <p:cNvPr id="7" name="Text 4"/>
           <p:cNvSpPr txBox="1"/>
           <p:nvPr/>
         </p:nvSpPr>
         <p:spPr>
           <a:xfrm>
-            <a:off x="621792" y="2920136"/>
-            <a:ext cx="3398520" cy="577444"/>
+            <a:off x="621792" y="3386023"/>
+            <a:ext cx="3398520" cy="449885"/>
           </a:xfrm>
           <a:prstGeom prst="rect">
             <a:avLst/>
@@ -34334,7 +35038,7 @@
       </p:sp>
       <p:sp>
         <p:nvSpPr>
-          <p:cNvPr id="7" name="card_1"/>
+          <p:cNvPr id="8" name="card_1"/>
           <p:cNvSpPr/>
           <p:nvPr/>
         </p:nvSpPr>
@@ -34366,16 +35070,40 @@
           </a:effectLst>
         </p:spPr>
       </p:sp>
-      <p:sp>
-        <p:nvSpPr>
-          <p:cNvPr id="8" name="Text 6"/>
+      <p:pic>
+        <p:nvPicPr>
+          <p:cNvPr id="9" name="dibujo_1" descr="C:\Users\Chingu\AppData\Local\Temp\claude\C--Users-Chingu-Desktop-ACADEMIASEULWEB\d4111e1b-5523-44ea-97b2-b1a1d9545b9e\scratchpad\decks\cache\img_ce71c22f210bf47f.png"/>
+          <p:cNvPicPr>
+            <a:picLocks noChangeAspect="1"/>
+          </p:cNvPicPr>
+          <p:nvPr/>
+        </p:nvPicPr>
+        <p:blipFill>
+          <a:blip r:embed="rId4"/>
+          <a:stretch>
+            <a:fillRect/>
+          </a:stretch>
+        </p:blipFill>
+        <p:spPr>
+          <a:xfrm>
+            <a:off x="5606186" y="1984248"/>
+            <a:ext cx="976579" cy="976579"/>
+          </a:xfrm>
+          <a:prstGeom prst="rect">
+            <a:avLst/>
+          </a:prstGeom>
+        </p:spPr>
+      </p:pic>
+      <p:sp>
+        <p:nvSpPr>
+          <p:cNvPr id="10" name="Text 6"/>
           <p:cNvSpPr txBox="1"/>
           <p:nvPr/>
         </p:nvSpPr>
         <p:spPr>
           <a:xfrm>
-            <a:off x="4322064" y="2228393"/>
-            <a:ext cx="3544824" cy="691744"/>
+            <a:off x="4322064" y="2979115"/>
+            <a:ext cx="3544824" cy="406908"/>
           </a:xfrm>
           <a:prstGeom prst="rect">
             <a:avLst/>
@@ -34393,7 +35121,7 @@
               <a:buNone/>
             </a:pPr>
             <a:r>
-              <a:rPr lang="ko-KR" altLang="en-US" sz="3300" b="1" dirty="0">
+              <a:rPr lang="ko-KR" altLang="en-US" sz="2500" b="1" dirty="0">
                 <a:solidFill>
                   <a:srgbClr val="4236F6"/>
                 </a:solidFill>
@@ -34404,7 +35132,7 @@
               <a:t>일하다 </a:t>
             </a:r>
             <a:r>
-              <a:rPr lang="en-US" sz="3300" b="1" dirty="0">
+              <a:rPr lang="en-US" sz="2500" b="1" dirty="0">
                 <a:solidFill>
                   <a:srgbClr val="4236F6"/>
                 </a:solidFill>
@@ -34412,7 +35140,7 @@
               <a:t>→ </a:t>
             </a:r>
             <a:r>
-              <a:rPr lang="ko-KR" altLang="en-US" sz="3300" b="1" dirty="0">
+              <a:rPr lang="ko-KR" altLang="en-US" sz="2500" b="1" dirty="0">
                 <a:solidFill>
                   <a:srgbClr val="4236F6"/>
                 </a:solidFill>
@@ -34422,20 +35150,20 @@
               </a:rPr>
               <a:t>일해요</a:t>
             </a:r>
-            <a:endParaRPr lang="en-US" sz="3300" dirty="0"/>
-          </a:p>
-        </p:txBody>
-      </p:sp>
-      <p:sp>
-        <p:nvSpPr>
-          <p:cNvPr id="9" name="Text 7"/>
+            <a:endParaRPr lang="en-US" sz="2500" dirty="0"/>
+          </a:p>
+        </p:txBody>
+      </p:sp>
+      <p:sp>
+        <p:nvSpPr>
+          <p:cNvPr id="11" name="Text 7"/>
           <p:cNvSpPr txBox="1"/>
           <p:nvPr/>
         </p:nvSpPr>
         <p:spPr>
           <a:xfrm>
-            <a:off x="4395216" y="2920136"/>
-            <a:ext cx="3398520" cy="577444"/>
+            <a:off x="4395216" y="3386023"/>
+            <a:ext cx="3398520" cy="449885"/>
           </a:xfrm>
           <a:prstGeom prst="rect">
             <a:avLst/>
@@ -34466,7 +35194,7 @@
       </p:sp>
       <p:sp>
         <p:nvSpPr>
-          <p:cNvPr id="10" name="card_2"/>
+          <p:cNvPr id="12" name="card_2"/>
           <p:cNvSpPr/>
           <p:nvPr/>
         </p:nvSpPr>
@@ -34498,16 +35226,40 @@
           </a:effectLst>
         </p:spPr>
       </p:sp>
-      <p:sp>
-        <p:nvSpPr>
-          <p:cNvPr id="11" name="Text 9"/>
+      <p:pic>
+        <p:nvPicPr>
+          <p:cNvPr id="13" name="dibujo_2" descr="C:\Users\Chingu\AppData\Local\Temp\claude\C--Users-Chingu-Desktop-ACADEMIASEULWEB\d4111e1b-5523-44ea-97b2-b1a1d9545b9e\scratchpad\decks\cache\img_d512da8f599997d6.png"/>
+          <p:cNvPicPr>
+            <a:picLocks noChangeAspect="1"/>
+          </p:cNvPicPr>
+          <p:nvPr/>
+        </p:nvPicPr>
+        <p:blipFill>
+          <a:blip r:embed="rId5"/>
+          <a:stretch>
+            <a:fillRect/>
+          </a:stretch>
+        </p:blipFill>
+        <p:spPr>
+          <a:xfrm>
+            <a:off x="9379610" y="1984248"/>
+            <a:ext cx="976579" cy="976579"/>
+          </a:xfrm>
+          <a:prstGeom prst="rect">
+            <a:avLst/>
+          </a:prstGeom>
+        </p:spPr>
+      </p:pic>
+      <p:sp>
+        <p:nvSpPr>
+          <p:cNvPr id="14" name="Text 9"/>
           <p:cNvSpPr txBox="1"/>
           <p:nvPr/>
         </p:nvSpPr>
         <p:spPr>
           <a:xfrm>
-            <a:off x="8095488" y="2228393"/>
-            <a:ext cx="3544824" cy="691744"/>
+            <a:off x="8095488" y="2979115"/>
+            <a:ext cx="3544824" cy="406908"/>
           </a:xfrm>
           <a:prstGeom prst="rect">
             <a:avLst/>
@@ -34560,14 +35312,14 @@
       </p:sp>
       <p:sp>
         <p:nvSpPr>
-          <p:cNvPr id="12" name="Text 10"/>
+          <p:cNvPr id="15" name="Text 10"/>
           <p:cNvSpPr txBox="1"/>
           <p:nvPr/>
         </p:nvSpPr>
         <p:spPr>
           <a:xfrm>
-            <a:off x="8168640" y="2920136"/>
-            <a:ext cx="3398520" cy="577444"/>
+            <a:off x="8168640" y="3386023"/>
+            <a:ext cx="3398520" cy="449885"/>
           </a:xfrm>
           <a:prstGeom prst="rect">
             <a:avLst/>
@@ -34598,7 +35350,7 @@
       </p:sp>
       <p:sp>
         <p:nvSpPr>
-          <p:cNvPr id="13" name="card_3"/>
+          <p:cNvPr id="16" name="card_3"/>
           <p:cNvSpPr/>
           <p:nvPr/>
         </p:nvSpPr>
@@ -34630,16 +35382,40 @@
           </a:effectLst>
         </p:spPr>
       </p:sp>
-      <p:sp>
-        <p:nvSpPr>
-          <p:cNvPr id="14" name="Text 12"/>
+      <p:pic>
+        <p:nvPicPr>
+          <p:cNvPr id="17" name="dibujo_3" descr="C:\Users\Chingu\AppData\Local\Temp\claude\C--Users-Chingu-Desktop-ACADEMIASEULWEB\d4111e1b-5523-44ea-97b2-b1a1d9545b9e\scratchpad\decks\cache\img_1f71fbd89d9ee11b.png"/>
+          <p:cNvPicPr>
+            <a:picLocks noChangeAspect="1"/>
+          </p:cNvPicPr>
+          <p:nvPr/>
+        </p:nvPicPr>
+        <p:blipFill>
+          <a:blip r:embed="rId6"/>
+          <a:stretch>
+            <a:fillRect/>
+          </a:stretch>
+        </p:blipFill>
+        <p:spPr>
+          <a:xfrm>
+            <a:off x="1832762" y="4247388"/>
+            <a:ext cx="976579" cy="976579"/>
+          </a:xfrm>
+          <a:prstGeom prst="rect">
+            <a:avLst/>
+          </a:prstGeom>
+        </p:spPr>
+      </p:pic>
+      <p:sp>
+        <p:nvSpPr>
+          <p:cNvPr id="18" name="Text 12"/>
           <p:cNvSpPr txBox="1"/>
           <p:nvPr/>
         </p:nvSpPr>
         <p:spPr>
           <a:xfrm>
-            <a:off x="548640" y="4491533"/>
-            <a:ext cx="3544824" cy="691744"/>
+            <a:off x="548640" y="5242255"/>
+            <a:ext cx="3544824" cy="406908"/>
           </a:xfrm>
           <a:prstGeom prst="rect">
             <a:avLst/>
@@ -34657,7 +35433,7 @@
               <a:buNone/>
             </a:pPr>
             <a:r>
-              <a:rPr lang="ko-KR" altLang="en-US" sz="3800" b="1" dirty="0">
+              <a:rPr lang="ko-KR" altLang="en-US" sz="2500" b="1" dirty="0">
                 <a:solidFill>
                   <a:srgbClr val="4236F6"/>
                 </a:solidFill>
@@ -34668,7 +35444,7 @@
               <a:t>쉬다 </a:t>
             </a:r>
             <a:r>
-              <a:rPr lang="en-US" sz="3800" b="1" dirty="0">
+              <a:rPr lang="en-US" sz="2500" b="1" dirty="0">
                 <a:solidFill>
                   <a:srgbClr val="4236F6"/>
                 </a:solidFill>
@@ -34676,7 +35452,7 @@
               <a:t>→ </a:t>
             </a:r>
             <a:r>
-              <a:rPr lang="ko-KR" altLang="en-US" sz="3800" b="1" dirty="0">
+              <a:rPr lang="ko-KR" altLang="en-US" sz="2500" b="1" dirty="0">
                 <a:solidFill>
                   <a:srgbClr val="4236F6"/>
                 </a:solidFill>
@@ -34686,20 +35462,20 @@
               </a:rPr>
               <a:t>쉬어요</a:t>
             </a:r>
-            <a:endParaRPr lang="en-US" sz="3800" dirty="0"/>
-          </a:p>
-        </p:txBody>
-      </p:sp>
-      <p:sp>
-        <p:nvSpPr>
-          <p:cNvPr id="15" name="Text 13"/>
+            <a:endParaRPr lang="en-US" sz="2500" dirty="0"/>
+          </a:p>
+        </p:txBody>
+      </p:sp>
+      <p:sp>
+        <p:nvSpPr>
+          <p:cNvPr id="19" name="Text 13"/>
           <p:cNvSpPr txBox="1"/>
           <p:nvPr/>
         </p:nvSpPr>
         <p:spPr>
           <a:xfrm>
-            <a:off x="621792" y="5183276"/>
-            <a:ext cx="3398520" cy="577444"/>
+            <a:off x="621792" y="5649163"/>
+            <a:ext cx="3398520" cy="449885"/>
           </a:xfrm>
           <a:prstGeom prst="rect">
             <a:avLst/>
@@ -34717,20 +35493,20 @@
               <a:buNone/>
             </a:pPr>
             <a:r>
-              <a:rPr lang="en-US" sz="1600" dirty="0">
+              <a:rPr lang="en-US" sz="1400" dirty="0">
                 <a:solidFill>
                   <a:srgbClr val="5C5F6B"/>
                 </a:solidFill>
               </a:rPr>
               <a:t>descansar; tener el día libre</a:t>
             </a:r>
-            <a:endParaRPr lang="en-US" sz="1600" dirty="0"/>
-          </a:p>
-        </p:txBody>
-      </p:sp>
-      <p:sp>
-        <p:nvSpPr>
-          <p:cNvPr id="16" name="card_4"/>
+            <a:endParaRPr lang="en-US" sz="1400" dirty="0"/>
+          </a:p>
+        </p:txBody>
+      </p:sp>
+      <p:sp>
+        <p:nvSpPr>
+          <p:cNvPr id="20" name="card_4"/>
           <p:cNvSpPr/>
           <p:nvPr/>
         </p:nvSpPr>
@@ -34762,16 +35538,40 @@
           </a:effectLst>
         </p:spPr>
       </p:sp>
-      <p:sp>
-        <p:nvSpPr>
-          <p:cNvPr id="17" name="Text 15"/>
+      <p:pic>
+        <p:nvPicPr>
+          <p:cNvPr id="21" name="dibujo_4" descr="C:\Users\Chingu\AppData\Local\Temp\claude\C--Users-Chingu-Desktop-ACADEMIASEULWEB\d4111e1b-5523-44ea-97b2-b1a1d9545b9e\scratchpad\decks\cache\img_677dc370b2334a75.png"/>
+          <p:cNvPicPr>
+            <a:picLocks noChangeAspect="1"/>
+          </p:cNvPicPr>
+          <p:nvPr/>
+        </p:nvPicPr>
+        <p:blipFill>
+          <a:blip r:embed="rId7"/>
+          <a:stretch>
+            <a:fillRect/>
+          </a:stretch>
+        </p:blipFill>
+        <p:spPr>
+          <a:xfrm>
+            <a:off x="5606186" y="4247388"/>
+            <a:ext cx="976579" cy="976579"/>
+          </a:xfrm>
+          <a:prstGeom prst="rect">
+            <a:avLst/>
+          </a:prstGeom>
+        </p:spPr>
+      </p:pic>
+      <p:sp>
+        <p:nvSpPr>
+          <p:cNvPr id="22" name="Text 15"/>
           <p:cNvSpPr txBox="1"/>
           <p:nvPr/>
         </p:nvSpPr>
         <p:spPr>
           <a:xfrm>
-            <a:off x="4322064" y="4491533"/>
-            <a:ext cx="3544824" cy="691744"/>
+            <a:off x="4322064" y="5242255"/>
+            <a:ext cx="3544824" cy="406908"/>
           </a:xfrm>
           <a:prstGeom prst="rect">
             <a:avLst/>
@@ -34824,14 +35624,14 @@
       </p:sp>
       <p:sp>
         <p:nvSpPr>
-          <p:cNvPr id="18" name="Text 16"/>
+          <p:cNvPr id="23" name="Text 16"/>
           <p:cNvSpPr txBox="1"/>
           <p:nvPr/>
         </p:nvSpPr>
         <p:spPr>
           <a:xfrm>
-            <a:off x="4395216" y="5183276"/>
-            <a:ext cx="3398520" cy="577444"/>
+            <a:off x="4395216" y="5649163"/>
+            <a:ext cx="3398520" cy="449885"/>
           </a:xfrm>
           <a:prstGeom prst="rect">
             <a:avLst/>
@@ -34862,7 +35662,7 @@
       </p:sp>
       <p:sp>
         <p:nvSpPr>
-          <p:cNvPr id="19" name="card_5"/>
+          <p:cNvPr id="24" name="card_5"/>
           <p:cNvSpPr/>
           <p:nvPr/>
         </p:nvSpPr>
@@ -34894,16 +35694,40 @@
           </a:effectLst>
         </p:spPr>
       </p:sp>
-      <p:sp>
-        <p:nvSpPr>
-          <p:cNvPr id="20" name="Text 18"/>
+      <p:pic>
+        <p:nvPicPr>
+          <p:cNvPr id="25" name="dibujo_5" descr="C:\Users\Chingu\AppData\Local\Temp\claude\C--Users-Chingu-Desktop-ACADEMIASEULWEB\d4111e1b-5523-44ea-97b2-b1a1d9545b9e\scratchpad\decks\cache\img_fd76a12a6d52da34.png"/>
+          <p:cNvPicPr>
+            <a:picLocks noChangeAspect="1"/>
+          </p:cNvPicPr>
+          <p:nvPr/>
+        </p:nvPicPr>
+        <p:blipFill>
+          <a:blip r:embed="rId8"/>
+          <a:stretch>
+            <a:fillRect/>
+          </a:stretch>
+        </p:blipFill>
+        <p:spPr>
+          <a:xfrm>
+            <a:off x="9379610" y="4247388"/>
+            <a:ext cx="976579" cy="976579"/>
+          </a:xfrm>
+          <a:prstGeom prst="rect">
+            <a:avLst/>
+          </a:prstGeom>
+        </p:spPr>
+      </p:pic>
+      <p:sp>
+        <p:nvSpPr>
+          <p:cNvPr id="26" name="Text 18"/>
           <p:cNvSpPr txBox="1"/>
           <p:nvPr/>
         </p:nvSpPr>
         <p:spPr>
           <a:xfrm>
-            <a:off x="8095488" y="4491533"/>
-            <a:ext cx="3544824" cy="691744"/>
+            <a:off x="8095488" y="5242255"/>
+            <a:ext cx="3544824" cy="406908"/>
           </a:xfrm>
           <a:prstGeom prst="rect">
             <a:avLst/>
@@ -34956,13 +35780,13 @@
       </p:sp>
       <p:sp>
         <p:nvSpPr>
-          <p:cNvPr id="21" name="Text 19"/>
+          <p:cNvPr id="27" name="Text 19"/>
           <p:cNvSpPr txBox="1"/>
           <p:nvPr/>
         </p:nvSpPr>
         <p:spPr>
           <a:xfrm>
-            <a:off x="8095488" y="5183276"/>
+            <a:off x="8095488" y="5649163"/>
             <a:ext cx="3544824" cy="274320"/>
           </a:xfrm>
           <a:prstGeom prst="rect">
@@ -35005,14 +35829,14 @@
       </p:sp>
       <p:sp>
         <p:nvSpPr>
-          <p:cNvPr id="22" name="Text 20"/>
+          <p:cNvPr id="28" name="Text 20"/>
           <p:cNvSpPr txBox="1"/>
           <p:nvPr/>
         </p:nvSpPr>
         <p:spPr>
           <a:xfrm>
-            <a:off x="8168640" y="5457596"/>
-            <a:ext cx="3398520" cy="303124"/>
+            <a:off x="8168640" y="5923483"/>
+            <a:ext cx="3398520" cy="274320"/>
           </a:xfrm>
           <a:prstGeom prst="rect">
             <a:avLst/>
@@ -35043,7 +35867,7 @@
       </p:sp>
       <p:sp>
         <p:nvSpPr>
-          <p:cNvPr id="25" name="Slide Number Placeholder 0"/>
+          <p:cNvPr id="29" name="Slide Number Placeholder 0"/>
           <p:cNvSpPr>
             <a:spLocks noGrp="1"/>
           </p:cNvSpPr>

--- a/Curriculo/Fase2_Basico1/decks/Basico1_S06_Kiran.pptx
+++ b/Curriculo/Fase2_Basico1/decks/Basico1_S06_Kiran.pptx
@@ -137,7 +137,7 @@
   <p:extLst>
     <p:ext uri="{521415D9-36F7-43E2-AB2F-B90AF26B5E84}">
       <p14:sectionLst xmlns:p14="http://schemas.microsoft.com/office/powerpoint/2010/main">
-        <p14:section name="Semana 6" id="{D60ECDAA-D387-98D8-279E-702D00F3429B}">
+        <p14:section name="Semana 6" id="{ABF4C315-E4B5-0715-9EDB-A9AE39311C67}">
           <p14:sldIdLst>
             <p14:sldId id="256"/>
             <p14:sldId id="257"/>
@@ -206,7 +206,7 @@
     </p:spTree>
     <p:extLst>
       <p:ext uri="{BB962C8B-B14F-4D97-AF65-F5344CB8AC3E}">
-        <p14:creationId xmlns:p14="http://schemas.microsoft.com/office/powerpoint/2010/main" val="1482446098"/>
+        <p14:creationId xmlns:p14="http://schemas.microsoft.com/office/powerpoint/2010/main" val="1410212084"/>
       </p:ext>
     </p:extLst>
   </p:cSld>
@@ -352,7 +352,7 @@
           <a:p>
             <a:r>
               <a:rPr lang="en-US" dirty="0"/>
-              <a:t>Portada mientras entran; la grabación ya está encendida (Basico1-Martes_S06_2026-11-17 / Basico1-Jueves_S06_2026-11-19). Saluda: 안녕하세요! y pasa enseguida al quiz.
+              <a:t>Portada mientras entran; la grabación ya está encendida (Basico1-Martes_S06_2026-11-24 / Basico1-Jueves_S06_2026-11-26). Saluda: 안녕하세요! y pasa enseguida al quiz.
 Fuente: Nueva
 Lámina 1</a:t>
             </a:r>
@@ -1243,7 +1243,7 @@
           <a:p>
             <a:r>
               <a:rPr lang="en-US" dirty="0"/>
-              <a:t>20:18–20:20 (2 min). 학교에 가요. 그리고 학원에 가요. (dos veces) 따라 하세요. 'Muchos estudiantes en Corea, después del colegio, van al 학원; nosotros somos un 학원 de coreano, pero online.' Pregunta: '¿Hay algo parecido en sus países?' 빨리빨리 solo si alguien lo menciona, como autoironía. Gancho opcional del 수능 (jue 19 nov, hora de Corea), una línea.
+              <a:t>20:18–20:20 (2 min). 학교에 가요. 그리고 학원에 가요. (dos veces) 따라 하세요. 'Muchos estudiantes en Corea, después del colegio, van al 학원; nosotros somos un 학원 de coreano, pero online.' Pregunta: '¿Hay algo parecido en sus países?' 빨리빨리 solo si alguien lo menciona, como autoironía. Gancho opcional del 수능, una línea y en pasado (fue la semana anterior a esta clase): «el jueves pasado, 19 de noviembre, fue el 수능 en Corea, el gran examen de ingreso a la universidad».
 Imagen: incluida (dibujo de la casa).
 Fuente: Nueva
 Lámina 17</a:t>
@@ -4144,7 +4144,7 @@
                   <a:srgbClr val="E8B84B"/>
                 </a:solidFill>
               </a:rPr>
-              <a:t>) · mar 17 / jue 19 nov · 20:00 (Chile)</a:t>
+              <a:t>) · mar 24 / jue 26 nov · 20:00 (Chile)</a:t>
             </a:r>
             <a:endParaRPr lang="en-US" sz="2200" dirty="0"/>
           </a:p>
@@ -4921,7 +4921,7 @@
           <p:nvPr>
             <p:extLst>
               <p:ext uri="{D42A27DB-BD31-4B8C-83A1-F6EECF244321}">
-                <p14:modId xmlns:p14="http://schemas.microsoft.com/office/powerpoint/2010/main" val="1713922470"/>
+                <p14:modId xmlns:p14="http://schemas.microsoft.com/office/powerpoint/2010/main" val="635828600"/>
               </p:ext>
             </p:extLst>
           </p:nvPr>
@@ -21909,7 +21909,7 @@
           <p:nvPr>
             <p:extLst>
               <p:ext uri="{D42A27DB-BD31-4B8C-83A1-F6EECF244321}">
-                <p14:modId xmlns:p14="http://schemas.microsoft.com/office/powerpoint/2010/main" val="200615378"/>
+                <p14:modId xmlns:p14="http://schemas.microsoft.com/office/powerpoint/2010/main" val="429495683"/>
               </p:ext>
             </p:extLst>
           </p:nvPr>
@@ -27886,7 +27886,7 @@
                   <a:srgbClr val="14142B"/>
                 </a:solidFill>
               </a:rPr>
-              <a:t>Entrega: antes del mar 24 / jue 26 nov, 20:00 (Chile), en el grupo</a:t>
+              <a:t>Entrega: antes del mar 1 / jue 3 dic, 20:00 (Chile), en el grupo</a:t>
             </a:r>
             <a:endParaRPr lang="en-US" sz="1800" dirty="0"/>
           </a:p>
@@ -28234,7 +28234,7 @@
           <p:nvPr>
             <p:extLst>
               <p:ext uri="{D42A27DB-BD31-4B8C-83A1-F6EECF244321}">
-                <p14:modId xmlns:p14="http://schemas.microsoft.com/office/powerpoint/2010/main" val="1221861107"/>
+                <p14:modId xmlns:p14="http://schemas.microsoft.com/office/powerpoint/2010/main" val="1411066926"/>
               </p:ext>
             </p:extLst>
           </p:nvPr>
@@ -30983,7 +30983,7 @@
           <p:nvPr>
             <p:extLst>
               <p:ext uri="{D42A27DB-BD31-4B8C-83A1-F6EECF244321}">
-                <p14:modId xmlns:p14="http://schemas.microsoft.com/office/powerpoint/2010/main" val="196607029"/>
+                <p14:modId xmlns:p14="http://schemas.microsoft.com/office/powerpoint/2010/main" val="1454759510"/>
               </p:ext>
             </p:extLst>
           </p:nvPr>
@@ -32506,7 +32506,7 @@
           <p:nvPr>
             <p:extLst>
               <p:ext uri="{D42A27DB-BD31-4B8C-83A1-F6EECF244321}">
-                <p14:modId xmlns:p14="http://schemas.microsoft.com/office/powerpoint/2010/main" val="1414547428"/>
+                <p14:modId xmlns:p14="http://schemas.microsoft.com/office/powerpoint/2010/main" val="3182249395"/>
               </p:ext>
             </p:extLst>
           </p:nvPr>
